--- a/els-analysis-deck.pptx
+++ b/els-analysis-deck.pptx
@@ -2519,7 +2519,7 @@
                 <a:ea typeface="맑은 고딕" pitchFamily="34" charset="-122"/>
                 <a:cs typeface="맑은 고딕" pitchFamily="34" charset="-120"/>
               </a:rPr>
-              <a:t>ELS 제안서</a:t>
+              <a:t>ELS 분석자료</a:t>
             </a:r>
             <a:endParaRPr lang="en-US" sz="4200" dirty="0"/>
           </a:p>
@@ -4723,7 +4723,7 @@
                 <a:ea typeface="맑은 고딕" pitchFamily="34" charset="-122"/>
                 <a:cs typeface="맑은 고딕" pitchFamily="34" charset="-120"/>
               </a:rPr>
-              <a:t>이번 회차에서 가장 높은 수익률입니다. 넣는 순간의 값어치가 크게 깎이지 않은 상품 중에서 골랐습니다.</a:t>
+              <a:t>넣는 순간의 값어치가 크게 깎이지 않은 상품 중에서 골랐습니다. 이보다 높은 제38165회(연 23%)는 바로 위 자리에 이미 올라 있어, 그다음으로 높은 수익률입니다.</a:t>
             </a:r>
             <a:endParaRPr lang="en-US" sz="1150" dirty="0"/>
           </a:p>

--- a/els-analysis-deck.pptx
+++ b/els-analysis-deck.pptx
@@ -20,9 +20,10 @@
     <p:sldId id="268" r:id="rId14"/>
     <p:sldId id="269" r:id="rId15"/>
     <p:sldId id="270" r:id="rId16"/>
+    <p:sldId id="271" r:id="rId17"/>
   </p:sldIdLst>
   <p:notesMasterIdLst>
-    <p:notesMasterId r:id="rId17"/>
+    <p:notesMasterId r:id="rId18"/>
   </p:notesMasterIdLst>
   <p:sldSz cx="12192000" cy="6858000"/>
   <p:notesSz cx="6858000" cy="12192000"/>
@@ -424,6 +425,3251 @@
 </c:chartSpace>
 </file>
 
+<file path=ppt/charts/chart2.xml><?xml version="1.0" encoding="utf-8"?>
+<c:chartSpace xmlns:c="http://schemas.openxmlformats.org/drawingml/2006/chart" xmlns:a="http://schemas.openxmlformats.org/drawingml/2006/main" xmlns:r="http://schemas.openxmlformats.org/officeDocument/2006/relationships">
+  <c:date1904 val="0"/>
+  <c:roundedCorners val="1"/>
+  <c:chart>
+    <c:autoTitleDeleted val="1"/>
+    <c:plotArea>
+      <c:layout/>
+      <c:scatterChart>
+        <c:scatterStyle val="lineMarker"/>
+        <c:varyColors val="0"/>
+        <c:ser>
+          <c:idx val="0"/>
+          <c:order val="0"/>
+          <c:tx>
+            <c:strRef>
+              <c:f>Sheet1!$B$1</c:f>
+              <c:strCache>
+                <c:ptCount val="1"/>
+                <c:pt idx="0">
+                  <c:v>제38152회 KOSPI200</c:v>
+                </c:pt>
+              </c:strCache>
+            </c:strRef>
+          </c:tx>
+          <c:spPr>
+            <a:solidFill>
+              <a:srgbClr val="9AA6B2"/>
+            </a:solidFill>
+            <a:ln>
+              <a:noFill/>
+            </a:ln>
+            <a:effectLst/>
+          </c:spPr>
+          <c:marker>
+            <c:symbol val="circle"/>
+            <c:size val="9"/>
+            <c:spPr>
+              <a:solidFill>
+                <a:srgbClr val="9AA6B2"/>
+              </a:solidFill>
+              <a:ln w="9525" cap="flat">
+                <a:solidFill>
+                  <a:srgbClr val="9AA6B2"/>
+                </a:solidFill>
+                <a:prstDash val="solid"/>
+                <a:round/>
+              </a:ln>
+              <a:effectLst/>
+            </c:spPr>
+          </c:marker>
+          <c:xVal>
+            <c:numRef>
+              <c:f>Sheet1!$A$2:$A$19</c:f>
+              <c:numCache>
+                <c:formatCode>General</c:formatCode>
+                <c:ptCount val="18"/>
+                <c:pt idx="0">
+                  <c:v>11.7</c:v>
+                </c:pt>
+                <c:pt idx="1">
+                  <c:v>12.8</c:v>
+                </c:pt>
+                <c:pt idx="2">
+                  <c:v>14.9</c:v>
+                </c:pt>
+                <c:pt idx="3">
+                  <c:v>16.7</c:v>
+                </c:pt>
+                <c:pt idx="4">
+                  <c:v>10.8</c:v>
+                </c:pt>
+                <c:pt idx="5">
+                  <c:v>14.7</c:v>
+                </c:pt>
+                <c:pt idx="6">
+                  <c:v>12.6</c:v>
+                </c:pt>
+                <c:pt idx="7">
+                  <c:v>16.5</c:v>
+                </c:pt>
+                <c:pt idx="8">
+                  <c:v>18.3</c:v>
+                </c:pt>
+                <c:pt idx="9">
+                  <c:v>21.1</c:v>
+                </c:pt>
+                <c:pt idx="10">
+                  <c:v>11.5</c:v>
+                </c:pt>
+                <c:pt idx="11">
+                  <c:v>22.8</c:v>
+                </c:pt>
+                <c:pt idx="12">
+                  <c:v>20</c:v>
+                </c:pt>
+                <c:pt idx="13">
+                  <c:v>15.9</c:v>
+                </c:pt>
+                <c:pt idx="14">
+                  <c:v>32.5</c:v>
+                </c:pt>
+                <c:pt idx="15">
+                  <c:v>41.5</c:v>
+                </c:pt>
+                <c:pt idx="16">
+                  <c:v>49.1</c:v>
+                </c:pt>
+                <c:pt idx="17">
+                  <c:v>44.8</c:v>
+                </c:pt>
+              </c:numCache>
+            </c:numRef>
+          </c:xVal>
+          <c:yVal>
+            <c:numRef>
+              <c:f>Sheet1!$B$2:$B$19</c:f>
+              <c:numCache>
+                <c:formatCode>General</c:formatCode>
+                <c:ptCount val="18"/>
+                <c:pt idx="0">
+                  <c:v>10</c:v>
+                </c:pt>
+                <c:pt idx="1">
+                  <c:v/>
+                </c:pt>
+                <c:pt idx="2">
+                  <c:v/>
+                </c:pt>
+                <c:pt idx="3">
+                  <c:v/>
+                </c:pt>
+                <c:pt idx="4">
+                  <c:v/>
+                </c:pt>
+                <c:pt idx="5">
+                  <c:v/>
+                </c:pt>
+                <c:pt idx="6">
+                  <c:v/>
+                </c:pt>
+                <c:pt idx="7">
+                  <c:v/>
+                </c:pt>
+                <c:pt idx="8">
+                  <c:v/>
+                </c:pt>
+                <c:pt idx="9">
+                  <c:v/>
+                </c:pt>
+                <c:pt idx="10">
+                  <c:v/>
+                </c:pt>
+                <c:pt idx="11">
+                  <c:v/>
+                </c:pt>
+                <c:pt idx="12">
+                  <c:v/>
+                </c:pt>
+                <c:pt idx="13">
+                  <c:v/>
+                </c:pt>
+                <c:pt idx="14">
+                  <c:v/>
+                </c:pt>
+                <c:pt idx="15">
+                  <c:v/>
+                </c:pt>
+                <c:pt idx="16">
+                  <c:v/>
+                </c:pt>
+                <c:pt idx="17">
+                  <c:v/>
+                </c:pt>
+              </c:numCache>
+            </c:numRef>
+          </c:yVal>
+          <c:smooth val="0"/>
+        </c:ser>
+        <c:ser>
+          <c:idx val="1"/>
+          <c:order val="1"/>
+          <c:tx>
+            <c:strRef>
+              <c:f>Sheet1!$C$1</c:f>
+              <c:strCache>
+                <c:ptCount val="1"/>
+                <c:pt idx="0">
+                  <c:v>제38153회 S&amp;P500·KOSPI200·Nikkei225</c:v>
+                </c:pt>
+              </c:strCache>
+            </c:strRef>
+          </c:tx>
+          <c:spPr>
+            <a:solidFill>
+              <a:srgbClr val="9AA6B2"/>
+            </a:solidFill>
+            <a:ln>
+              <a:noFill/>
+            </a:ln>
+            <a:effectLst/>
+          </c:spPr>
+          <c:marker>
+            <c:symbol val="circle"/>
+            <c:size val="9"/>
+            <c:spPr>
+              <a:solidFill>
+                <a:srgbClr val="9AA6B2"/>
+              </a:solidFill>
+              <a:ln w="9525" cap="flat">
+                <a:solidFill>
+                  <a:srgbClr val="9AA6B2"/>
+                </a:solidFill>
+                <a:prstDash val="solid"/>
+                <a:round/>
+              </a:ln>
+              <a:effectLst/>
+            </c:spPr>
+          </c:marker>
+          <c:xVal>
+            <c:numRef>
+              <c:f>Sheet1!$A$2:$A$19</c:f>
+              <c:numCache>
+                <c:formatCode>General</c:formatCode>
+                <c:ptCount val="18"/>
+                <c:pt idx="0">
+                  <c:v>11.7</c:v>
+                </c:pt>
+                <c:pt idx="1">
+                  <c:v>12.8</c:v>
+                </c:pt>
+                <c:pt idx="2">
+                  <c:v>14.9</c:v>
+                </c:pt>
+                <c:pt idx="3">
+                  <c:v>16.7</c:v>
+                </c:pt>
+                <c:pt idx="4">
+                  <c:v>10.8</c:v>
+                </c:pt>
+                <c:pt idx="5">
+                  <c:v>14.7</c:v>
+                </c:pt>
+                <c:pt idx="6">
+                  <c:v>12.6</c:v>
+                </c:pt>
+                <c:pt idx="7">
+                  <c:v>16.5</c:v>
+                </c:pt>
+                <c:pt idx="8">
+                  <c:v>18.3</c:v>
+                </c:pt>
+                <c:pt idx="9">
+                  <c:v>21.1</c:v>
+                </c:pt>
+                <c:pt idx="10">
+                  <c:v>11.5</c:v>
+                </c:pt>
+                <c:pt idx="11">
+                  <c:v>22.8</c:v>
+                </c:pt>
+                <c:pt idx="12">
+                  <c:v>20</c:v>
+                </c:pt>
+                <c:pt idx="13">
+                  <c:v>15.9</c:v>
+                </c:pt>
+                <c:pt idx="14">
+                  <c:v>32.5</c:v>
+                </c:pt>
+                <c:pt idx="15">
+                  <c:v>41.5</c:v>
+                </c:pt>
+                <c:pt idx="16">
+                  <c:v>49.1</c:v>
+                </c:pt>
+                <c:pt idx="17">
+                  <c:v>44.8</c:v>
+                </c:pt>
+              </c:numCache>
+            </c:numRef>
+          </c:xVal>
+          <c:yVal>
+            <c:numRef>
+              <c:f>Sheet1!$C$2:$C$19</c:f>
+              <c:numCache>
+                <c:formatCode>General</c:formatCode>
+                <c:ptCount val="18"/>
+                <c:pt idx="0">
+                  <c:v/>
+                </c:pt>
+                <c:pt idx="1">
+                  <c:v>10.3</c:v>
+                </c:pt>
+                <c:pt idx="2">
+                  <c:v/>
+                </c:pt>
+                <c:pt idx="3">
+                  <c:v/>
+                </c:pt>
+                <c:pt idx="4">
+                  <c:v/>
+                </c:pt>
+                <c:pt idx="5">
+                  <c:v/>
+                </c:pt>
+                <c:pt idx="6">
+                  <c:v/>
+                </c:pt>
+                <c:pt idx="7">
+                  <c:v/>
+                </c:pt>
+                <c:pt idx="8">
+                  <c:v/>
+                </c:pt>
+                <c:pt idx="9">
+                  <c:v/>
+                </c:pt>
+                <c:pt idx="10">
+                  <c:v/>
+                </c:pt>
+                <c:pt idx="11">
+                  <c:v/>
+                </c:pt>
+                <c:pt idx="12">
+                  <c:v/>
+                </c:pt>
+                <c:pt idx="13">
+                  <c:v/>
+                </c:pt>
+                <c:pt idx="14">
+                  <c:v/>
+                </c:pt>
+                <c:pt idx="15">
+                  <c:v/>
+                </c:pt>
+                <c:pt idx="16">
+                  <c:v/>
+                </c:pt>
+                <c:pt idx="17">
+                  <c:v/>
+                </c:pt>
+              </c:numCache>
+            </c:numRef>
+          </c:yVal>
+          <c:smooth val="0"/>
+        </c:ser>
+        <c:ser>
+          <c:idx val="2"/>
+          <c:order val="2"/>
+          <c:tx>
+            <c:strRef>
+              <c:f>Sheet1!$D$1</c:f>
+              <c:strCache>
+                <c:ptCount val="1"/>
+                <c:pt idx="0">
+                  <c:v>제38154회 EuroStoxx50·S&amp;P500·KOSPI200</c:v>
+                </c:pt>
+              </c:strCache>
+            </c:strRef>
+          </c:tx>
+          <c:spPr>
+            <a:solidFill>
+              <a:srgbClr val="9AA6B2"/>
+            </a:solidFill>
+            <a:ln>
+              <a:noFill/>
+            </a:ln>
+            <a:effectLst/>
+          </c:spPr>
+          <c:marker>
+            <c:symbol val="circle"/>
+            <c:size val="9"/>
+            <c:spPr>
+              <a:solidFill>
+                <a:srgbClr val="9AA6B2"/>
+              </a:solidFill>
+              <a:ln w="9525" cap="flat">
+                <a:solidFill>
+                  <a:srgbClr val="9AA6B2"/>
+                </a:solidFill>
+                <a:prstDash val="solid"/>
+                <a:round/>
+              </a:ln>
+              <a:effectLst/>
+            </c:spPr>
+          </c:marker>
+          <c:xVal>
+            <c:numRef>
+              <c:f>Sheet1!$A$2:$A$19</c:f>
+              <c:numCache>
+                <c:formatCode>General</c:formatCode>
+                <c:ptCount val="18"/>
+                <c:pt idx="0">
+                  <c:v>11.7</c:v>
+                </c:pt>
+                <c:pt idx="1">
+                  <c:v>12.8</c:v>
+                </c:pt>
+                <c:pt idx="2">
+                  <c:v>14.9</c:v>
+                </c:pt>
+                <c:pt idx="3">
+                  <c:v>16.7</c:v>
+                </c:pt>
+                <c:pt idx="4">
+                  <c:v>10.8</c:v>
+                </c:pt>
+                <c:pt idx="5">
+                  <c:v>14.7</c:v>
+                </c:pt>
+                <c:pt idx="6">
+                  <c:v>12.6</c:v>
+                </c:pt>
+                <c:pt idx="7">
+                  <c:v>16.5</c:v>
+                </c:pt>
+                <c:pt idx="8">
+                  <c:v>18.3</c:v>
+                </c:pt>
+                <c:pt idx="9">
+                  <c:v>21.1</c:v>
+                </c:pt>
+                <c:pt idx="10">
+                  <c:v>11.5</c:v>
+                </c:pt>
+                <c:pt idx="11">
+                  <c:v>22.8</c:v>
+                </c:pt>
+                <c:pt idx="12">
+                  <c:v>20</c:v>
+                </c:pt>
+                <c:pt idx="13">
+                  <c:v>15.9</c:v>
+                </c:pt>
+                <c:pt idx="14">
+                  <c:v>32.5</c:v>
+                </c:pt>
+                <c:pt idx="15">
+                  <c:v>41.5</c:v>
+                </c:pt>
+                <c:pt idx="16">
+                  <c:v>49.1</c:v>
+                </c:pt>
+                <c:pt idx="17">
+                  <c:v>44.8</c:v>
+                </c:pt>
+              </c:numCache>
+            </c:numRef>
+          </c:xVal>
+          <c:yVal>
+            <c:numRef>
+              <c:f>Sheet1!$D$2:$D$19</c:f>
+              <c:numCache>
+                <c:formatCode>General</c:formatCode>
+                <c:ptCount val="18"/>
+                <c:pt idx="0">
+                  <c:v/>
+                </c:pt>
+                <c:pt idx="1">
+                  <c:v/>
+                </c:pt>
+                <c:pt idx="2">
+                  <c:v>10.4</c:v>
+                </c:pt>
+                <c:pt idx="3">
+                  <c:v/>
+                </c:pt>
+                <c:pt idx="4">
+                  <c:v/>
+                </c:pt>
+                <c:pt idx="5">
+                  <c:v/>
+                </c:pt>
+                <c:pt idx="6">
+                  <c:v/>
+                </c:pt>
+                <c:pt idx="7">
+                  <c:v/>
+                </c:pt>
+                <c:pt idx="8">
+                  <c:v/>
+                </c:pt>
+                <c:pt idx="9">
+                  <c:v/>
+                </c:pt>
+                <c:pt idx="10">
+                  <c:v/>
+                </c:pt>
+                <c:pt idx="11">
+                  <c:v/>
+                </c:pt>
+                <c:pt idx="12">
+                  <c:v/>
+                </c:pt>
+                <c:pt idx="13">
+                  <c:v/>
+                </c:pt>
+                <c:pt idx="14">
+                  <c:v/>
+                </c:pt>
+                <c:pt idx="15">
+                  <c:v/>
+                </c:pt>
+                <c:pt idx="16">
+                  <c:v/>
+                </c:pt>
+                <c:pt idx="17">
+                  <c:v/>
+                </c:pt>
+              </c:numCache>
+            </c:numRef>
+          </c:yVal>
+          <c:smooth val="0"/>
+        </c:ser>
+        <c:ser>
+          <c:idx val="3"/>
+          <c:order val="3"/>
+          <c:tx>
+            <c:strRef>
+              <c:f>Sheet1!$E$1</c:f>
+              <c:strCache>
+                <c:ptCount val="1"/>
+                <c:pt idx="0">
+                  <c:v>제38155회 KOSPI200·HSCEI·Nikkei225</c:v>
+                </c:pt>
+              </c:strCache>
+            </c:strRef>
+          </c:tx>
+          <c:spPr>
+            <a:solidFill>
+              <a:srgbClr val="9AA6B2"/>
+            </a:solidFill>
+            <a:ln>
+              <a:noFill/>
+            </a:ln>
+            <a:effectLst/>
+          </c:spPr>
+          <c:marker>
+            <c:symbol val="circle"/>
+            <c:size val="9"/>
+            <c:spPr>
+              <a:solidFill>
+                <a:srgbClr val="9AA6B2"/>
+              </a:solidFill>
+              <a:ln w="9525" cap="flat">
+                <a:solidFill>
+                  <a:srgbClr val="9AA6B2"/>
+                </a:solidFill>
+                <a:prstDash val="solid"/>
+                <a:round/>
+              </a:ln>
+              <a:effectLst/>
+            </c:spPr>
+          </c:marker>
+          <c:xVal>
+            <c:numRef>
+              <c:f>Sheet1!$A$2:$A$19</c:f>
+              <c:numCache>
+                <c:formatCode>General</c:formatCode>
+                <c:ptCount val="18"/>
+                <c:pt idx="0">
+                  <c:v>11.7</c:v>
+                </c:pt>
+                <c:pt idx="1">
+                  <c:v>12.8</c:v>
+                </c:pt>
+                <c:pt idx="2">
+                  <c:v>14.9</c:v>
+                </c:pt>
+                <c:pt idx="3">
+                  <c:v>16.7</c:v>
+                </c:pt>
+                <c:pt idx="4">
+                  <c:v>10.8</c:v>
+                </c:pt>
+                <c:pt idx="5">
+                  <c:v>14.7</c:v>
+                </c:pt>
+                <c:pt idx="6">
+                  <c:v>12.6</c:v>
+                </c:pt>
+                <c:pt idx="7">
+                  <c:v>16.5</c:v>
+                </c:pt>
+                <c:pt idx="8">
+                  <c:v>18.3</c:v>
+                </c:pt>
+                <c:pt idx="9">
+                  <c:v>21.1</c:v>
+                </c:pt>
+                <c:pt idx="10">
+                  <c:v>11.5</c:v>
+                </c:pt>
+                <c:pt idx="11">
+                  <c:v>22.8</c:v>
+                </c:pt>
+                <c:pt idx="12">
+                  <c:v>20</c:v>
+                </c:pt>
+                <c:pt idx="13">
+                  <c:v>15.9</c:v>
+                </c:pt>
+                <c:pt idx="14">
+                  <c:v>32.5</c:v>
+                </c:pt>
+                <c:pt idx="15">
+                  <c:v>41.5</c:v>
+                </c:pt>
+                <c:pt idx="16">
+                  <c:v>49.1</c:v>
+                </c:pt>
+                <c:pt idx="17">
+                  <c:v>44.8</c:v>
+                </c:pt>
+              </c:numCache>
+            </c:numRef>
+          </c:xVal>
+          <c:yVal>
+            <c:numRef>
+              <c:f>Sheet1!$E$2:$E$19</c:f>
+              <c:numCache>
+                <c:formatCode>General</c:formatCode>
+                <c:ptCount val="18"/>
+                <c:pt idx="0">
+                  <c:v/>
+                </c:pt>
+                <c:pt idx="1">
+                  <c:v/>
+                </c:pt>
+                <c:pt idx="2">
+                  <c:v/>
+                </c:pt>
+                <c:pt idx="3">
+                  <c:v>11.8</c:v>
+                </c:pt>
+                <c:pt idx="4">
+                  <c:v/>
+                </c:pt>
+                <c:pt idx="5">
+                  <c:v/>
+                </c:pt>
+                <c:pt idx="6">
+                  <c:v/>
+                </c:pt>
+                <c:pt idx="7">
+                  <c:v/>
+                </c:pt>
+                <c:pt idx="8">
+                  <c:v/>
+                </c:pt>
+                <c:pt idx="9">
+                  <c:v/>
+                </c:pt>
+                <c:pt idx="10">
+                  <c:v/>
+                </c:pt>
+                <c:pt idx="11">
+                  <c:v/>
+                </c:pt>
+                <c:pt idx="12">
+                  <c:v/>
+                </c:pt>
+                <c:pt idx="13">
+                  <c:v/>
+                </c:pt>
+                <c:pt idx="14">
+                  <c:v/>
+                </c:pt>
+                <c:pt idx="15">
+                  <c:v/>
+                </c:pt>
+                <c:pt idx="16">
+                  <c:v/>
+                </c:pt>
+                <c:pt idx="17">
+                  <c:v/>
+                </c:pt>
+              </c:numCache>
+            </c:numRef>
+          </c:yVal>
+          <c:smooth val="0"/>
+        </c:ser>
+        <c:ser>
+          <c:idx val="4"/>
+          <c:order val="4"/>
+          <c:tx>
+            <c:strRef>
+              <c:f>Sheet1!$F$1</c:f>
+              <c:strCache>
+                <c:ptCount val="1"/>
+                <c:pt idx="0">
+                  <c:v>제38156회 삼성전자·SK하이닉스</c:v>
+                </c:pt>
+              </c:strCache>
+            </c:strRef>
+          </c:tx>
+          <c:spPr>
+            <a:solidFill>
+              <a:srgbClr val="F58220"/>
+            </a:solidFill>
+            <a:ln>
+              <a:noFill/>
+            </a:ln>
+            <a:effectLst/>
+          </c:spPr>
+          <c:marker>
+            <c:symbol val="circle"/>
+            <c:size val="9"/>
+            <c:spPr>
+              <a:solidFill>
+                <a:srgbClr val="F58220"/>
+              </a:solidFill>
+              <a:ln w="9525" cap="flat">
+                <a:solidFill>
+                  <a:srgbClr val="F58220"/>
+                </a:solidFill>
+                <a:prstDash val="solid"/>
+                <a:round/>
+              </a:ln>
+              <a:effectLst/>
+            </c:spPr>
+          </c:marker>
+          <c:xVal>
+            <c:numRef>
+              <c:f>Sheet1!$A$2:$A$19</c:f>
+              <c:numCache>
+                <c:formatCode>General</c:formatCode>
+                <c:ptCount val="18"/>
+                <c:pt idx="0">
+                  <c:v>11.7</c:v>
+                </c:pt>
+                <c:pt idx="1">
+                  <c:v>12.8</c:v>
+                </c:pt>
+                <c:pt idx="2">
+                  <c:v>14.9</c:v>
+                </c:pt>
+                <c:pt idx="3">
+                  <c:v>16.7</c:v>
+                </c:pt>
+                <c:pt idx="4">
+                  <c:v>10.8</c:v>
+                </c:pt>
+                <c:pt idx="5">
+                  <c:v>14.7</c:v>
+                </c:pt>
+                <c:pt idx="6">
+                  <c:v>12.6</c:v>
+                </c:pt>
+                <c:pt idx="7">
+                  <c:v>16.5</c:v>
+                </c:pt>
+                <c:pt idx="8">
+                  <c:v>18.3</c:v>
+                </c:pt>
+                <c:pt idx="9">
+                  <c:v>21.1</c:v>
+                </c:pt>
+                <c:pt idx="10">
+                  <c:v>11.5</c:v>
+                </c:pt>
+                <c:pt idx="11">
+                  <c:v>22.8</c:v>
+                </c:pt>
+                <c:pt idx="12">
+                  <c:v>20</c:v>
+                </c:pt>
+                <c:pt idx="13">
+                  <c:v>15.9</c:v>
+                </c:pt>
+                <c:pt idx="14">
+                  <c:v>32.5</c:v>
+                </c:pt>
+                <c:pt idx="15">
+                  <c:v>41.5</c:v>
+                </c:pt>
+                <c:pt idx="16">
+                  <c:v>49.1</c:v>
+                </c:pt>
+                <c:pt idx="17">
+                  <c:v>44.8</c:v>
+                </c:pt>
+              </c:numCache>
+            </c:numRef>
+          </c:xVal>
+          <c:yVal>
+            <c:numRef>
+              <c:f>Sheet1!$F$2:$F$19</c:f>
+              <c:numCache>
+                <c:formatCode>General</c:formatCode>
+                <c:ptCount val="18"/>
+                <c:pt idx="0">
+                  <c:v/>
+                </c:pt>
+                <c:pt idx="1">
+                  <c:v/>
+                </c:pt>
+                <c:pt idx="2">
+                  <c:v/>
+                </c:pt>
+                <c:pt idx="3">
+                  <c:v/>
+                </c:pt>
+                <c:pt idx="4">
+                  <c:v>12</c:v>
+                </c:pt>
+                <c:pt idx="5">
+                  <c:v/>
+                </c:pt>
+                <c:pt idx="6">
+                  <c:v/>
+                </c:pt>
+                <c:pt idx="7">
+                  <c:v/>
+                </c:pt>
+                <c:pt idx="8">
+                  <c:v/>
+                </c:pt>
+                <c:pt idx="9">
+                  <c:v/>
+                </c:pt>
+                <c:pt idx="10">
+                  <c:v/>
+                </c:pt>
+                <c:pt idx="11">
+                  <c:v/>
+                </c:pt>
+                <c:pt idx="12">
+                  <c:v/>
+                </c:pt>
+                <c:pt idx="13">
+                  <c:v/>
+                </c:pt>
+                <c:pt idx="14">
+                  <c:v/>
+                </c:pt>
+                <c:pt idx="15">
+                  <c:v/>
+                </c:pt>
+                <c:pt idx="16">
+                  <c:v/>
+                </c:pt>
+                <c:pt idx="17">
+                  <c:v/>
+                </c:pt>
+              </c:numCache>
+            </c:numRef>
+          </c:yVal>
+          <c:smooth val="0"/>
+        </c:ser>
+        <c:ser>
+          <c:idx val="5"/>
+          <c:order val="5"/>
+          <c:tx>
+            <c:strRef>
+              <c:f>Sheet1!$G$1</c:f>
+              <c:strCache>
+                <c:ptCount val="1"/>
+                <c:pt idx="0">
+                  <c:v>제38157회 KOSPI200·SK하이닉스</c:v>
+                </c:pt>
+              </c:strCache>
+            </c:strRef>
+          </c:tx>
+          <c:spPr>
+            <a:solidFill>
+              <a:srgbClr val="9AA6B2"/>
+            </a:solidFill>
+            <a:ln>
+              <a:noFill/>
+            </a:ln>
+            <a:effectLst/>
+          </c:spPr>
+          <c:marker>
+            <c:symbol val="circle"/>
+            <c:size val="9"/>
+            <c:spPr>
+              <a:solidFill>
+                <a:srgbClr val="9AA6B2"/>
+              </a:solidFill>
+              <a:ln w="9525" cap="flat">
+                <a:solidFill>
+                  <a:srgbClr val="9AA6B2"/>
+                </a:solidFill>
+                <a:prstDash val="solid"/>
+                <a:round/>
+              </a:ln>
+              <a:effectLst/>
+            </c:spPr>
+          </c:marker>
+          <c:xVal>
+            <c:numRef>
+              <c:f>Sheet1!$A$2:$A$19</c:f>
+              <c:numCache>
+                <c:formatCode>General</c:formatCode>
+                <c:ptCount val="18"/>
+                <c:pt idx="0">
+                  <c:v>11.7</c:v>
+                </c:pt>
+                <c:pt idx="1">
+                  <c:v>12.8</c:v>
+                </c:pt>
+                <c:pt idx="2">
+                  <c:v>14.9</c:v>
+                </c:pt>
+                <c:pt idx="3">
+                  <c:v>16.7</c:v>
+                </c:pt>
+                <c:pt idx="4">
+                  <c:v>10.8</c:v>
+                </c:pt>
+                <c:pt idx="5">
+                  <c:v>14.7</c:v>
+                </c:pt>
+                <c:pt idx="6">
+                  <c:v>12.6</c:v>
+                </c:pt>
+                <c:pt idx="7">
+                  <c:v>16.5</c:v>
+                </c:pt>
+                <c:pt idx="8">
+                  <c:v>18.3</c:v>
+                </c:pt>
+                <c:pt idx="9">
+                  <c:v>21.1</c:v>
+                </c:pt>
+                <c:pt idx="10">
+                  <c:v>11.5</c:v>
+                </c:pt>
+                <c:pt idx="11">
+                  <c:v>22.8</c:v>
+                </c:pt>
+                <c:pt idx="12">
+                  <c:v>20</c:v>
+                </c:pt>
+                <c:pt idx="13">
+                  <c:v>15.9</c:v>
+                </c:pt>
+                <c:pt idx="14">
+                  <c:v>32.5</c:v>
+                </c:pt>
+                <c:pt idx="15">
+                  <c:v>41.5</c:v>
+                </c:pt>
+                <c:pt idx="16">
+                  <c:v>49.1</c:v>
+                </c:pt>
+                <c:pt idx="17">
+                  <c:v>44.8</c:v>
+                </c:pt>
+              </c:numCache>
+            </c:numRef>
+          </c:xVal>
+          <c:yVal>
+            <c:numRef>
+              <c:f>Sheet1!$G$2:$G$19</c:f>
+              <c:numCache>
+                <c:formatCode>General</c:formatCode>
+                <c:ptCount val="18"/>
+                <c:pt idx="0">
+                  <c:v/>
+                </c:pt>
+                <c:pt idx="1">
+                  <c:v/>
+                </c:pt>
+                <c:pt idx="2">
+                  <c:v/>
+                </c:pt>
+                <c:pt idx="3">
+                  <c:v/>
+                </c:pt>
+                <c:pt idx="4">
+                  <c:v/>
+                </c:pt>
+                <c:pt idx="5">
+                  <c:v>13.5</c:v>
+                </c:pt>
+                <c:pt idx="6">
+                  <c:v/>
+                </c:pt>
+                <c:pt idx="7">
+                  <c:v/>
+                </c:pt>
+                <c:pt idx="8">
+                  <c:v/>
+                </c:pt>
+                <c:pt idx="9">
+                  <c:v/>
+                </c:pt>
+                <c:pt idx="10">
+                  <c:v/>
+                </c:pt>
+                <c:pt idx="11">
+                  <c:v/>
+                </c:pt>
+                <c:pt idx="12">
+                  <c:v/>
+                </c:pt>
+                <c:pt idx="13">
+                  <c:v/>
+                </c:pt>
+                <c:pt idx="14">
+                  <c:v/>
+                </c:pt>
+                <c:pt idx="15">
+                  <c:v/>
+                </c:pt>
+                <c:pt idx="16">
+                  <c:v/>
+                </c:pt>
+                <c:pt idx="17">
+                  <c:v/>
+                </c:pt>
+              </c:numCache>
+            </c:numRef>
+          </c:yVal>
+          <c:smooth val="0"/>
+        </c:ser>
+        <c:ser>
+          <c:idx val="6"/>
+          <c:order val="6"/>
+          <c:tx>
+            <c:strRef>
+              <c:f>Sheet1!$H$1</c:f>
+              <c:strCache>
+                <c:ptCount val="1"/>
+                <c:pt idx="0">
+                  <c:v>제38158회 삼성전자·SK하이닉스</c:v>
+                </c:pt>
+              </c:strCache>
+            </c:strRef>
+          </c:tx>
+          <c:spPr>
+            <a:solidFill>
+              <a:srgbClr val="9AA6B2"/>
+            </a:solidFill>
+            <a:ln>
+              <a:noFill/>
+            </a:ln>
+            <a:effectLst/>
+          </c:spPr>
+          <c:marker>
+            <c:symbol val="circle"/>
+            <c:size val="9"/>
+            <c:spPr>
+              <a:solidFill>
+                <a:srgbClr val="9AA6B2"/>
+              </a:solidFill>
+              <a:ln w="9525" cap="flat">
+                <a:solidFill>
+                  <a:srgbClr val="9AA6B2"/>
+                </a:solidFill>
+                <a:prstDash val="solid"/>
+                <a:round/>
+              </a:ln>
+              <a:effectLst/>
+            </c:spPr>
+          </c:marker>
+          <c:xVal>
+            <c:numRef>
+              <c:f>Sheet1!$A$2:$A$19</c:f>
+              <c:numCache>
+                <c:formatCode>General</c:formatCode>
+                <c:ptCount val="18"/>
+                <c:pt idx="0">
+                  <c:v>11.7</c:v>
+                </c:pt>
+                <c:pt idx="1">
+                  <c:v>12.8</c:v>
+                </c:pt>
+                <c:pt idx="2">
+                  <c:v>14.9</c:v>
+                </c:pt>
+                <c:pt idx="3">
+                  <c:v>16.7</c:v>
+                </c:pt>
+                <c:pt idx="4">
+                  <c:v>10.8</c:v>
+                </c:pt>
+                <c:pt idx="5">
+                  <c:v>14.7</c:v>
+                </c:pt>
+                <c:pt idx="6">
+                  <c:v>12.6</c:v>
+                </c:pt>
+                <c:pt idx="7">
+                  <c:v>16.5</c:v>
+                </c:pt>
+                <c:pt idx="8">
+                  <c:v>18.3</c:v>
+                </c:pt>
+                <c:pt idx="9">
+                  <c:v>21.1</c:v>
+                </c:pt>
+                <c:pt idx="10">
+                  <c:v>11.5</c:v>
+                </c:pt>
+                <c:pt idx="11">
+                  <c:v>22.8</c:v>
+                </c:pt>
+                <c:pt idx="12">
+                  <c:v>20</c:v>
+                </c:pt>
+                <c:pt idx="13">
+                  <c:v>15.9</c:v>
+                </c:pt>
+                <c:pt idx="14">
+                  <c:v>32.5</c:v>
+                </c:pt>
+                <c:pt idx="15">
+                  <c:v>41.5</c:v>
+                </c:pt>
+                <c:pt idx="16">
+                  <c:v>49.1</c:v>
+                </c:pt>
+                <c:pt idx="17">
+                  <c:v>44.8</c:v>
+                </c:pt>
+              </c:numCache>
+            </c:numRef>
+          </c:xVal>
+          <c:yVal>
+            <c:numRef>
+              <c:f>Sheet1!$H$2:$H$19</c:f>
+              <c:numCache>
+                <c:formatCode>General</c:formatCode>
+                <c:ptCount val="18"/>
+                <c:pt idx="0">
+                  <c:v/>
+                </c:pt>
+                <c:pt idx="1">
+                  <c:v/>
+                </c:pt>
+                <c:pt idx="2">
+                  <c:v/>
+                </c:pt>
+                <c:pt idx="3">
+                  <c:v/>
+                </c:pt>
+                <c:pt idx="4">
+                  <c:v/>
+                </c:pt>
+                <c:pt idx="5">
+                  <c:v/>
+                </c:pt>
+                <c:pt idx="6">
+                  <c:v>14</c:v>
+                </c:pt>
+                <c:pt idx="7">
+                  <c:v/>
+                </c:pt>
+                <c:pt idx="8">
+                  <c:v/>
+                </c:pt>
+                <c:pt idx="9">
+                  <c:v/>
+                </c:pt>
+                <c:pt idx="10">
+                  <c:v/>
+                </c:pt>
+                <c:pt idx="11">
+                  <c:v/>
+                </c:pt>
+                <c:pt idx="12">
+                  <c:v/>
+                </c:pt>
+                <c:pt idx="13">
+                  <c:v/>
+                </c:pt>
+                <c:pt idx="14">
+                  <c:v/>
+                </c:pt>
+                <c:pt idx="15">
+                  <c:v/>
+                </c:pt>
+                <c:pt idx="16">
+                  <c:v/>
+                </c:pt>
+                <c:pt idx="17">
+                  <c:v/>
+                </c:pt>
+              </c:numCache>
+            </c:numRef>
+          </c:yVal>
+          <c:smooth val="0"/>
+        </c:ser>
+        <c:ser>
+          <c:idx val="7"/>
+          <c:order val="7"/>
+          <c:tx>
+            <c:strRef>
+              <c:f>Sheet1!$I$1</c:f>
+              <c:strCache>
+                <c:ptCount val="1"/>
+                <c:pt idx="0">
+                  <c:v>제38159회 KOSPI200·삼성전자</c:v>
+                </c:pt>
+              </c:strCache>
+            </c:strRef>
+          </c:tx>
+          <c:spPr>
+            <a:solidFill>
+              <a:srgbClr val="9AA6B2"/>
+            </a:solidFill>
+            <a:ln>
+              <a:noFill/>
+            </a:ln>
+            <a:effectLst/>
+          </c:spPr>
+          <c:marker>
+            <c:symbol val="circle"/>
+            <c:size val="9"/>
+            <c:spPr>
+              <a:solidFill>
+                <a:srgbClr val="9AA6B2"/>
+              </a:solidFill>
+              <a:ln w="9525" cap="flat">
+                <a:solidFill>
+                  <a:srgbClr val="9AA6B2"/>
+                </a:solidFill>
+                <a:prstDash val="solid"/>
+                <a:round/>
+              </a:ln>
+              <a:effectLst/>
+            </c:spPr>
+          </c:marker>
+          <c:xVal>
+            <c:numRef>
+              <c:f>Sheet1!$A$2:$A$19</c:f>
+              <c:numCache>
+                <c:formatCode>General</c:formatCode>
+                <c:ptCount val="18"/>
+                <c:pt idx="0">
+                  <c:v>11.7</c:v>
+                </c:pt>
+                <c:pt idx="1">
+                  <c:v>12.8</c:v>
+                </c:pt>
+                <c:pt idx="2">
+                  <c:v>14.9</c:v>
+                </c:pt>
+                <c:pt idx="3">
+                  <c:v>16.7</c:v>
+                </c:pt>
+                <c:pt idx="4">
+                  <c:v>10.8</c:v>
+                </c:pt>
+                <c:pt idx="5">
+                  <c:v>14.7</c:v>
+                </c:pt>
+                <c:pt idx="6">
+                  <c:v>12.6</c:v>
+                </c:pt>
+                <c:pt idx="7">
+                  <c:v>16.5</c:v>
+                </c:pt>
+                <c:pt idx="8">
+                  <c:v>18.3</c:v>
+                </c:pt>
+                <c:pt idx="9">
+                  <c:v>21.1</c:v>
+                </c:pt>
+                <c:pt idx="10">
+                  <c:v>11.5</c:v>
+                </c:pt>
+                <c:pt idx="11">
+                  <c:v>22.8</c:v>
+                </c:pt>
+                <c:pt idx="12">
+                  <c:v>20</c:v>
+                </c:pt>
+                <c:pt idx="13">
+                  <c:v>15.9</c:v>
+                </c:pt>
+                <c:pt idx="14">
+                  <c:v>32.5</c:v>
+                </c:pt>
+                <c:pt idx="15">
+                  <c:v>41.5</c:v>
+                </c:pt>
+                <c:pt idx="16">
+                  <c:v>49.1</c:v>
+                </c:pt>
+                <c:pt idx="17">
+                  <c:v>44.8</c:v>
+                </c:pt>
+              </c:numCache>
+            </c:numRef>
+          </c:xVal>
+          <c:yVal>
+            <c:numRef>
+              <c:f>Sheet1!$I$2:$I$19</c:f>
+              <c:numCache>
+                <c:formatCode>General</c:formatCode>
+                <c:ptCount val="18"/>
+                <c:pt idx="0">
+                  <c:v/>
+                </c:pt>
+                <c:pt idx="1">
+                  <c:v/>
+                </c:pt>
+                <c:pt idx="2">
+                  <c:v/>
+                </c:pt>
+                <c:pt idx="3">
+                  <c:v/>
+                </c:pt>
+                <c:pt idx="4">
+                  <c:v/>
+                </c:pt>
+                <c:pt idx="5">
+                  <c:v/>
+                </c:pt>
+                <c:pt idx="6">
+                  <c:v/>
+                </c:pt>
+                <c:pt idx="7">
+                  <c:v>15.6</c:v>
+                </c:pt>
+                <c:pt idx="8">
+                  <c:v/>
+                </c:pt>
+                <c:pt idx="9">
+                  <c:v/>
+                </c:pt>
+                <c:pt idx="10">
+                  <c:v/>
+                </c:pt>
+                <c:pt idx="11">
+                  <c:v/>
+                </c:pt>
+                <c:pt idx="12">
+                  <c:v/>
+                </c:pt>
+                <c:pt idx="13">
+                  <c:v/>
+                </c:pt>
+                <c:pt idx="14">
+                  <c:v/>
+                </c:pt>
+                <c:pt idx="15">
+                  <c:v/>
+                </c:pt>
+                <c:pt idx="16">
+                  <c:v/>
+                </c:pt>
+                <c:pt idx="17">
+                  <c:v/>
+                </c:pt>
+              </c:numCache>
+            </c:numRef>
+          </c:yVal>
+          <c:smooth val="0"/>
+        </c:ser>
+        <c:ser>
+          <c:idx val="8"/>
+          <c:order val="8"/>
+          <c:tx>
+            <c:strRef>
+              <c:f>Sheet1!$J$1</c:f>
+              <c:strCache>
+                <c:ptCount val="1"/>
+                <c:pt idx="0">
+                  <c:v>제38160회 삼성전자·SK하이닉스</c:v>
+                </c:pt>
+              </c:strCache>
+            </c:strRef>
+          </c:tx>
+          <c:spPr>
+            <a:solidFill>
+              <a:srgbClr val="9AA6B2"/>
+            </a:solidFill>
+            <a:ln>
+              <a:noFill/>
+            </a:ln>
+            <a:effectLst/>
+          </c:spPr>
+          <c:marker>
+            <c:symbol val="circle"/>
+            <c:size val="9"/>
+            <c:spPr>
+              <a:solidFill>
+                <a:srgbClr val="9AA6B2"/>
+              </a:solidFill>
+              <a:ln w="9525" cap="flat">
+                <a:solidFill>
+                  <a:srgbClr val="9AA6B2"/>
+                </a:solidFill>
+                <a:prstDash val="solid"/>
+                <a:round/>
+              </a:ln>
+              <a:effectLst/>
+            </c:spPr>
+          </c:marker>
+          <c:xVal>
+            <c:numRef>
+              <c:f>Sheet1!$A$2:$A$19</c:f>
+              <c:numCache>
+                <c:formatCode>General</c:formatCode>
+                <c:ptCount val="18"/>
+                <c:pt idx="0">
+                  <c:v>11.7</c:v>
+                </c:pt>
+                <c:pt idx="1">
+                  <c:v>12.8</c:v>
+                </c:pt>
+                <c:pt idx="2">
+                  <c:v>14.9</c:v>
+                </c:pt>
+                <c:pt idx="3">
+                  <c:v>16.7</c:v>
+                </c:pt>
+                <c:pt idx="4">
+                  <c:v>10.8</c:v>
+                </c:pt>
+                <c:pt idx="5">
+                  <c:v>14.7</c:v>
+                </c:pt>
+                <c:pt idx="6">
+                  <c:v>12.6</c:v>
+                </c:pt>
+                <c:pt idx="7">
+                  <c:v>16.5</c:v>
+                </c:pt>
+                <c:pt idx="8">
+                  <c:v>18.3</c:v>
+                </c:pt>
+                <c:pt idx="9">
+                  <c:v>21.1</c:v>
+                </c:pt>
+                <c:pt idx="10">
+                  <c:v>11.5</c:v>
+                </c:pt>
+                <c:pt idx="11">
+                  <c:v>22.8</c:v>
+                </c:pt>
+                <c:pt idx="12">
+                  <c:v>20</c:v>
+                </c:pt>
+                <c:pt idx="13">
+                  <c:v>15.9</c:v>
+                </c:pt>
+                <c:pt idx="14">
+                  <c:v>32.5</c:v>
+                </c:pt>
+                <c:pt idx="15">
+                  <c:v>41.5</c:v>
+                </c:pt>
+                <c:pt idx="16">
+                  <c:v>49.1</c:v>
+                </c:pt>
+                <c:pt idx="17">
+                  <c:v>44.8</c:v>
+                </c:pt>
+              </c:numCache>
+            </c:numRef>
+          </c:xVal>
+          <c:yVal>
+            <c:numRef>
+              <c:f>Sheet1!$J$2:$J$19</c:f>
+              <c:numCache>
+                <c:formatCode>General</c:formatCode>
+                <c:ptCount val="18"/>
+                <c:pt idx="0">
+                  <c:v/>
+                </c:pt>
+                <c:pt idx="1">
+                  <c:v/>
+                </c:pt>
+                <c:pt idx="2">
+                  <c:v/>
+                </c:pt>
+                <c:pt idx="3">
+                  <c:v/>
+                </c:pt>
+                <c:pt idx="4">
+                  <c:v/>
+                </c:pt>
+                <c:pt idx="5">
+                  <c:v/>
+                </c:pt>
+                <c:pt idx="6">
+                  <c:v/>
+                </c:pt>
+                <c:pt idx="7">
+                  <c:v/>
+                </c:pt>
+                <c:pt idx="8">
+                  <c:v>19.2</c:v>
+                </c:pt>
+                <c:pt idx="9">
+                  <c:v/>
+                </c:pt>
+                <c:pt idx="10">
+                  <c:v/>
+                </c:pt>
+                <c:pt idx="11">
+                  <c:v/>
+                </c:pt>
+                <c:pt idx="12">
+                  <c:v/>
+                </c:pt>
+                <c:pt idx="13">
+                  <c:v/>
+                </c:pt>
+                <c:pt idx="14">
+                  <c:v/>
+                </c:pt>
+                <c:pt idx="15">
+                  <c:v/>
+                </c:pt>
+                <c:pt idx="16">
+                  <c:v/>
+                </c:pt>
+                <c:pt idx="17">
+                  <c:v/>
+                </c:pt>
+              </c:numCache>
+            </c:numRef>
+          </c:yVal>
+          <c:smooth val="0"/>
+        </c:ser>
+        <c:ser>
+          <c:idx val="9"/>
+          <c:order val="9"/>
+          <c:tx>
+            <c:strRef>
+              <c:f>Sheet1!$K$1</c:f>
+              <c:strCache>
+                <c:ptCount val="1"/>
+                <c:pt idx="0">
+                  <c:v>제38161회 S&amp;P500·KOSPI200·SK하이닉스</c:v>
+                </c:pt>
+              </c:strCache>
+            </c:strRef>
+          </c:tx>
+          <c:spPr>
+            <a:solidFill>
+              <a:srgbClr val="F58220"/>
+            </a:solidFill>
+            <a:ln>
+              <a:noFill/>
+            </a:ln>
+            <a:effectLst/>
+          </c:spPr>
+          <c:marker>
+            <c:symbol val="circle"/>
+            <c:size val="9"/>
+            <c:spPr>
+              <a:solidFill>
+                <a:srgbClr val="F58220"/>
+              </a:solidFill>
+              <a:ln w="9525" cap="flat">
+                <a:solidFill>
+                  <a:srgbClr val="F58220"/>
+                </a:solidFill>
+                <a:prstDash val="solid"/>
+                <a:round/>
+              </a:ln>
+              <a:effectLst/>
+            </c:spPr>
+          </c:marker>
+          <c:xVal>
+            <c:numRef>
+              <c:f>Sheet1!$A$2:$A$19</c:f>
+              <c:numCache>
+                <c:formatCode>General</c:formatCode>
+                <c:ptCount val="18"/>
+                <c:pt idx="0">
+                  <c:v>11.7</c:v>
+                </c:pt>
+                <c:pt idx="1">
+                  <c:v>12.8</c:v>
+                </c:pt>
+                <c:pt idx="2">
+                  <c:v>14.9</c:v>
+                </c:pt>
+                <c:pt idx="3">
+                  <c:v>16.7</c:v>
+                </c:pt>
+                <c:pt idx="4">
+                  <c:v>10.8</c:v>
+                </c:pt>
+                <c:pt idx="5">
+                  <c:v>14.7</c:v>
+                </c:pt>
+                <c:pt idx="6">
+                  <c:v>12.6</c:v>
+                </c:pt>
+                <c:pt idx="7">
+                  <c:v>16.5</c:v>
+                </c:pt>
+                <c:pt idx="8">
+                  <c:v>18.3</c:v>
+                </c:pt>
+                <c:pt idx="9">
+                  <c:v>21.1</c:v>
+                </c:pt>
+                <c:pt idx="10">
+                  <c:v>11.5</c:v>
+                </c:pt>
+                <c:pt idx="11">
+                  <c:v>22.8</c:v>
+                </c:pt>
+                <c:pt idx="12">
+                  <c:v>20</c:v>
+                </c:pt>
+                <c:pt idx="13">
+                  <c:v>15.9</c:v>
+                </c:pt>
+                <c:pt idx="14">
+                  <c:v>32.5</c:v>
+                </c:pt>
+                <c:pt idx="15">
+                  <c:v>41.5</c:v>
+                </c:pt>
+                <c:pt idx="16">
+                  <c:v>49.1</c:v>
+                </c:pt>
+                <c:pt idx="17">
+                  <c:v>44.8</c:v>
+                </c:pt>
+              </c:numCache>
+            </c:numRef>
+          </c:xVal>
+          <c:yVal>
+            <c:numRef>
+              <c:f>Sheet1!$K$2:$K$19</c:f>
+              <c:numCache>
+                <c:formatCode>General</c:formatCode>
+                <c:ptCount val="18"/>
+                <c:pt idx="0">
+                  <c:v/>
+                </c:pt>
+                <c:pt idx="1">
+                  <c:v/>
+                </c:pt>
+                <c:pt idx="2">
+                  <c:v/>
+                </c:pt>
+                <c:pt idx="3">
+                  <c:v/>
+                </c:pt>
+                <c:pt idx="4">
+                  <c:v/>
+                </c:pt>
+                <c:pt idx="5">
+                  <c:v/>
+                </c:pt>
+                <c:pt idx="6">
+                  <c:v/>
+                </c:pt>
+                <c:pt idx="7">
+                  <c:v/>
+                </c:pt>
+                <c:pt idx="8">
+                  <c:v/>
+                </c:pt>
+                <c:pt idx="9">
+                  <c:v>21.1</c:v>
+                </c:pt>
+                <c:pt idx="10">
+                  <c:v/>
+                </c:pt>
+                <c:pt idx="11">
+                  <c:v/>
+                </c:pt>
+                <c:pt idx="12">
+                  <c:v/>
+                </c:pt>
+                <c:pt idx="13">
+                  <c:v/>
+                </c:pt>
+                <c:pt idx="14">
+                  <c:v/>
+                </c:pt>
+                <c:pt idx="15">
+                  <c:v/>
+                </c:pt>
+                <c:pt idx="16">
+                  <c:v/>
+                </c:pt>
+                <c:pt idx="17">
+                  <c:v/>
+                </c:pt>
+              </c:numCache>
+            </c:numRef>
+          </c:yVal>
+          <c:smooth val="0"/>
+        </c:ser>
+        <c:ser>
+          <c:idx val="10"/>
+          <c:order val="10"/>
+          <c:tx>
+            <c:strRef>
+              <c:f>Sheet1!$L$1</c:f>
+              <c:strCache>
+                <c:ptCount val="1"/>
+                <c:pt idx="0">
+                  <c:v>제38162회 삼성전자·SK하이닉스</c:v>
+                </c:pt>
+              </c:strCache>
+            </c:strRef>
+          </c:tx>
+          <c:spPr>
+            <a:solidFill>
+              <a:srgbClr val="9AA6B2"/>
+            </a:solidFill>
+            <a:ln>
+              <a:noFill/>
+            </a:ln>
+            <a:effectLst/>
+          </c:spPr>
+          <c:marker>
+            <c:symbol val="circle"/>
+            <c:size val="9"/>
+            <c:spPr>
+              <a:solidFill>
+                <a:srgbClr val="9AA6B2"/>
+              </a:solidFill>
+              <a:ln w="9525" cap="flat">
+                <a:solidFill>
+                  <a:srgbClr val="9AA6B2"/>
+                </a:solidFill>
+                <a:prstDash val="solid"/>
+                <a:round/>
+              </a:ln>
+              <a:effectLst/>
+            </c:spPr>
+          </c:marker>
+          <c:xVal>
+            <c:numRef>
+              <c:f>Sheet1!$A$2:$A$19</c:f>
+              <c:numCache>
+                <c:formatCode>General</c:formatCode>
+                <c:ptCount val="18"/>
+                <c:pt idx="0">
+                  <c:v>11.7</c:v>
+                </c:pt>
+                <c:pt idx="1">
+                  <c:v>12.8</c:v>
+                </c:pt>
+                <c:pt idx="2">
+                  <c:v>14.9</c:v>
+                </c:pt>
+                <c:pt idx="3">
+                  <c:v>16.7</c:v>
+                </c:pt>
+                <c:pt idx="4">
+                  <c:v>10.8</c:v>
+                </c:pt>
+                <c:pt idx="5">
+                  <c:v>14.7</c:v>
+                </c:pt>
+                <c:pt idx="6">
+                  <c:v>12.6</c:v>
+                </c:pt>
+                <c:pt idx="7">
+                  <c:v>16.5</c:v>
+                </c:pt>
+                <c:pt idx="8">
+                  <c:v>18.3</c:v>
+                </c:pt>
+                <c:pt idx="9">
+                  <c:v>21.1</c:v>
+                </c:pt>
+                <c:pt idx="10">
+                  <c:v>11.5</c:v>
+                </c:pt>
+                <c:pt idx="11">
+                  <c:v>22.8</c:v>
+                </c:pt>
+                <c:pt idx="12">
+                  <c:v>20</c:v>
+                </c:pt>
+                <c:pt idx="13">
+                  <c:v>15.9</c:v>
+                </c:pt>
+                <c:pt idx="14">
+                  <c:v>32.5</c:v>
+                </c:pt>
+                <c:pt idx="15">
+                  <c:v>41.5</c:v>
+                </c:pt>
+                <c:pt idx="16">
+                  <c:v>49.1</c:v>
+                </c:pt>
+                <c:pt idx="17">
+                  <c:v>44.8</c:v>
+                </c:pt>
+              </c:numCache>
+            </c:numRef>
+          </c:xVal>
+          <c:yVal>
+            <c:numRef>
+              <c:f>Sheet1!$L$2:$L$19</c:f>
+              <c:numCache>
+                <c:formatCode>General</c:formatCode>
+                <c:ptCount val="18"/>
+                <c:pt idx="0">
+                  <c:v/>
+                </c:pt>
+                <c:pt idx="1">
+                  <c:v/>
+                </c:pt>
+                <c:pt idx="2">
+                  <c:v/>
+                </c:pt>
+                <c:pt idx="3">
+                  <c:v/>
+                </c:pt>
+                <c:pt idx="4">
+                  <c:v/>
+                </c:pt>
+                <c:pt idx="5">
+                  <c:v/>
+                </c:pt>
+                <c:pt idx="6">
+                  <c:v/>
+                </c:pt>
+                <c:pt idx="7">
+                  <c:v/>
+                </c:pt>
+                <c:pt idx="8">
+                  <c:v/>
+                </c:pt>
+                <c:pt idx="9">
+                  <c:v/>
+                </c:pt>
+                <c:pt idx="10">
+                  <c:v>10</c:v>
+                </c:pt>
+                <c:pt idx="11">
+                  <c:v/>
+                </c:pt>
+                <c:pt idx="12">
+                  <c:v/>
+                </c:pt>
+                <c:pt idx="13">
+                  <c:v/>
+                </c:pt>
+                <c:pt idx="14">
+                  <c:v/>
+                </c:pt>
+                <c:pt idx="15">
+                  <c:v/>
+                </c:pt>
+                <c:pt idx="16">
+                  <c:v/>
+                </c:pt>
+                <c:pt idx="17">
+                  <c:v/>
+                </c:pt>
+              </c:numCache>
+            </c:numRef>
+          </c:yVal>
+          <c:smooth val="0"/>
+        </c:ser>
+        <c:ser>
+          <c:idx val="11"/>
+          <c:order val="11"/>
+          <c:tx>
+            <c:strRef>
+              <c:f>Sheet1!$M$1</c:f>
+              <c:strCache>
+                <c:ptCount val="1"/>
+                <c:pt idx="0">
+                  <c:v>제38163회 S&amp;P500·HSCEI·KOSPI200</c:v>
+                </c:pt>
+              </c:strCache>
+            </c:strRef>
+          </c:tx>
+          <c:spPr>
+            <a:solidFill>
+              <a:srgbClr val="9AA6B2"/>
+            </a:solidFill>
+            <a:ln>
+              <a:noFill/>
+            </a:ln>
+            <a:effectLst/>
+          </c:spPr>
+          <c:marker>
+            <c:symbol val="circle"/>
+            <c:size val="9"/>
+            <c:spPr>
+              <a:solidFill>
+                <a:srgbClr val="9AA6B2"/>
+              </a:solidFill>
+              <a:ln w="9525" cap="flat">
+                <a:solidFill>
+                  <a:srgbClr val="9AA6B2"/>
+                </a:solidFill>
+                <a:prstDash val="solid"/>
+                <a:round/>
+              </a:ln>
+              <a:effectLst/>
+            </c:spPr>
+          </c:marker>
+          <c:xVal>
+            <c:numRef>
+              <c:f>Sheet1!$A$2:$A$19</c:f>
+              <c:numCache>
+                <c:formatCode>General</c:formatCode>
+                <c:ptCount val="18"/>
+                <c:pt idx="0">
+                  <c:v>11.7</c:v>
+                </c:pt>
+                <c:pt idx="1">
+                  <c:v>12.8</c:v>
+                </c:pt>
+                <c:pt idx="2">
+                  <c:v>14.9</c:v>
+                </c:pt>
+                <c:pt idx="3">
+                  <c:v>16.7</c:v>
+                </c:pt>
+                <c:pt idx="4">
+                  <c:v>10.8</c:v>
+                </c:pt>
+                <c:pt idx="5">
+                  <c:v>14.7</c:v>
+                </c:pt>
+                <c:pt idx="6">
+                  <c:v>12.6</c:v>
+                </c:pt>
+                <c:pt idx="7">
+                  <c:v>16.5</c:v>
+                </c:pt>
+                <c:pt idx="8">
+                  <c:v>18.3</c:v>
+                </c:pt>
+                <c:pt idx="9">
+                  <c:v>21.1</c:v>
+                </c:pt>
+                <c:pt idx="10">
+                  <c:v>11.5</c:v>
+                </c:pt>
+                <c:pt idx="11">
+                  <c:v>22.8</c:v>
+                </c:pt>
+                <c:pt idx="12">
+                  <c:v>20</c:v>
+                </c:pt>
+                <c:pt idx="13">
+                  <c:v>15.9</c:v>
+                </c:pt>
+                <c:pt idx="14">
+                  <c:v>32.5</c:v>
+                </c:pt>
+                <c:pt idx="15">
+                  <c:v>41.5</c:v>
+                </c:pt>
+                <c:pt idx="16">
+                  <c:v>49.1</c:v>
+                </c:pt>
+                <c:pt idx="17">
+                  <c:v>44.8</c:v>
+                </c:pt>
+              </c:numCache>
+            </c:numRef>
+          </c:xVal>
+          <c:yVal>
+            <c:numRef>
+              <c:f>Sheet1!$M$2:$M$19</c:f>
+              <c:numCache>
+                <c:formatCode>General</c:formatCode>
+                <c:ptCount val="18"/>
+                <c:pt idx="0">
+                  <c:v/>
+                </c:pt>
+                <c:pt idx="1">
+                  <c:v/>
+                </c:pt>
+                <c:pt idx="2">
+                  <c:v/>
+                </c:pt>
+                <c:pt idx="3">
+                  <c:v/>
+                </c:pt>
+                <c:pt idx="4">
+                  <c:v/>
+                </c:pt>
+                <c:pt idx="5">
+                  <c:v/>
+                </c:pt>
+                <c:pt idx="6">
+                  <c:v/>
+                </c:pt>
+                <c:pt idx="7">
+                  <c:v/>
+                </c:pt>
+                <c:pt idx="8">
+                  <c:v/>
+                </c:pt>
+                <c:pt idx="9">
+                  <c:v/>
+                </c:pt>
+                <c:pt idx="10">
+                  <c:v/>
+                </c:pt>
+                <c:pt idx="11">
+                  <c:v>12.5</c:v>
+                </c:pt>
+                <c:pt idx="12">
+                  <c:v/>
+                </c:pt>
+                <c:pt idx="13">
+                  <c:v/>
+                </c:pt>
+                <c:pt idx="14">
+                  <c:v/>
+                </c:pt>
+                <c:pt idx="15">
+                  <c:v/>
+                </c:pt>
+                <c:pt idx="16">
+                  <c:v/>
+                </c:pt>
+                <c:pt idx="17">
+                  <c:v/>
+                </c:pt>
+              </c:numCache>
+            </c:numRef>
+          </c:yVal>
+          <c:smooth val="0"/>
+        </c:ser>
+        <c:ser>
+          <c:idx val="12"/>
+          <c:order val="12"/>
+          <c:tx>
+            <c:strRef>
+              <c:f>Sheet1!$N$1</c:f>
+              <c:strCache>
+                <c:ptCount val="1"/>
+                <c:pt idx="0">
+                  <c:v>제38164회 EuroStoxx50·S&amp;P500·삼성전자</c:v>
+                </c:pt>
+              </c:strCache>
+            </c:strRef>
+          </c:tx>
+          <c:spPr>
+            <a:solidFill>
+              <a:srgbClr val="9AA6B2"/>
+            </a:solidFill>
+            <a:ln>
+              <a:noFill/>
+            </a:ln>
+            <a:effectLst/>
+          </c:spPr>
+          <c:marker>
+            <c:symbol val="circle"/>
+            <c:size val="9"/>
+            <c:spPr>
+              <a:solidFill>
+                <a:srgbClr val="9AA6B2"/>
+              </a:solidFill>
+              <a:ln w="9525" cap="flat">
+                <a:solidFill>
+                  <a:srgbClr val="9AA6B2"/>
+                </a:solidFill>
+                <a:prstDash val="solid"/>
+                <a:round/>
+              </a:ln>
+              <a:effectLst/>
+            </c:spPr>
+          </c:marker>
+          <c:xVal>
+            <c:numRef>
+              <c:f>Sheet1!$A$2:$A$19</c:f>
+              <c:numCache>
+                <c:formatCode>General</c:formatCode>
+                <c:ptCount val="18"/>
+                <c:pt idx="0">
+                  <c:v>11.7</c:v>
+                </c:pt>
+                <c:pt idx="1">
+                  <c:v>12.8</c:v>
+                </c:pt>
+                <c:pt idx="2">
+                  <c:v>14.9</c:v>
+                </c:pt>
+                <c:pt idx="3">
+                  <c:v>16.7</c:v>
+                </c:pt>
+                <c:pt idx="4">
+                  <c:v>10.8</c:v>
+                </c:pt>
+                <c:pt idx="5">
+                  <c:v>14.7</c:v>
+                </c:pt>
+                <c:pt idx="6">
+                  <c:v>12.6</c:v>
+                </c:pt>
+                <c:pt idx="7">
+                  <c:v>16.5</c:v>
+                </c:pt>
+                <c:pt idx="8">
+                  <c:v>18.3</c:v>
+                </c:pt>
+                <c:pt idx="9">
+                  <c:v>21.1</c:v>
+                </c:pt>
+                <c:pt idx="10">
+                  <c:v>11.5</c:v>
+                </c:pt>
+                <c:pt idx="11">
+                  <c:v>22.8</c:v>
+                </c:pt>
+                <c:pt idx="12">
+                  <c:v>20</c:v>
+                </c:pt>
+                <c:pt idx="13">
+                  <c:v>15.9</c:v>
+                </c:pt>
+                <c:pt idx="14">
+                  <c:v>32.5</c:v>
+                </c:pt>
+                <c:pt idx="15">
+                  <c:v>41.5</c:v>
+                </c:pt>
+                <c:pt idx="16">
+                  <c:v>49.1</c:v>
+                </c:pt>
+                <c:pt idx="17">
+                  <c:v>44.8</c:v>
+                </c:pt>
+              </c:numCache>
+            </c:numRef>
+          </c:xVal>
+          <c:yVal>
+            <c:numRef>
+              <c:f>Sheet1!$N$2:$N$19</c:f>
+              <c:numCache>
+                <c:formatCode>General</c:formatCode>
+                <c:ptCount val="18"/>
+                <c:pt idx="0">
+                  <c:v/>
+                </c:pt>
+                <c:pt idx="1">
+                  <c:v/>
+                </c:pt>
+                <c:pt idx="2">
+                  <c:v/>
+                </c:pt>
+                <c:pt idx="3">
+                  <c:v/>
+                </c:pt>
+                <c:pt idx="4">
+                  <c:v/>
+                </c:pt>
+                <c:pt idx="5">
+                  <c:v/>
+                </c:pt>
+                <c:pt idx="6">
+                  <c:v/>
+                </c:pt>
+                <c:pt idx="7">
+                  <c:v/>
+                </c:pt>
+                <c:pt idx="8">
+                  <c:v/>
+                </c:pt>
+                <c:pt idx="9">
+                  <c:v/>
+                </c:pt>
+                <c:pt idx="10">
+                  <c:v/>
+                </c:pt>
+                <c:pt idx="11">
+                  <c:v/>
+                </c:pt>
+                <c:pt idx="12">
+                  <c:v>14.5</c:v>
+                </c:pt>
+                <c:pt idx="13">
+                  <c:v/>
+                </c:pt>
+                <c:pt idx="14">
+                  <c:v/>
+                </c:pt>
+                <c:pt idx="15">
+                  <c:v/>
+                </c:pt>
+                <c:pt idx="16">
+                  <c:v/>
+                </c:pt>
+                <c:pt idx="17">
+                  <c:v/>
+                </c:pt>
+              </c:numCache>
+            </c:numRef>
+          </c:yVal>
+          <c:smooth val="0"/>
+        </c:ser>
+        <c:ser>
+          <c:idx val="13"/>
+          <c:order val="13"/>
+          <c:tx>
+            <c:strRef>
+              <c:f>Sheet1!$O$1</c:f>
+              <c:strCache>
+                <c:ptCount val="1"/>
+                <c:pt idx="0">
+                  <c:v>제38165회 삼성전자·SK하이닉스</c:v>
+                </c:pt>
+              </c:strCache>
+            </c:strRef>
+          </c:tx>
+          <c:spPr>
+            <a:solidFill>
+              <a:srgbClr val="F58220"/>
+            </a:solidFill>
+            <a:ln>
+              <a:noFill/>
+            </a:ln>
+            <a:effectLst/>
+          </c:spPr>
+          <c:marker>
+            <c:symbol val="circle"/>
+            <c:size val="9"/>
+            <c:spPr>
+              <a:solidFill>
+                <a:srgbClr val="F58220"/>
+              </a:solidFill>
+              <a:ln w="9525" cap="flat">
+                <a:solidFill>
+                  <a:srgbClr val="F58220"/>
+                </a:solidFill>
+                <a:prstDash val="solid"/>
+                <a:round/>
+              </a:ln>
+              <a:effectLst/>
+            </c:spPr>
+          </c:marker>
+          <c:xVal>
+            <c:numRef>
+              <c:f>Sheet1!$A$2:$A$19</c:f>
+              <c:numCache>
+                <c:formatCode>General</c:formatCode>
+                <c:ptCount val="18"/>
+                <c:pt idx="0">
+                  <c:v>11.7</c:v>
+                </c:pt>
+                <c:pt idx="1">
+                  <c:v>12.8</c:v>
+                </c:pt>
+                <c:pt idx="2">
+                  <c:v>14.9</c:v>
+                </c:pt>
+                <c:pt idx="3">
+                  <c:v>16.7</c:v>
+                </c:pt>
+                <c:pt idx="4">
+                  <c:v>10.8</c:v>
+                </c:pt>
+                <c:pt idx="5">
+                  <c:v>14.7</c:v>
+                </c:pt>
+                <c:pt idx="6">
+                  <c:v>12.6</c:v>
+                </c:pt>
+                <c:pt idx="7">
+                  <c:v>16.5</c:v>
+                </c:pt>
+                <c:pt idx="8">
+                  <c:v>18.3</c:v>
+                </c:pt>
+                <c:pt idx="9">
+                  <c:v>21.1</c:v>
+                </c:pt>
+                <c:pt idx="10">
+                  <c:v>11.5</c:v>
+                </c:pt>
+                <c:pt idx="11">
+                  <c:v>22.8</c:v>
+                </c:pt>
+                <c:pt idx="12">
+                  <c:v>20</c:v>
+                </c:pt>
+                <c:pt idx="13">
+                  <c:v>15.9</c:v>
+                </c:pt>
+                <c:pt idx="14">
+                  <c:v>32.5</c:v>
+                </c:pt>
+                <c:pt idx="15">
+                  <c:v>41.5</c:v>
+                </c:pt>
+                <c:pt idx="16">
+                  <c:v>49.1</c:v>
+                </c:pt>
+                <c:pt idx="17">
+                  <c:v>44.8</c:v>
+                </c:pt>
+              </c:numCache>
+            </c:numRef>
+          </c:xVal>
+          <c:yVal>
+            <c:numRef>
+              <c:f>Sheet1!$O$2:$O$19</c:f>
+              <c:numCache>
+                <c:formatCode>General</c:formatCode>
+                <c:ptCount val="18"/>
+                <c:pt idx="0">
+                  <c:v/>
+                </c:pt>
+                <c:pt idx="1">
+                  <c:v/>
+                </c:pt>
+                <c:pt idx="2">
+                  <c:v/>
+                </c:pt>
+                <c:pt idx="3">
+                  <c:v/>
+                </c:pt>
+                <c:pt idx="4">
+                  <c:v/>
+                </c:pt>
+                <c:pt idx="5">
+                  <c:v/>
+                </c:pt>
+                <c:pt idx="6">
+                  <c:v/>
+                </c:pt>
+                <c:pt idx="7">
+                  <c:v/>
+                </c:pt>
+                <c:pt idx="8">
+                  <c:v/>
+                </c:pt>
+                <c:pt idx="9">
+                  <c:v/>
+                </c:pt>
+                <c:pt idx="10">
+                  <c:v/>
+                </c:pt>
+                <c:pt idx="11">
+                  <c:v/>
+                </c:pt>
+                <c:pt idx="12">
+                  <c:v/>
+                </c:pt>
+                <c:pt idx="13">
+                  <c:v>23</c:v>
+                </c:pt>
+                <c:pt idx="14">
+                  <c:v/>
+                </c:pt>
+                <c:pt idx="15">
+                  <c:v/>
+                </c:pt>
+                <c:pt idx="16">
+                  <c:v/>
+                </c:pt>
+                <c:pt idx="17">
+                  <c:v/>
+                </c:pt>
+              </c:numCache>
+            </c:numRef>
+          </c:yVal>
+          <c:smooth val="0"/>
+        </c:ser>
+        <c:ser>
+          <c:idx val="14"/>
+          <c:order val="14"/>
+          <c:tx>
+            <c:strRef>
+              <c:f>Sheet1!$P$1</c:f>
+              <c:strCache>
+                <c:ptCount val="1"/>
+                <c:pt idx="0">
+                  <c:v>제38166회 테슬라·팔란티어 테크</c:v>
+                </c:pt>
+              </c:strCache>
+            </c:strRef>
+          </c:tx>
+          <c:spPr>
+            <a:solidFill>
+              <a:srgbClr val="C62828"/>
+            </a:solidFill>
+            <a:ln>
+              <a:noFill/>
+            </a:ln>
+            <a:effectLst/>
+          </c:spPr>
+          <c:marker>
+            <c:symbol val="circle"/>
+            <c:size val="9"/>
+            <c:spPr>
+              <a:solidFill>
+                <a:srgbClr val="C62828"/>
+              </a:solidFill>
+              <a:ln w="9525" cap="flat">
+                <a:solidFill>
+                  <a:srgbClr val="C62828"/>
+                </a:solidFill>
+                <a:prstDash val="solid"/>
+                <a:round/>
+              </a:ln>
+              <a:effectLst/>
+            </c:spPr>
+          </c:marker>
+          <c:xVal>
+            <c:numRef>
+              <c:f>Sheet1!$A$2:$A$19</c:f>
+              <c:numCache>
+                <c:formatCode>General</c:formatCode>
+                <c:ptCount val="18"/>
+                <c:pt idx="0">
+                  <c:v>11.7</c:v>
+                </c:pt>
+                <c:pt idx="1">
+                  <c:v>12.8</c:v>
+                </c:pt>
+                <c:pt idx="2">
+                  <c:v>14.9</c:v>
+                </c:pt>
+                <c:pt idx="3">
+                  <c:v>16.7</c:v>
+                </c:pt>
+                <c:pt idx="4">
+                  <c:v>10.8</c:v>
+                </c:pt>
+                <c:pt idx="5">
+                  <c:v>14.7</c:v>
+                </c:pt>
+                <c:pt idx="6">
+                  <c:v>12.6</c:v>
+                </c:pt>
+                <c:pt idx="7">
+                  <c:v>16.5</c:v>
+                </c:pt>
+                <c:pt idx="8">
+                  <c:v>18.3</c:v>
+                </c:pt>
+                <c:pt idx="9">
+                  <c:v>21.1</c:v>
+                </c:pt>
+                <c:pt idx="10">
+                  <c:v>11.5</c:v>
+                </c:pt>
+                <c:pt idx="11">
+                  <c:v>22.8</c:v>
+                </c:pt>
+                <c:pt idx="12">
+                  <c:v>20</c:v>
+                </c:pt>
+                <c:pt idx="13">
+                  <c:v>15.9</c:v>
+                </c:pt>
+                <c:pt idx="14">
+                  <c:v>32.5</c:v>
+                </c:pt>
+                <c:pt idx="15">
+                  <c:v>41.5</c:v>
+                </c:pt>
+                <c:pt idx="16">
+                  <c:v>49.1</c:v>
+                </c:pt>
+                <c:pt idx="17">
+                  <c:v>44.8</c:v>
+                </c:pt>
+              </c:numCache>
+            </c:numRef>
+          </c:xVal>
+          <c:yVal>
+            <c:numRef>
+              <c:f>Sheet1!$P$2:$P$19</c:f>
+              <c:numCache>
+                <c:formatCode>General</c:formatCode>
+                <c:ptCount val="18"/>
+                <c:pt idx="0">
+                  <c:v/>
+                </c:pt>
+                <c:pt idx="1">
+                  <c:v/>
+                </c:pt>
+                <c:pt idx="2">
+                  <c:v/>
+                </c:pt>
+                <c:pt idx="3">
+                  <c:v/>
+                </c:pt>
+                <c:pt idx="4">
+                  <c:v/>
+                </c:pt>
+                <c:pt idx="5">
+                  <c:v/>
+                </c:pt>
+                <c:pt idx="6">
+                  <c:v/>
+                </c:pt>
+                <c:pt idx="7">
+                  <c:v/>
+                </c:pt>
+                <c:pt idx="8">
+                  <c:v/>
+                </c:pt>
+                <c:pt idx="9">
+                  <c:v/>
+                </c:pt>
+                <c:pt idx="10">
+                  <c:v/>
+                </c:pt>
+                <c:pt idx="11">
+                  <c:v/>
+                </c:pt>
+                <c:pt idx="12">
+                  <c:v/>
+                </c:pt>
+                <c:pt idx="13">
+                  <c:v/>
+                </c:pt>
+                <c:pt idx="14">
+                  <c:v>19</c:v>
+                </c:pt>
+                <c:pt idx="15">
+                  <c:v/>
+                </c:pt>
+                <c:pt idx="16">
+                  <c:v/>
+                </c:pt>
+                <c:pt idx="17">
+                  <c:v/>
+                </c:pt>
+              </c:numCache>
+            </c:numRef>
+          </c:yVal>
+          <c:smooth val="0"/>
+        </c:ser>
+        <c:ser>
+          <c:idx val="15"/>
+          <c:order val="15"/>
+          <c:tx>
+            <c:strRef>
+              <c:f>Sheet1!$Q$1</c:f>
+              <c:strCache>
+                <c:ptCount val="1"/>
+                <c:pt idx="0">
+                  <c:v>제38167회 마이크론 테크놀로지·AMD</c:v>
+                </c:pt>
+              </c:strCache>
+            </c:strRef>
+          </c:tx>
+          <c:spPr>
+            <a:solidFill>
+              <a:srgbClr val="C62828"/>
+            </a:solidFill>
+            <a:ln>
+              <a:noFill/>
+            </a:ln>
+            <a:effectLst/>
+          </c:spPr>
+          <c:marker>
+            <c:symbol val="circle"/>
+            <c:size val="9"/>
+            <c:spPr>
+              <a:solidFill>
+                <a:srgbClr val="C62828"/>
+              </a:solidFill>
+              <a:ln w="9525" cap="flat">
+                <a:solidFill>
+                  <a:srgbClr val="C62828"/>
+                </a:solidFill>
+                <a:prstDash val="solid"/>
+                <a:round/>
+              </a:ln>
+              <a:effectLst/>
+            </c:spPr>
+          </c:marker>
+          <c:xVal>
+            <c:numRef>
+              <c:f>Sheet1!$A$2:$A$19</c:f>
+              <c:numCache>
+                <c:formatCode>General</c:formatCode>
+                <c:ptCount val="18"/>
+                <c:pt idx="0">
+                  <c:v>11.7</c:v>
+                </c:pt>
+                <c:pt idx="1">
+                  <c:v>12.8</c:v>
+                </c:pt>
+                <c:pt idx="2">
+                  <c:v>14.9</c:v>
+                </c:pt>
+                <c:pt idx="3">
+                  <c:v>16.7</c:v>
+                </c:pt>
+                <c:pt idx="4">
+                  <c:v>10.8</c:v>
+                </c:pt>
+                <c:pt idx="5">
+                  <c:v>14.7</c:v>
+                </c:pt>
+                <c:pt idx="6">
+                  <c:v>12.6</c:v>
+                </c:pt>
+                <c:pt idx="7">
+                  <c:v>16.5</c:v>
+                </c:pt>
+                <c:pt idx="8">
+                  <c:v>18.3</c:v>
+                </c:pt>
+                <c:pt idx="9">
+                  <c:v>21.1</c:v>
+                </c:pt>
+                <c:pt idx="10">
+                  <c:v>11.5</c:v>
+                </c:pt>
+                <c:pt idx="11">
+                  <c:v>22.8</c:v>
+                </c:pt>
+                <c:pt idx="12">
+                  <c:v>20</c:v>
+                </c:pt>
+                <c:pt idx="13">
+                  <c:v>15.9</c:v>
+                </c:pt>
+                <c:pt idx="14">
+                  <c:v>32.5</c:v>
+                </c:pt>
+                <c:pt idx="15">
+                  <c:v>41.5</c:v>
+                </c:pt>
+                <c:pt idx="16">
+                  <c:v>49.1</c:v>
+                </c:pt>
+                <c:pt idx="17">
+                  <c:v>44.8</c:v>
+                </c:pt>
+              </c:numCache>
+            </c:numRef>
+          </c:xVal>
+          <c:yVal>
+            <c:numRef>
+              <c:f>Sheet1!$Q$2:$Q$19</c:f>
+              <c:numCache>
+                <c:formatCode>General</c:formatCode>
+                <c:ptCount val="18"/>
+                <c:pt idx="0">
+                  <c:v/>
+                </c:pt>
+                <c:pt idx="1">
+                  <c:v/>
+                </c:pt>
+                <c:pt idx="2">
+                  <c:v/>
+                </c:pt>
+                <c:pt idx="3">
+                  <c:v/>
+                </c:pt>
+                <c:pt idx="4">
+                  <c:v/>
+                </c:pt>
+                <c:pt idx="5">
+                  <c:v/>
+                </c:pt>
+                <c:pt idx="6">
+                  <c:v/>
+                </c:pt>
+                <c:pt idx="7">
+                  <c:v/>
+                </c:pt>
+                <c:pt idx="8">
+                  <c:v/>
+                </c:pt>
+                <c:pt idx="9">
+                  <c:v/>
+                </c:pt>
+                <c:pt idx="10">
+                  <c:v/>
+                </c:pt>
+                <c:pt idx="11">
+                  <c:v/>
+                </c:pt>
+                <c:pt idx="12">
+                  <c:v/>
+                </c:pt>
+                <c:pt idx="13">
+                  <c:v/>
+                </c:pt>
+                <c:pt idx="14">
+                  <c:v/>
+                </c:pt>
+                <c:pt idx="15">
+                  <c:v>20</c:v>
+                </c:pt>
+                <c:pt idx="16">
+                  <c:v/>
+                </c:pt>
+                <c:pt idx="17">
+                  <c:v/>
+                </c:pt>
+              </c:numCache>
+            </c:numRef>
+          </c:yVal>
+          <c:smooth val="0"/>
+        </c:ser>
+        <c:ser>
+          <c:idx val="16"/>
+          <c:order val="16"/>
+          <c:tx>
+            <c:strRef>
+              <c:f>Sheet1!$R$1</c:f>
+              <c:strCache>
+                <c:ptCount val="1"/>
+                <c:pt idx="0">
+                  <c:v>제38168회 마이크론 테크놀로지·팔란티어 테크</c:v>
+                </c:pt>
+              </c:strCache>
+            </c:strRef>
+          </c:tx>
+          <c:spPr>
+            <a:solidFill>
+              <a:srgbClr val="C62828"/>
+            </a:solidFill>
+            <a:ln>
+              <a:noFill/>
+            </a:ln>
+            <a:effectLst/>
+          </c:spPr>
+          <c:marker>
+            <c:symbol val="circle"/>
+            <c:size val="9"/>
+            <c:spPr>
+              <a:solidFill>
+                <a:srgbClr val="C62828"/>
+              </a:solidFill>
+              <a:ln w="9525" cap="flat">
+                <a:solidFill>
+                  <a:srgbClr val="C62828"/>
+                </a:solidFill>
+                <a:prstDash val="solid"/>
+                <a:round/>
+              </a:ln>
+              <a:effectLst/>
+            </c:spPr>
+          </c:marker>
+          <c:xVal>
+            <c:numRef>
+              <c:f>Sheet1!$A$2:$A$19</c:f>
+              <c:numCache>
+                <c:formatCode>General</c:formatCode>
+                <c:ptCount val="18"/>
+                <c:pt idx="0">
+                  <c:v>11.7</c:v>
+                </c:pt>
+                <c:pt idx="1">
+                  <c:v>12.8</c:v>
+                </c:pt>
+                <c:pt idx="2">
+                  <c:v>14.9</c:v>
+                </c:pt>
+                <c:pt idx="3">
+                  <c:v>16.7</c:v>
+                </c:pt>
+                <c:pt idx="4">
+                  <c:v>10.8</c:v>
+                </c:pt>
+                <c:pt idx="5">
+                  <c:v>14.7</c:v>
+                </c:pt>
+                <c:pt idx="6">
+                  <c:v>12.6</c:v>
+                </c:pt>
+                <c:pt idx="7">
+                  <c:v>16.5</c:v>
+                </c:pt>
+                <c:pt idx="8">
+                  <c:v>18.3</c:v>
+                </c:pt>
+                <c:pt idx="9">
+                  <c:v>21.1</c:v>
+                </c:pt>
+                <c:pt idx="10">
+                  <c:v>11.5</c:v>
+                </c:pt>
+                <c:pt idx="11">
+                  <c:v>22.8</c:v>
+                </c:pt>
+                <c:pt idx="12">
+                  <c:v>20</c:v>
+                </c:pt>
+                <c:pt idx="13">
+                  <c:v>15.9</c:v>
+                </c:pt>
+                <c:pt idx="14">
+                  <c:v>32.5</c:v>
+                </c:pt>
+                <c:pt idx="15">
+                  <c:v>41.5</c:v>
+                </c:pt>
+                <c:pt idx="16">
+                  <c:v>49.1</c:v>
+                </c:pt>
+                <c:pt idx="17">
+                  <c:v>44.8</c:v>
+                </c:pt>
+              </c:numCache>
+            </c:numRef>
+          </c:xVal>
+          <c:yVal>
+            <c:numRef>
+              <c:f>Sheet1!$R$2:$R$19</c:f>
+              <c:numCache>
+                <c:formatCode>General</c:formatCode>
+                <c:ptCount val="18"/>
+                <c:pt idx="0">
+                  <c:v/>
+                </c:pt>
+                <c:pt idx="1">
+                  <c:v/>
+                </c:pt>
+                <c:pt idx="2">
+                  <c:v/>
+                </c:pt>
+                <c:pt idx="3">
+                  <c:v/>
+                </c:pt>
+                <c:pt idx="4">
+                  <c:v/>
+                </c:pt>
+                <c:pt idx="5">
+                  <c:v/>
+                </c:pt>
+                <c:pt idx="6">
+                  <c:v/>
+                </c:pt>
+                <c:pt idx="7">
+                  <c:v/>
+                </c:pt>
+                <c:pt idx="8">
+                  <c:v/>
+                </c:pt>
+                <c:pt idx="9">
+                  <c:v/>
+                </c:pt>
+                <c:pt idx="10">
+                  <c:v/>
+                </c:pt>
+                <c:pt idx="11">
+                  <c:v/>
+                </c:pt>
+                <c:pt idx="12">
+                  <c:v/>
+                </c:pt>
+                <c:pt idx="13">
+                  <c:v/>
+                </c:pt>
+                <c:pt idx="14">
+                  <c:v/>
+                </c:pt>
+                <c:pt idx="15">
+                  <c:v/>
+                </c:pt>
+                <c:pt idx="16">
+                  <c:v>20</c:v>
+                </c:pt>
+                <c:pt idx="17">
+                  <c:v/>
+                </c:pt>
+              </c:numCache>
+            </c:numRef>
+          </c:yVal>
+          <c:smooth val="0"/>
+        </c:ser>
+        <c:ser>
+          <c:idx val="17"/>
+          <c:order val="17"/>
+          <c:tx>
+            <c:strRef>
+              <c:f>Sheet1!$S$1</c:f>
+              <c:strCache>
+                <c:ptCount val="1"/>
+                <c:pt idx="0">
+                  <c:v>제38169회 테슬라·마이크론 테크놀로지</c:v>
+                </c:pt>
+              </c:strCache>
+            </c:strRef>
+          </c:tx>
+          <c:spPr>
+            <a:solidFill>
+              <a:srgbClr val="C62828"/>
+            </a:solidFill>
+            <a:ln>
+              <a:noFill/>
+            </a:ln>
+            <a:effectLst/>
+          </c:spPr>
+          <c:marker>
+            <c:symbol val="circle"/>
+            <c:size val="9"/>
+            <c:spPr>
+              <a:solidFill>
+                <a:srgbClr val="C62828"/>
+              </a:solidFill>
+              <a:ln w="9525" cap="flat">
+                <a:solidFill>
+                  <a:srgbClr val="C62828"/>
+                </a:solidFill>
+                <a:prstDash val="solid"/>
+                <a:round/>
+              </a:ln>
+              <a:effectLst/>
+            </c:spPr>
+          </c:marker>
+          <c:xVal>
+            <c:numRef>
+              <c:f>Sheet1!$A$2:$A$19</c:f>
+              <c:numCache>
+                <c:formatCode>General</c:formatCode>
+                <c:ptCount val="18"/>
+                <c:pt idx="0">
+                  <c:v>11.7</c:v>
+                </c:pt>
+                <c:pt idx="1">
+                  <c:v>12.8</c:v>
+                </c:pt>
+                <c:pt idx="2">
+                  <c:v>14.9</c:v>
+                </c:pt>
+                <c:pt idx="3">
+                  <c:v>16.7</c:v>
+                </c:pt>
+                <c:pt idx="4">
+                  <c:v>10.8</c:v>
+                </c:pt>
+                <c:pt idx="5">
+                  <c:v>14.7</c:v>
+                </c:pt>
+                <c:pt idx="6">
+                  <c:v>12.6</c:v>
+                </c:pt>
+                <c:pt idx="7">
+                  <c:v>16.5</c:v>
+                </c:pt>
+                <c:pt idx="8">
+                  <c:v>18.3</c:v>
+                </c:pt>
+                <c:pt idx="9">
+                  <c:v>21.1</c:v>
+                </c:pt>
+                <c:pt idx="10">
+                  <c:v>11.5</c:v>
+                </c:pt>
+                <c:pt idx="11">
+                  <c:v>22.8</c:v>
+                </c:pt>
+                <c:pt idx="12">
+                  <c:v>20</c:v>
+                </c:pt>
+                <c:pt idx="13">
+                  <c:v>15.9</c:v>
+                </c:pt>
+                <c:pt idx="14">
+                  <c:v>32.5</c:v>
+                </c:pt>
+                <c:pt idx="15">
+                  <c:v>41.5</c:v>
+                </c:pt>
+                <c:pt idx="16">
+                  <c:v>49.1</c:v>
+                </c:pt>
+                <c:pt idx="17">
+                  <c:v>44.8</c:v>
+                </c:pt>
+              </c:numCache>
+            </c:numRef>
+          </c:xVal>
+          <c:yVal>
+            <c:numRef>
+              <c:f>Sheet1!$S$2:$S$19</c:f>
+              <c:numCache>
+                <c:formatCode>General</c:formatCode>
+                <c:ptCount val="18"/>
+                <c:pt idx="0">
+                  <c:v/>
+                </c:pt>
+                <c:pt idx="1">
+                  <c:v/>
+                </c:pt>
+                <c:pt idx="2">
+                  <c:v/>
+                </c:pt>
+                <c:pt idx="3">
+                  <c:v/>
+                </c:pt>
+                <c:pt idx="4">
+                  <c:v/>
+                </c:pt>
+                <c:pt idx="5">
+                  <c:v/>
+                </c:pt>
+                <c:pt idx="6">
+                  <c:v/>
+                </c:pt>
+                <c:pt idx="7">
+                  <c:v/>
+                </c:pt>
+                <c:pt idx="8">
+                  <c:v/>
+                </c:pt>
+                <c:pt idx="9">
+                  <c:v/>
+                </c:pt>
+                <c:pt idx="10">
+                  <c:v/>
+                </c:pt>
+                <c:pt idx="11">
+                  <c:v/>
+                </c:pt>
+                <c:pt idx="12">
+                  <c:v/>
+                </c:pt>
+                <c:pt idx="13">
+                  <c:v/>
+                </c:pt>
+                <c:pt idx="14">
+                  <c:v/>
+                </c:pt>
+                <c:pt idx="15">
+                  <c:v/>
+                </c:pt>
+                <c:pt idx="16">
+                  <c:v/>
+                </c:pt>
+                <c:pt idx="17">
+                  <c:v>22.2</c:v>
+                </c:pt>
+              </c:numCache>
+            </c:numRef>
+          </c:yVal>
+          <c:smooth val="0"/>
+        </c:ser>
+        <c:dLbls>
+          <c:numFmt formatCode="General" sourceLinked="0"/>
+          <c:txPr>
+            <a:bodyPr/>
+            <a:lstStyle/>
+            <a:p>
+              <a:pPr>
+                <a:defRPr b="0" i="0" strike="noStrike" sz="1200" u="none">
+                  <a:solidFill>
+                    <a:srgbClr val="000000"/>
+                  </a:solidFill>
+                  <a:latin typeface="Arial"/>
+                </a:defRPr>
+              </a:pPr>
+            </a:p>
+          </c:txPr>
+          <c:showLegendKey val="0"/>
+          <c:showVal val="0"/>
+          <c:showCatName val="0"/>
+          <c:showSerName val="0"/>
+          <c:showPercent val="0"/>
+          <c:showBubbleSize val="0"/>
+        </c:dLbls>
+        <c:axId val="2094734554"/>
+        <c:axId val="2094734552"/>
+      </c:scatterChart>
+      <c:valAx>
+        <c:axId val="2094734554"/>
+        <c:scaling>
+          <c:orientation val="minMax"/>
+          <c:max val="50"/>
+          <c:min val="0"/>
+        </c:scaling>
+        <c:delete val="0"/>
+        <c:axPos val="b"/>
+        <c:title>
+          <c:tx>
+            <c:rich>
+              <a:bodyPr/>
+              <a:lstStyle/>
+              <a:p>
+                <a:pPr>
+                  <a:defRPr sz="1000" b="0" i="0" u="none" strike="noStrike">
+                    <a:solidFill>
+                      <a:srgbClr val="000000"/>
+                    </a:solidFill>
+                    <a:latin typeface="맑은 고딕"/>
+                  </a:defRPr>
+                </a:pPr>
+                <a:r>
+                  <a:rPr sz="1000" b="0" i="0" u="none" strike="noStrike">
+                    <a:solidFill>
+                      <a:srgbClr val="000000"/>
+                    </a:solidFill>
+                    <a:latin typeface="맑은 고딕"/>
+                  </a:rPr>
+                  <a:t>손실 확률 B (%) — 오른쪽일수록 위험하다</a:t>
+                </a:r>
+              </a:p>
+            </c:rich>
+          </c:tx>
+          <c:layout/>
+          <c:overlay val="0"/>
+        </c:title>
+        <c:numFmt formatCode="General" sourceLinked="1"/>
+        <c:majorTickMark val="none"/>
+        <c:minorTickMark val="none"/>
+        <c:tickLblPos val="nextTo"/>
+        <c:spPr>
+          <a:ln w="12700" cap="flat">
+            <a:solidFill>
+              <a:srgbClr val="888888"/>
+            </a:solidFill>
+            <a:prstDash val="solid"/>
+            <a:round/>
+          </a:ln>
+        </c:spPr>
+        <c:txPr>
+          <a:bodyPr/>
+          <a:lstStyle/>
+          <a:p>
+            <a:pPr>
+              <a:defRPr sz="900" b="0" i="0" u="none" strike="noStrike">
+                <a:solidFill>
+                  <a:srgbClr val="000000"/>
+                </a:solidFill>
+                <a:latin typeface="맑은 고딕"/>
+              </a:defRPr>
+            </a:pPr>
+            <a:endParaRPr lang="en-US"/>
+          </a:p>
+        </c:txPr>
+        <c:crossAx val="2094734552"/>
+        <c:crosses val="autoZero"/>
+        <c:auto val="1"/>
+        <c:lblAlgn val="ctr"/>
+        <c:noMultiLvlLbl val="1"/>
+        <c:majorUnit val="10"/>
+      </c:valAx>
+      <c:valAx>
+        <c:axId val="2094734552"/>
+        <c:scaling>
+          <c:orientation val="minMax"/>
+          <c:max val="25"/>
+          <c:min val="10"/>
+        </c:scaling>
+        <c:delete val="0"/>
+        <c:axPos val="l"/>
+        <c:majorGridlines>
+          <c:spPr>
+            <a:ln w="6350" cap="flat">
+              <a:solidFill>
+                <a:srgbClr val="E5E4E1"/>
+              </a:solidFill>
+              <a:prstDash val="dash"/>
+              <a:round/>
+            </a:ln>
+          </c:spPr>
+        </c:majorGridlines>
+        <c:title>
+          <c:tx>
+            <c:rich>
+              <a:bodyPr/>
+              <a:lstStyle/>
+              <a:p>
+                <a:pPr>
+                  <a:defRPr sz="1000" b="0" i="0" u="none" strike="noStrike">
+                    <a:solidFill>
+                      <a:srgbClr val="000000"/>
+                    </a:solidFill>
+                    <a:latin typeface="맑은 고딕"/>
+                  </a:defRPr>
+                </a:pPr>
+                <a:r>
+                  <a:rPr sz="1000" b="0" i="0" u="none" strike="noStrike">
+                    <a:solidFill>
+                      <a:srgbClr val="000000"/>
+                    </a:solidFill>
+                    <a:latin typeface="맑은 고딕"/>
+                  </a:rPr>
+                  <a:t>연 수익률 (%)</a:t>
+                </a:r>
+              </a:p>
+            </c:rich>
+          </c:tx>
+          <c:layout/>
+          <c:overlay val="0"/>
+        </c:title>
+        <c:numFmt formatCode="General" sourceLinked="0"/>
+        <c:majorTickMark val="none"/>
+        <c:minorTickMark val="none"/>
+        <c:tickLblPos val="nextTo"/>
+        <c:spPr>
+          <a:ln w="12700" cap="flat">
+            <a:solidFill>
+              <a:srgbClr val="888888"/>
+            </a:solidFill>
+            <a:prstDash val="solid"/>
+            <a:round/>
+          </a:ln>
+        </c:spPr>
+        <c:txPr>
+          <a:bodyPr/>
+          <a:lstStyle/>
+          <a:p>
+            <a:pPr>
+              <a:defRPr sz="900" b="0" i="0" u="none" strike="noStrike">
+                <a:solidFill>
+                  <a:srgbClr val="000000"/>
+                </a:solidFill>
+                <a:latin typeface="맑은 고딕"/>
+              </a:defRPr>
+            </a:pPr>
+            <a:endParaRPr lang="en-US"/>
+          </a:p>
+        </c:txPr>
+        <c:crossAx val="2094734554"/>
+        <c:crosses val="autoZero"/>
+        <c:crossBetween val="midCat"/>
+        <c:majorUnit val="5"/>
+      </c:valAx>
+      <c:spPr>
+        <a:solidFill>
+          <a:srgbClr val="FFFFFF"/>
+        </a:solidFill>
+        <a:ln w="12700" cap="flat">
+          <a:solidFill>
+            <a:srgbClr val="363636"/>
+          </a:solidFill>
+        </a:ln>
+        <a:effectLst/>
+      </c:spPr>
+    </c:plotArea>
+    <c:plotVisOnly val="1"/>
+    <c:dispBlanksAs val="span"/>
+    <c:showDLblsOverMax val="1"/>
+  </c:chart>
+  <c:spPr>
+    <a:noFill/>
+    <a:ln>
+      <a:noFill/>
+    </a:ln>
+    <a:effectLst/>
+  </c:spPr>
+  <c:externalData r:id="rId1">
+    <c:autoUpdate val="0"/>
+  </c:externalData>
+</c:chartSpace>
+</file>
+
 <file path=ppt/notesMasters/notesMaster1.xml><?xml version="1.0" encoding="utf-8"?>
 <p:notesMaster xmlns:a="http://schemas.openxmlformats.org/drawingml/2006/main" xmlns:r="http://schemas.openxmlformats.org/officeDocument/2006/relationships" xmlns:p="http://schemas.openxmlformats.org/presentationml/2006/main">
   <p:cSld>
@@ -907,7 +4153,7 @@
           <a:p>
             <a:r>
               <a:rPr lang="en-US" dirty="0"/>
-              <a:t>"개별 종목이 들어갔는데 괜찮나요?" → SK하이닉스가 들어간 게 맞고, 가격 출렁임 56.2%로 지수만 담은 상품 평균(36.4%)보다 큰 것도 맞습니다. 손해 볼 가능성도 21.1%로 지수만 담은 상품 평균(15.8%)보다 높습니다. 그런데도 올린 이유는 안전해서가 아니라 대가가 크기 때문입니다 — 손해 볼 가능성 1%마다 연 1.00%로, 지수 상품 평균 0.72%의 1.4배입니다. 원금 지키는 게 제일 중요한 분께는 추천 1번을 권하십시오.</a:t>
+              <a:t>"개별 종목이 들어갔는데 괜찮나요?" → 삼성전자·SK하이닉스가 들어간 게 맞고, 가격 출렁임 56.2%로 지수만 담은 상품 평균(36.4%)보다 큰 것도 맞습니다. 손해 볼 가능성도 15.9%로 지수만 담은 상품 평균(15.8%)보다 높습니다. 그런데도 올린 이유는 안전해서가 아니라 대가가 크기 때문입니다 — 손해 볼 가능성 1%마다 연 1.45%로, 지수 상품 평균 0.72%의 2.0배입니다. 원금 지키는 게 제일 중요한 분께는 추천 1번을 권하십시오.</a:t>
             </a:r>
             <a:endParaRPr lang="en-US" dirty="0"/>
           </a:p>
@@ -995,7 +4241,7 @@
           <a:p>
             <a:r>
               <a:rPr lang="en-US" dirty="0"/>
-              <a:t/>
+              <a:t>"개별 종목이 들어갔는데 괜찮나요?" → SK하이닉스가 들어간 게 맞고, 가격 출렁임 56.2%로 지수만 담은 상품 평균(36.4%)보다 큰 것도 맞습니다. 손해 볼 가능성도 21.1%로 지수만 담은 상품 평균(15.8%)보다 높습니다. 그런데도 올린 이유는 안전해서가 아니라 대가가 크기 때문입니다 — 손해 볼 가능성 1%마다 연 1.00%로, 지수 상품 평균 0.72%의 1.4배입니다. 원금 지키는 게 제일 중요한 분께는 추천 1번을 권하십시오.</a:t>
             </a:r>
             <a:endParaRPr lang="en-US" dirty="0"/>
           </a:p>
@@ -1171,7 +4417,7 @@
           <a:p>
             <a:r>
               <a:rPr lang="en-US" dirty="0"/>
-              <a:t>1번은 이번 주에만 해당하는 이야기가 아니라 매 회차 반복됩니다. 마감일을 잘못 안내하면 고객이 청약 기회를 놓칩니다.</a:t>
+              <a:t/>
             </a:r>
             <a:endParaRPr lang="en-US" dirty="0"/>
           </a:p>
@@ -1259,7 +4505,7 @@
           <a:p>
             <a:r>
               <a:rPr lang="en-US" dirty="0"/>
-              <a:t/>
+              <a:t>1번은 이번 주에만 해당하는 이야기가 아니라 매 회차 반복됩니다. 마감일을 잘못 안내하면 고객이 청약 기회를 놓칩니다.</a:t>
             </a:r>
             <a:endParaRPr lang="en-US" dirty="0"/>
           </a:p>
@@ -1347,7 +4593,7 @@
           <a:p>
             <a:r>
               <a:rPr lang="en-US" dirty="0"/>
-              <a:t>고객이 서류의 "낙인", "공정가액" 같은 말을 짚으며 물으실 때 이 장을 펴십시오. 왼쪽이 서류에 적힌 말, 가운데가 바꿔 말씀하실 쉬운 말입니다.</a:t>
+              <a:t/>
             </a:r>
             <a:endParaRPr lang="en-US" dirty="0"/>
           </a:p>
@@ -1371,6 +4617,94 @@
             <a:fld id="{F7021451-1387-4CA6-816F-3879F97B5CBC}" type="slidenum">
               <a:rPr lang="en-US"/>
               <a:t>15</a:t>
+            </a:fld>
+            <a:endParaRPr lang="en-US"/>
+          </a:p>
+        </p:txBody>
+      </p:sp>
+    </p:spTree>
+    <p:extLst>
+      <p:ext uri="{BB962C8B-B14F-4D97-AF65-F5344CB8AC3E}">
+        <p14:creationId xmlns:p14="http://schemas.microsoft.com/office/powerpoint/2010/main" val="1024086991"/>
+      </p:ext>
+    </p:extLst>
+  </p:cSld>
+  <p:clrMapOvr>
+    <a:masterClrMapping/>
+  </p:clrMapOvr>
+</p:notes>
+</file>
+
+<file path=ppt/notesSlides/notesSlide16.xml><?xml version="1.0" encoding="utf-8"?>
+<p:notes xmlns:a="http://schemas.openxmlformats.org/drawingml/2006/main" xmlns:r="http://schemas.openxmlformats.org/officeDocument/2006/relationships" xmlns:p="http://schemas.openxmlformats.org/presentationml/2006/main">
+  <p:cSld>
+    <p:spTree>
+      <p:nvGrpSpPr>
+        <p:cNvPr id="1" name=""/>
+        <p:cNvGrpSpPr/>
+        <p:nvPr/>
+      </p:nvGrpSpPr>
+      <p:grpSpPr>
+        <a:xfrm>
+          <a:off x="0" y="0"/>
+          <a:ext cx="0" cy="0"/>
+          <a:chOff x="0" y="0"/>
+          <a:chExt cx="0" cy="0"/>
+        </a:xfrm>
+      </p:grpSpPr>
+      <p:sp>
+        <p:nvSpPr>
+          <p:cNvPr id="2" name="Slide Image Placeholder 1"/>
+          <p:cNvSpPr>
+            <a:spLocks noGrp="1" noRot="1" noChangeAspect="1"/>
+          </p:cNvSpPr>
+          <p:nvPr>
+            <p:ph type="sldImg"/>
+          </p:nvPr>
+        </p:nvSpPr>
+        <p:spPr/>
+      </p:sp>
+      <p:sp>
+        <p:nvSpPr>
+          <p:cNvPr id="3" name="Notes Placeholder 2"/>
+          <p:cNvSpPr>
+            <a:spLocks noGrp="1"/>
+          </p:cNvSpPr>
+          <p:nvPr>
+            <p:ph type="body" idx="1"/>
+          </p:nvPr>
+        </p:nvSpPr>
+        <p:spPr/>
+        <p:txBody>
+          <a:bodyPr/>
+          <a:lstStyle/>
+          <a:p>
+            <a:r>
+              <a:rPr lang="en-US" dirty="0"/>
+              <a:t>고객이 서류의 "낙인", "공정가액" 같은 말을 짚으며 물으실 때 이 장을 펴십시오. 왼쪽이 서류에 적힌 말, 가운데가 바꿔 말씀하실 쉬운 말입니다.</a:t>
+            </a:r>
+            <a:endParaRPr lang="en-US" dirty="0"/>
+          </a:p>
+        </p:txBody>
+      </p:sp>
+      <p:sp>
+        <p:nvSpPr>
+          <p:cNvPr id="4" name="Slide Number Placeholder 3"/>
+          <p:cNvSpPr>
+            <a:spLocks noGrp="1"/>
+          </p:cNvSpPr>
+          <p:nvPr>
+            <p:ph type="sldNum" sz="quarter" idx="10"/>
+          </p:nvPr>
+        </p:nvSpPr>
+        <p:spPr/>
+        <p:txBody>
+          <a:bodyPr/>
+          <a:lstStyle/>
+          <a:p>
+            <a:fld id="{F7021451-1387-4CA6-816F-3879F97B5CBC}" type="slidenum">
+              <a:rPr lang="en-US"/>
+              <a:t>16</a:t>
             </a:fld>
             <a:endParaRPr lang="en-US"/>
           </a:p>
@@ -1875,7 +5209,7 @@
           <a:p>
             <a:r>
               <a:rPr lang="en-US" dirty="0"/>
-              <a:t>수익률만 유난히 높고 위험은 안 높아 보이면 셋 중 하나입니다 — 조건 덕이거나, 값어치가 깎여 있거나, 아직 못 본 위험이 있거나. 앞의 것들로 설명이 안 되면 마지막입니다.</a:t>
+              <a:t/>
             </a:r>
             <a:endParaRPr lang="en-US" dirty="0"/>
           </a:p>
@@ -1963,7 +5297,7 @@
           <a:p>
             <a:r>
               <a:rPr lang="en-US" dirty="0"/>
-              <a:t>"개별 종목이 들어갔는데 괜찮나요?" → 삼성전자·SK하이닉스가 들어간 게 맞고, 가격 출렁임 56.2%로 지수만 담은 상품 평균(36.4%)보다 큰 것도 맞습니다. 다만 컴퓨터로 똑같이 돌려본 손해 볼 가능성은 10.8%로 지수만 담은 상품 평균(15.8%)보다 낮고, 지수만 담은 5종 중 5종보다도 낮습니다. 두 자산이 0.87만큼 거의 같이 움직여서 "더 나쁜 쪽으로 판정"하는 불이익이 거의 없고, 원금 지키는 선도 30%로 훨씬 아래입니다.</a:t>
+              <a:t>수익률만 유난히 높고 위험은 안 높아 보이면 셋 중 하나입니다 — 조건 덕이거나, 값어치가 깎여 있거나, 아직 못 본 위험이 있거나. 앞의 것들로 설명이 안 되면 마지막입니다.</a:t>
             </a:r>
             <a:endParaRPr lang="en-US" dirty="0"/>
           </a:p>
@@ -2051,7 +5385,7 @@
           <a:p>
             <a:r>
               <a:rPr lang="en-US" dirty="0"/>
-              <a:t>"개별 종목이 들어갔는데 괜찮나요?" → 삼성전자·SK하이닉스가 들어간 게 맞고, 가격 출렁임 56.2%로 지수만 담은 상품 평균(36.4%)보다 큰 것도 맞습니다. 손해 볼 가능성도 15.9%로 지수만 담은 상품 평균(15.8%)보다 높습니다. 그런데도 올린 이유는 안전해서가 아니라 대가가 크기 때문입니다 — 손해 볼 가능성 1%마다 연 1.45%로, 지수 상품 평균 0.72%의 2.0배입니다. 원금 지키는 게 제일 중요한 분께는 추천 1번을 권하십시오.</a:t>
+              <a:t>"개별 종목이 들어갔는데 괜찮나요?" → 삼성전자·SK하이닉스가 들어간 게 맞고, 가격 출렁임 56.2%로 지수만 담은 상품 평균(36.4%)보다 큰 것도 맞습니다. 다만 컴퓨터로 똑같이 돌려본 손해 볼 가능성은 10.8%로 지수만 담은 상품 평균(15.8%)보다 낮고, 지수만 담은 5종 중 5종보다도 낮습니다. 두 자산이 0.87만큼 거의 같이 움직여서 "더 나쁜 쪽으로 판정"하는 불이익이 거의 없고, 원금 지키는 선도 30%로 훨씬 아래입니다.</a:t>
             </a:r>
             <a:endParaRPr lang="en-US" dirty="0"/>
           </a:p>
@@ -3303,6 +6637,1593 @@
                 <a:ea typeface="맑은 고딕" pitchFamily="34" charset="-122"/>
                 <a:cs typeface="맑은 고딕" pitchFamily="34" charset="-120"/>
               </a:rPr>
+              <a:t>추천 2 — 수익과 안정을 반반 보는 분</a:t>
+            </a:r>
+            <a:endParaRPr lang="en-US" sz="2400" dirty="0"/>
+          </a:p>
+        </p:txBody>
+      </p:sp>
+      <p:sp>
+        <p:nvSpPr>
+          <p:cNvPr id="4" name="Text 2"/>
+          <p:cNvSpPr/>
+          <p:nvPr/>
+        </p:nvSpPr>
+        <p:spPr>
+          <a:xfrm>
+            <a:off x="566928" y="1042416"/>
+            <a:ext cx="1993392" cy="457200"/>
+          </a:xfrm>
+          <a:prstGeom prst="rect">
+            <a:avLst/>
+          </a:prstGeom>
+          <a:noFill/>
+          <a:ln/>
+        </p:spPr>
+        <p:txBody>
+          <a:bodyPr wrap="square" lIns="0" tIns="0" rIns="0" bIns="0" rtlCol="0" anchor="ctr"/>
+          <a:lstStyle/>
+          <a:p>
+            <a:pPr indent="0" marL="0">
+              <a:buNone/>
+            </a:pPr>
+            <a:r>
+              <a:rPr lang="en-US" sz="2600" b="1" dirty="0">
+                <a:solidFill>
+                  <a:srgbClr val="1A1A1A"/>
+                </a:solidFill>
+                <a:latin typeface="맑은 고딕" pitchFamily="34" charset="0"/>
+                <a:ea typeface="맑은 고딕" pitchFamily="34" charset="-122"/>
+                <a:cs typeface="맑은 고딕" pitchFamily="34" charset="-120"/>
+              </a:rPr>
+              <a:t>제38165회</a:t>
+            </a:r>
+            <a:endParaRPr lang="en-US" sz="2600" dirty="0"/>
+          </a:p>
+        </p:txBody>
+      </p:sp>
+      <p:sp>
+        <p:nvSpPr>
+          <p:cNvPr id="5" name="Shape 3"/>
+          <p:cNvSpPr/>
+          <p:nvPr/>
+        </p:nvSpPr>
+        <p:spPr>
+          <a:xfrm>
+            <a:off x="2670048" y="1143000"/>
+            <a:ext cx="859536" cy="274320"/>
+          </a:xfrm>
+          <a:prstGeom prst="rect">
+            <a:avLst/>
+          </a:prstGeom>
+          <a:solidFill>
+            <a:srgbClr val="FBF2DC"/>
+          </a:solidFill>
+          <a:ln w="12700">
+            <a:solidFill>
+              <a:srgbClr val="333333"/>
+            </a:solidFill>
+            <a:prstDash val="solid"/>
+          </a:ln>
+        </p:spPr>
+      </p:sp>
+      <p:sp>
+        <p:nvSpPr>
+          <p:cNvPr id="6" name="Text 4"/>
+          <p:cNvSpPr/>
+          <p:nvPr/>
+        </p:nvSpPr>
+        <p:spPr>
+          <a:xfrm>
+            <a:off x="2670048" y="1143000"/>
+            <a:ext cx="859536" cy="274320"/>
+          </a:xfrm>
+          <a:prstGeom prst="rect">
+            <a:avLst/>
+          </a:prstGeom>
+          <a:noFill/>
+          <a:ln/>
+        </p:spPr>
+        <p:txBody>
+          <a:bodyPr wrap="square" lIns="0" tIns="0" rIns="0" bIns="0" rtlCol="0" anchor="ctr"/>
+          <a:lstStyle/>
+          <a:p>
+            <a:pPr algn="ctr" indent="0" marL="0">
+              <a:buNone/>
+            </a:pPr>
+            <a:r>
+              <a:rPr lang="en-US" sz="1050" b="1" dirty="0">
+                <a:solidFill>
+                  <a:srgbClr val="8A6A0B"/>
+                </a:solidFill>
+                <a:latin typeface="맑은 고딕" pitchFamily="34" charset="0"/>
+                <a:ea typeface="맑은 고딕" pitchFamily="34" charset="-122"/>
+                <a:cs typeface="맑은 고딕" pitchFamily="34" charset="-120"/>
+              </a:rPr>
+              <a:t>중간</a:t>
+            </a:r>
+            <a:endParaRPr lang="en-US" sz="1050" dirty="0"/>
+          </a:p>
+        </p:txBody>
+      </p:sp>
+      <p:sp>
+        <p:nvSpPr>
+          <p:cNvPr id="7" name="Shape 5"/>
+          <p:cNvSpPr/>
+          <p:nvPr/>
+        </p:nvSpPr>
+        <p:spPr>
+          <a:xfrm>
+            <a:off x="3602736" y="1143000"/>
+            <a:ext cx="859536" cy="274320"/>
+          </a:xfrm>
+          <a:prstGeom prst="rect">
+            <a:avLst/>
+          </a:prstGeom>
+          <a:solidFill>
+            <a:srgbClr val="ECEFF4"/>
+          </a:solidFill>
+          <a:ln w="12700">
+            <a:solidFill>
+              <a:srgbClr val="333333"/>
+            </a:solidFill>
+            <a:prstDash val="solid"/>
+          </a:ln>
+        </p:spPr>
+      </p:sp>
+      <p:sp>
+        <p:nvSpPr>
+          <p:cNvPr id="8" name="Text 6"/>
+          <p:cNvSpPr/>
+          <p:nvPr/>
+        </p:nvSpPr>
+        <p:spPr>
+          <a:xfrm>
+            <a:off x="3602736" y="1143000"/>
+            <a:ext cx="859536" cy="274320"/>
+          </a:xfrm>
+          <a:prstGeom prst="rect">
+            <a:avLst/>
+          </a:prstGeom>
+          <a:noFill/>
+          <a:ln/>
+        </p:spPr>
+        <p:txBody>
+          <a:bodyPr wrap="square" lIns="0" tIns="0" rIns="0" bIns="0" rtlCol="0" anchor="ctr"/>
+          <a:lstStyle/>
+          <a:p>
+            <a:pPr algn="ctr" indent="0" marL="0">
+              <a:buNone/>
+            </a:pPr>
+            <a:r>
+              <a:rPr lang="en-US" sz="1050" b="1" dirty="0">
+                <a:solidFill>
+                  <a:srgbClr val="043B72"/>
+                </a:solidFill>
+                <a:latin typeface="맑은 고딕" pitchFamily="34" charset="0"/>
+                <a:ea typeface="맑은 고딕" pitchFamily="34" charset="-122"/>
+                <a:cs typeface="맑은 고딕" pitchFamily="34" charset="-120"/>
+              </a:rPr>
+              <a:t>종목형</a:t>
+            </a:r>
+            <a:endParaRPr lang="en-US" sz="1050" dirty="0"/>
+          </a:p>
+        </p:txBody>
+      </p:sp>
+      <p:sp>
+        <p:nvSpPr>
+          <p:cNvPr id="9" name="Text 7"/>
+          <p:cNvSpPr/>
+          <p:nvPr/>
+        </p:nvSpPr>
+        <p:spPr>
+          <a:xfrm>
+            <a:off x="566928" y="1536192"/>
+            <a:ext cx="6766560" cy="274320"/>
+          </a:xfrm>
+          <a:prstGeom prst="rect">
+            <a:avLst/>
+          </a:prstGeom>
+          <a:noFill/>
+          <a:ln/>
+        </p:spPr>
+        <p:txBody>
+          <a:bodyPr wrap="square" lIns="0" tIns="0" rIns="0" bIns="0" rtlCol="0" anchor="ctr"/>
+          <a:lstStyle/>
+          <a:p>
+            <a:pPr indent="0" marL="0">
+              <a:buNone/>
+            </a:pPr>
+            <a:r>
+              <a:rPr lang="en-US" sz="1300" dirty="0">
+                <a:solidFill>
+                  <a:srgbClr val="6C6C6C"/>
+                </a:solidFill>
+                <a:latin typeface="맑은 고딕" pitchFamily="34" charset="0"/>
+                <a:ea typeface="맑은 고딕" pitchFamily="34" charset="-122"/>
+                <a:cs typeface="맑은 고딕" pitchFamily="34" charset="-120"/>
+              </a:rPr>
+              <a:t>삼성전자 · SK하이닉스  ·  36개월  ·  3개월마다 확인</a:t>
+            </a:r>
+            <a:endParaRPr lang="en-US" sz="1300" dirty="0"/>
+          </a:p>
+        </p:txBody>
+      </p:sp>
+      <p:sp>
+        <p:nvSpPr>
+          <p:cNvPr id="10" name="Shape 8"/>
+          <p:cNvSpPr/>
+          <p:nvPr/>
+        </p:nvSpPr>
+        <p:spPr>
+          <a:xfrm>
+            <a:off x="8503920" y="1005840"/>
+            <a:ext cx="3127248" cy="914400"/>
+          </a:xfrm>
+          <a:prstGeom prst="rect">
+            <a:avLst/>
+          </a:prstGeom>
+          <a:solidFill>
+            <a:srgbClr val="F7F8FA"/>
+          </a:solidFill>
+          <a:ln w="12700">
+            <a:solidFill>
+              <a:srgbClr val="CDCECB"/>
+            </a:solidFill>
+            <a:prstDash val="solid"/>
+          </a:ln>
+        </p:spPr>
+      </p:sp>
+      <p:sp>
+        <p:nvSpPr>
+          <p:cNvPr id="11" name="Text 9"/>
+          <p:cNvSpPr/>
+          <p:nvPr/>
+        </p:nvSpPr>
+        <p:spPr>
+          <a:xfrm>
+            <a:off x="8705088" y="1115568"/>
+            <a:ext cx="2743200" cy="219456"/>
+          </a:xfrm>
+          <a:prstGeom prst="rect">
+            <a:avLst/>
+          </a:prstGeom>
+          <a:noFill/>
+          <a:ln/>
+        </p:spPr>
+        <p:txBody>
+          <a:bodyPr wrap="square" lIns="0" tIns="0" rIns="0" bIns="0" rtlCol="0" anchor="ctr"/>
+          <a:lstStyle/>
+          <a:p>
+            <a:pPr indent="0" marL="0">
+              <a:buNone/>
+            </a:pPr>
+            <a:r>
+              <a:rPr lang="en-US" sz="1050" dirty="0">
+                <a:solidFill>
+                  <a:srgbClr val="6C6C6C"/>
+                </a:solidFill>
+                <a:latin typeface="맑은 고딕" pitchFamily="34" charset="0"/>
+                <a:ea typeface="맑은 고딕" pitchFamily="34" charset="-122"/>
+                <a:cs typeface="맑은 고딕" pitchFamily="34" charset="-120"/>
+              </a:rPr>
+              <a:t>잘 되면 연 수익률</a:t>
+            </a:r>
+            <a:endParaRPr lang="en-US" sz="1050" dirty="0"/>
+          </a:p>
+        </p:txBody>
+      </p:sp>
+      <p:sp>
+        <p:nvSpPr>
+          <p:cNvPr id="12" name="Text 10"/>
+          <p:cNvSpPr/>
+          <p:nvPr/>
+        </p:nvSpPr>
+        <p:spPr>
+          <a:xfrm>
+            <a:off x="8705088" y="1335024"/>
+            <a:ext cx="2743200" cy="512064"/>
+          </a:xfrm>
+          <a:prstGeom prst="rect">
+            <a:avLst/>
+          </a:prstGeom>
+          <a:noFill/>
+          <a:ln/>
+        </p:spPr>
+        <p:txBody>
+          <a:bodyPr wrap="square" lIns="0" tIns="0" rIns="0" bIns="0" rtlCol="0" anchor="ctr"/>
+          <a:lstStyle/>
+          <a:p>
+            <a:pPr indent="0" marL="0">
+              <a:buNone/>
+            </a:pPr>
+            <a:r>
+              <a:rPr lang="en-US" sz="3400" b="1" dirty="0">
+                <a:solidFill>
+                  <a:srgbClr val="F58220"/>
+                </a:solidFill>
+                <a:latin typeface="맑은 고딕" pitchFamily="34" charset="0"/>
+                <a:ea typeface="맑은 고딕" pitchFamily="34" charset="-122"/>
+                <a:cs typeface="맑은 고딕" pitchFamily="34" charset="-120"/>
+              </a:rPr>
+              <a:t>23.0</a:t>
+            </a:r>
+            <a:pPr indent="0" marL="0">
+              <a:buNone/>
+            </a:pPr>
+            <a:r>
+              <a:rPr lang="en-US" sz="2000" b="1" dirty="0">
+                <a:solidFill>
+                  <a:srgbClr val="F58220"/>
+                </a:solidFill>
+                <a:latin typeface="맑은 고딕" pitchFamily="34" charset="0"/>
+                <a:ea typeface="맑은 고딕" pitchFamily="34" charset="-122"/>
+                <a:cs typeface="맑은 고딕" pitchFamily="34" charset="-120"/>
+              </a:rPr>
+              <a:t>%</a:t>
+            </a:r>
+            <a:endParaRPr lang="en-US" sz="3400" dirty="0"/>
+          </a:p>
+        </p:txBody>
+      </p:sp>
+      <p:sp>
+        <p:nvSpPr>
+          <p:cNvPr id="13" name="Text 11"/>
+          <p:cNvSpPr/>
+          <p:nvPr/>
+        </p:nvSpPr>
+        <p:spPr>
+          <a:xfrm>
+            <a:off x="566928" y="1883664"/>
+            <a:ext cx="6766560" cy="274320"/>
+          </a:xfrm>
+          <a:prstGeom prst="rect">
+            <a:avLst/>
+          </a:prstGeom>
+          <a:noFill/>
+          <a:ln/>
+        </p:spPr>
+        <p:txBody>
+          <a:bodyPr wrap="square" lIns="0" tIns="0" rIns="0" bIns="0" rtlCol="0" anchor="ctr"/>
+          <a:lstStyle/>
+          <a:p>
+            <a:pPr indent="0" marL="0">
+              <a:buNone/>
+            </a:pPr>
+            <a:r>
+              <a:rPr lang="en-US" sz="1300" b="1" dirty="0">
+                <a:solidFill>
+                  <a:srgbClr val="1A1A1A"/>
+                </a:solidFill>
+                <a:latin typeface="맑은 고딕" pitchFamily="34" charset="0"/>
+                <a:ea typeface="맑은 고딕" pitchFamily="34" charset="-122"/>
+                <a:cs typeface="맑은 고딕" pitchFamily="34" charset="-120"/>
+              </a:rPr>
+              <a:t>1만원 → 빠르면 3개월 뒤 10,575원</a:t>
+            </a:r>
+            <a:endParaRPr lang="en-US" sz="1300" dirty="0"/>
+          </a:p>
+        </p:txBody>
+      </p:sp>
+      <p:sp>
+        <p:nvSpPr>
+          <p:cNvPr id="14" name="Shape 12"/>
+          <p:cNvSpPr/>
+          <p:nvPr/>
+        </p:nvSpPr>
+        <p:spPr>
+          <a:xfrm>
+            <a:off x="566928" y="2267712"/>
+            <a:ext cx="1042416" cy="274320"/>
+          </a:xfrm>
+          <a:prstGeom prst="rect">
+            <a:avLst/>
+          </a:prstGeom>
+          <a:solidFill>
+            <a:srgbClr val="043B72"/>
+          </a:solidFill>
+          <a:ln w="12700">
+            <a:solidFill>
+              <a:srgbClr val="333333"/>
+            </a:solidFill>
+            <a:prstDash val="solid"/>
+          </a:ln>
+        </p:spPr>
+      </p:sp>
+      <p:sp>
+        <p:nvSpPr>
+          <p:cNvPr id="15" name="Text 13"/>
+          <p:cNvSpPr/>
+          <p:nvPr/>
+        </p:nvSpPr>
+        <p:spPr>
+          <a:xfrm>
+            <a:off x="566928" y="2267712"/>
+            <a:ext cx="1042416" cy="274320"/>
+          </a:xfrm>
+          <a:prstGeom prst="rect">
+            <a:avLst/>
+          </a:prstGeom>
+          <a:noFill/>
+          <a:ln/>
+        </p:spPr>
+        <p:txBody>
+          <a:bodyPr wrap="square" lIns="0" tIns="0" rIns="0" bIns="0" rtlCol="0" anchor="ctr"/>
+          <a:lstStyle/>
+          <a:p>
+            <a:pPr algn="ctr" indent="0" marL="0">
+              <a:buNone/>
+            </a:pPr>
+            <a:r>
+              <a:rPr lang="en-US" sz="1050" b="1" dirty="0">
+                <a:solidFill>
+                  <a:srgbClr val="FFFFFF"/>
+                </a:solidFill>
+                <a:latin typeface="맑은 고딕" pitchFamily="34" charset="0"/>
+                <a:ea typeface="맑은 고딕" pitchFamily="34" charset="-122"/>
+                <a:cs typeface="맑은 고딕" pitchFamily="34" charset="-120"/>
+              </a:rPr>
+              <a:t>무엇을 보나</a:t>
+            </a:r>
+            <a:endParaRPr lang="en-US" sz="1050" dirty="0"/>
+          </a:p>
+        </p:txBody>
+      </p:sp>
+      <p:sp>
+        <p:nvSpPr>
+          <p:cNvPr id="16" name="Text 14"/>
+          <p:cNvSpPr/>
+          <p:nvPr/>
+        </p:nvSpPr>
+        <p:spPr>
+          <a:xfrm>
+            <a:off x="1755648" y="2231136"/>
+            <a:ext cx="9869119" cy="384048"/>
+          </a:xfrm>
+          <a:prstGeom prst="rect">
+            <a:avLst/>
+          </a:prstGeom>
+          <a:noFill/>
+          <a:ln/>
+        </p:spPr>
+        <p:txBody>
+          <a:bodyPr wrap="square" lIns="0" tIns="0" rIns="0" bIns="0" rtlCol="0" anchor="ctr"/>
+          <a:lstStyle/>
+          <a:p>
+            <a:pPr indent="0" marL="0">
+              <a:buNone/>
+            </a:pPr>
+            <a:r>
+              <a:rPr lang="en-US" sz="1200" dirty="0">
+                <a:solidFill>
+                  <a:srgbClr val="3D3D3D"/>
+                </a:solidFill>
+                <a:latin typeface="맑은 고딕" pitchFamily="34" charset="0"/>
+                <a:ea typeface="맑은 고딕" pitchFamily="34" charset="-122"/>
+                <a:cs typeface="맑은 고딕" pitchFamily="34" charset="-120"/>
+              </a:rPr>
+              <a:t>삼성전자 · SK하이닉스 중 더 많이 떨어진 하나로 판정합니다. 하나만 나빠도 그쪽을 봅니다.</a:t>
+            </a:r>
+            <a:endParaRPr lang="en-US" sz="1200" dirty="0"/>
+          </a:p>
+        </p:txBody>
+      </p:sp>
+      <p:sp>
+        <p:nvSpPr>
+          <p:cNvPr id="17" name="Shape 15"/>
+          <p:cNvSpPr/>
+          <p:nvPr/>
+        </p:nvSpPr>
+        <p:spPr>
+          <a:xfrm>
+            <a:off x="566928" y="2724912"/>
+            <a:ext cx="1042416" cy="274320"/>
+          </a:xfrm>
+          <a:prstGeom prst="rect">
+            <a:avLst/>
+          </a:prstGeom>
+          <a:solidFill>
+            <a:srgbClr val="043B72"/>
+          </a:solidFill>
+          <a:ln w="12700">
+            <a:solidFill>
+              <a:srgbClr val="333333"/>
+            </a:solidFill>
+            <a:prstDash val="solid"/>
+          </a:ln>
+        </p:spPr>
+      </p:sp>
+      <p:sp>
+        <p:nvSpPr>
+          <p:cNvPr id="18" name="Text 16"/>
+          <p:cNvSpPr/>
+          <p:nvPr/>
+        </p:nvSpPr>
+        <p:spPr>
+          <a:xfrm>
+            <a:off x="566928" y="2724912"/>
+            <a:ext cx="1042416" cy="274320"/>
+          </a:xfrm>
+          <a:prstGeom prst="rect">
+            <a:avLst/>
+          </a:prstGeom>
+          <a:noFill/>
+          <a:ln/>
+        </p:spPr>
+        <p:txBody>
+          <a:bodyPr wrap="square" lIns="0" tIns="0" rIns="0" bIns="0" rtlCol="0" anchor="ctr"/>
+          <a:lstStyle/>
+          <a:p>
+            <a:pPr algn="ctr" indent="0" marL="0">
+              <a:buNone/>
+            </a:pPr>
+            <a:r>
+              <a:rPr lang="en-US" sz="1050" b="1" dirty="0">
+                <a:solidFill>
+                  <a:srgbClr val="FFFFFF"/>
+                </a:solidFill>
+                <a:latin typeface="맑은 고딕" pitchFamily="34" charset="0"/>
+                <a:ea typeface="맑은 고딕" pitchFamily="34" charset="-122"/>
+                <a:cs typeface="맑은 고딕" pitchFamily="34" charset="-120"/>
+              </a:rPr>
+              <a:t>언제 끝나나</a:t>
+            </a:r>
+            <a:endParaRPr lang="en-US" sz="1050" dirty="0"/>
+          </a:p>
+        </p:txBody>
+      </p:sp>
+      <p:sp>
+        <p:nvSpPr>
+          <p:cNvPr id="19" name="Text 17"/>
+          <p:cNvSpPr/>
+          <p:nvPr/>
+        </p:nvSpPr>
+        <p:spPr>
+          <a:xfrm>
+            <a:off x="1755648" y="2688336"/>
+            <a:ext cx="9869119" cy="384048"/>
+          </a:xfrm>
+          <a:prstGeom prst="rect">
+            <a:avLst/>
+          </a:prstGeom>
+          <a:noFill/>
+          <a:ln/>
+        </p:spPr>
+        <p:txBody>
+          <a:bodyPr wrap="square" lIns="0" tIns="0" rIns="0" bIns="0" rtlCol="0" anchor="ctr"/>
+          <a:lstStyle/>
+          <a:p>
+            <a:pPr indent="0" marL="0">
+              <a:buNone/>
+            </a:pPr>
+            <a:r>
+              <a:rPr lang="en-US" sz="1200" dirty="0">
+                <a:solidFill>
+                  <a:srgbClr val="3D3D3D"/>
+                </a:solidFill>
+                <a:latin typeface="맑은 고딕" pitchFamily="34" charset="0"/>
+                <a:ea typeface="맑은 고딕" pitchFamily="34" charset="-122"/>
+                <a:cs typeface="맑은 고딕" pitchFamily="34" charset="-120"/>
+              </a:rPr>
+              <a:t>3개월마다 확인해서 처음 가격의 85% 이상(-15%까지 떨어져도 괜찮다는 뜻)이면 그 자리에서 끝나고 1만원이 10,575원이 되어 돌아옵니다.</a:t>
+            </a:r>
+            <a:endParaRPr lang="en-US" sz="1200" dirty="0"/>
+          </a:p>
+        </p:txBody>
+      </p:sp>
+      <p:sp>
+        <p:nvSpPr>
+          <p:cNvPr id="20" name="Shape 18"/>
+          <p:cNvSpPr/>
+          <p:nvPr/>
+        </p:nvSpPr>
+        <p:spPr>
+          <a:xfrm>
+            <a:off x="566928" y="3182112"/>
+            <a:ext cx="1042416" cy="274320"/>
+          </a:xfrm>
+          <a:prstGeom prst="rect">
+            <a:avLst/>
+          </a:prstGeom>
+          <a:solidFill>
+            <a:srgbClr val="043B72"/>
+          </a:solidFill>
+          <a:ln w="12700">
+            <a:solidFill>
+              <a:srgbClr val="333333"/>
+            </a:solidFill>
+            <a:prstDash val="solid"/>
+          </a:ln>
+        </p:spPr>
+      </p:sp>
+      <p:sp>
+        <p:nvSpPr>
+          <p:cNvPr id="21" name="Text 19"/>
+          <p:cNvSpPr/>
+          <p:nvPr/>
+        </p:nvSpPr>
+        <p:spPr>
+          <a:xfrm>
+            <a:off x="566928" y="3182112"/>
+            <a:ext cx="1042416" cy="274320"/>
+          </a:xfrm>
+          <a:prstGeom prst="rect">
+            <a:avLst/>
+          </a:prstGeom>
+          <a:noFill/>
+          <a:ln/>
+        </p:spPr>
+        <p:txBody>
+          <a:bodyPr wrap="square" lIns="0" tIns="0" rIns="0" bIns="0" rtlCol="0" anchor="ctr"/>
+          <a:lstStyle/>
+          <a:p>
+            <a:pPr algn="ctr" indent="0" marL="0">
+              <a:buNone/>
+            </a:pPr>
+            <a:r>
+              <a:rPr lang="en-US" sz="1050" b="1" dirty="0">
+                <a:solidFill>
+                  <a:srgbClr val="FFFFFF"/>
+                </a:solidFill>
+                <a:latin typeface="맑은 고딕" pitchFamily="34" charset="0"/>
+                <a:ea typeface="맑은 고딕" pitchFamily="34" charset="-122"/>
+                <a:cs typeface="맑은 고딕" pitchFamily="34" charset="-120"/>
+              </a:rPr>
+              <a:t>원금 지키기</a:t>
+            </a:r>
+            <a:endParaRPr lang="en-US" sz="1050" dirty="0"/>
+          </a:p>
+        </p:txBody>
+      </p:sp>
+      <p:sp>
+        <p:nvSpPr>
+          <p:cNvPr id="22" name="Text 20"/>
+          <p:cNvSpPr/>
+          <p:nvPr/>
+        </p:nvSpPr>
+        <p:spPr>
+          <a:xfrm>
+            <a:off x="1755648" y="3145536"/>
+            <a:ext cx="9869119" cy="384048"/>
+          </a:xfrm>
+          <a:prstGeom prst="rect">
+            <a:avLst/>
+          </a:prstGeom>
+          <a:noFill/>
+          <a:ln/>
+        </p:spPr>
+        <p:txBody>
+          <a:bodyPr wrap="square" lIns="0" tIns="0" rIns="0" bIns="0" rtlCol="0" anchor="ctr"/>
+          <a:lstStyle/>
+          <a:p>
+            <a:pPr indent="0" marL="0">
+              <a:buNone/>
+            </a:pPr>
+            <a:r>
+              <a:rPr lang="en-US" sz="1200" dirty="0">
+                <a:solidFill>
+                  <a:srgbClr val="3D3D3D"/>
+                </a:solidFill>
+                <a:latin typeface="맑은 고딕" pitchFamily="34" charset="0"/>
+                <a:ea typeface="맑은 고딕" pitchFamily="34" charset="-122"/>
+                <a:cs typeface="맑은 고딕" pitchFamily="34" charset="-120"/>
+              </a:rPr>
+              <a:t>끝날 때까지 종가가 단 한 번도 35%(처음 가격에서 -65%) 아래로 안 내려가면, 마지막에 얼마가 됐든 원금과 이자를 다 받습니다.</a:t>
+            </a:r>
+            <a:endParaRPr lang="en-US" sz="1200" dirty="0"/>
+          </a:p>
+        </p:txBody>
+      </p:sp>
+      <p:sp>
+        <p:nvSpPr>
+          <p:cNvPr id="23" name="Shape 21"/>
+          <p:cNvSpPr/>
+          <p:nvPr/>
+        </p:nvSpPr>
+        <p:spPr>
+          <a:xfrm>
+            <a:off x="566928" y="3639312"/>
+            <a:ext cx="1042416" cy="274320"/>
+          </a:xfrm>
+          <a:prstGeom prst="rect">
+            <a:avLst/>
+          </a:prstGeom>
+          <a:solidFill>
+            <a:srgbClr val="043B72"/>
+          </a:solidFill>
+          <a:ln w="12700">
+            <a:solidFill>
+              <a:srgbClr val="333333"/>
+            </a:solidFill>
+            <a:prstDash val="solid"/>
+          </a:ln>
+        </p:spPr>
+      </p:sp>
+      <p:sp>
+        <p:nvSpPr>
+          <p:cNvPr id="24" name="Text 22"/>
+          <p:cNvSpPr/>
+          <p:nvPr/>
+        </p:nvSpPr>
+        <p:spPr>
+          <a:xfrm>
+            <a:off x="566928" y="3639312"/>
+            <a:ext cx="1042416" cy="274320"/>
+          </a:xfrm>
+          <a:prstGeom prst="rect">
+            <a:avLst/>
+          </a:prstGeom>
+          <a:noFill/>
+          <a:ln/>
+        </p:spPr>
+        <p:txBody>
+          <a:bodyPr wrap="square" lIns="0" tIns="0" rIns="0" bIns="0" rtlCol="0" anchor="ctr"/>
+          <a:lstStyle/>
+          <a:p>
+            <a:pPr algn="ctr" indent="0" marL="0">
+              <a:buNone/>
+            </a:pPr>
+            <a:r>
+              <a:rPr lang="en-US" sz="1050" b="1" dirty="0">
+                <a:solidFill>
+                  <a:srgbClr val="FFFFFF"/>
+                </a:solidFill>
+                <a:latin typeface="맑은 고딕" pitchFamily="34" charset="0"/>
+                <a:ea typeface="맑은 고딕" pitchFamily="34" charset="-122"/>
+                <a:cs typeface="맑은 고딕" pitchFamily="34" charset="-120"/>
+              </a:rPr>
+              <a:t>손해 나는 때</a:t>
+            </a:r>
+            <a:endParaRPr lang="en-US" sz="1050" dirty="0"/>
+          </a:p>
+        </p:txBody>
+      </p:sp>
+      <p:sp>
+        <p:nvSpPr>
+          <p:cNvPr id="25" name="Text 23"/>
+          <p:cNvSpPr/>
+          <p:nvPr/>
+        </p:nvSpPr>
+        <p:spPr>
+          <a:xfrm>
+            <a:off x="1755648" y="3602736"/>
+            <a:ext cx="9869119" cy="384048"/>
+          </a:xfrm>
+          <a:prstGeom prst="rect">
+            <a:avLst/>
+          </a:prstGeom>
+          <a:noFill/>
+          <a:ln/>
+        </p:spPr>
+        <p:txBody>
+          <a:bodyPr wrap="square" lIns="0" tIns="0" rIns="0" bIns="0" rtlCol="0" anchor="ctr"/>
+          <a:lstStyle/>
+          <a:p>
+            <a:pPr indent="0" marL="0">
+              <a:buNone/>
+            </a:pPr>
+            <a:r>
+              <a:rPr lang="en-US" sz="1200" dirty="0">
+                <a:solidFill>
+                  <a:srgbClr val="3D3D3D"/>
+                </a:solidFill>
+                <a:latin typeface="맑은 고딕" pitchFamily="34" charset="0"/>
+                <a:ea typeface="맑은 고딕" pitchFamily="34" charset="-122"/>
+                <a:cs typeface="맑은 고딕" pitchFamily="34" charset="-120"/>
+              </a:rPr>
+              <a:t>35% 아래를 한 번이라도 밟았고 마지막 날에도 70% 아래면, 떨어진 만큼 그대로 손실입니다.</a:t>
+            </a:r>
+            <a:endParaRPr lang="en-US" sz="1200" dirty="0"/>
+          </a:p>
+        </p:txBody>
+      </p:sp>
+      <p:sp>
+        <p:nvSpPr>
+          <p:cNvPr id="26" name="Shape 24"/>
+          <p:cNvSpPr/>
+          <p:nvPr/>
+        </p:nvSpPr>
+        <p:spPr>
+          <a:xfrm>
+            <a:off x="566928" y="4224528"/>
+            <a:ext cx="2599868" cy="914400"/>
+          </a:xfrm>
+          <a:prstGeom prst="rect">
+            <a:avLst/>
+          </a:prstGeom>
+          <a:solidFill>
+            <a:srgbClr val="F7F8FA"/>
+          </a:solidFill>
+          <a:ln w="12700">
+            <a:solidFill>
+              <a:srgbClr val="CDCECB"/>
+            </a:solidFill>
+            <a:prstDash val="solid"/>
+          </a:ln>
+        </p:spPr>
+      </p:sp>
+      <p:sp>
+        <p:nvSpPr>
+          <p:cNvPr id="27" name="Text 25"/>
+          <p:cNvSpPr/>
+          <p:nvPr/>
+        </p:nvSpPr>
+        <p:spPr>
+          <a:xfrm>
+            <a:off x="713232" y="4325112"/>
+            <a:ext cx="2307260" cy="219456"/>
+          </a:xfrm>
+          <a:prstGeom prst="rect">
+            <a:avLst/>
+          </a:prstGeom>
+          <a:noFill/>
+          <a:ln/>
+        </p:spPr>
+        <p:txBody>
+          <a:bodyPr wrap="square" lIns="0" tIns="0" rIns="0" bIns="0" rtlCol="0" anchor="ctr"/>
+          <a:lstStyle/>
+          <a:p>
+            <a:pPr indent="0" marL="0">
+              <a:buNone/>
+            </a:pPr>
+            <a:r>
+              <a:rPr lang="en-US" sz="1000" dirty="0">
+                <a:solidFill>
+                  <a:srgbClr val="6C6C6C"/>
+                </a:solidFill>
+                <a:latin typeface="맑은 고딕" pitchFamily="34" charset="0"/>
+                <a:ea typeface="맑은 고딕" pitchFamily="34" charset="-122"/>
+                <a:cs typeface="맑은 고딕" pitchFamily="34" charset="-120"/>
+              </a:rPr>
+              <a:t>A. 발행사 20년 백테스트</a:t>
+            </a:r>
+            <a:endParaRPr lang="en-US" sz="1000" dirty="0"/>
+          </a:p>
+        </p:txBody>
+      </p:sp>
+      <p:sp>
+        <p:nvSpPr>
+          <p:cNvPr id="28" name="Text 26"/>
+          <p:cNvSpPr/>
+          <p:nvPr/>
+        </p:nvSpPr>
+        <p:spPr>
+          <a:xfrm>
+            <a:off x="713232" y="4544568"/>
+            <a:ext cx="2307260" cy="292608"/>
+          </a:xfrm>
+          <a:prstGeom prst="rect">
+            <a:avLst/>
+          </a:prstGeom>
+          <a:noFill/>
+          <a:ln/>
+        </p:spPr>
+        <p:txBody>
+          <a:bodyPr wrap="square" lIns="0" tIns="0" rIns="0" bIns="0" rtlCol="0" anchor="ctr"/>
+          <a:lstStyle/>
+          <a:p>
+            <a:pPr indent="0" marL="0">
+              <a:buNone/>
+            </a:pPr>
+            <a:r>
+              <a:rPr lang="en-US" sz="1600" b="1" dirty="0">
+                <a:solidFill>
+                  <a:srgbClr val="1A1A1A"/>
+                </a:solidFill>
+                <a:latin typeface="맑은 고딕" pitchFamily="34" charset="0"/>
+                <a:ea typeface="맑은 고딕" pitchFamily="34" charset="-122"/>
+                <a:cs typeface="맑은 고딕" pitchFamily="34" charset="-120"/>
+              </a:rPr>
+              <a:t>0.53%</a:t>
+            </a:r>
+            <a:endParaRPr lang="en-US" sz="1600" dirty="0"/>
+          </a:p>
+        </p:txBody>
+      </p:sp>
+      <p:sp>
+        <p:nvSpPr>
+          <p:cNvPr id="29" name="Text 27"/>
+          <p:cNvSpPr/>
+          <p:nvPr/>
+        </p:nvSpPr>
+        <p:spPr>
+          <a:xfrm>
+            <a:off x="713232" y="4846320"/>
+            <a:ext cx="2307260" cy="237744"/>
+          </a:xfrm>
+          <a:prstGeom prst="rect">
+            <a:avLst/>
+          </a:prstGeom>
+          <a:noFill/>
+          <a:ln/>
+        </p:spPr>
+        <p:txBody>
+          <a:bodyPr wrap="square" lIns="0" tIns="0" rIns="0" bIns="0" rtlCol="0" anchor="ctr"/>
+          <a:lstStyle/>
+          <a:p>
+            <a:pPr indent="0" marL="0">
+              <a:buNone/>
+            </a:pPr>
+            <a:r>
+              <a:rPr lang="en-US" sz="950" dirty="0">
+                <a:solidFill>
+                  <a:srgbClr val="84888B"/>
+                </a:solidFill>
+                <a:latin typeface="맑은 고딕" pitchFamily="34" charset="0"/>
+                <a:ea typeface="맑은 고딕" pitchFamily="34" charset="-122"/>
+                <a:cs typeface="맑은 고딕" pitchFamily="34" charset="-120"/>
+              </a:rPr>
+              <a:t>5,109번 중 27번</a:t>
+            </a:r>
+            <a:endParaRPr lang="en-US" sz="950" dirty="0"/>
+          </a:p>
+        </p:txBody>
+      </p:sp>
+      <p:sp>
+        <p:nvSpPr>
+          <p:cNvPr id="30" name="Shape 28"/>
+          <p:cNvSpPr/>
+          <p:nvPr/>
+        </p:nvSpPr>
+        <p:spPr>
+          <a:xfrm>
+            <a:off x="3386252" y="4224528"/>
+            <a:ext cx="2599868" cy="914400"/>
+          </a:xfrm>
+          <a:prstGeom prst="rect">
+            <a:avLst/>
+          </a:prstGeom>
+          <a:solidFill>
+            <a:srgbClr val="F7F8FA"/>
+          </a:solidFill>
+          <a:ln w="12700">
+            <a:solidFill>
+              <a:srgbClr val="CDCECB"/>
+            </a:solidFill>
+            <a:prstDash val="solid"/>
+          </a:ln>
+        </p:spPr>
+      </p:sp>
+      <p:sp>
+        <p:nvSpPr>
+          <p:cNvPr id="31" name="Text 29"/>
+          <p:cNvSpPr/>
+          <p:nvPr/>
+        </p:nvSpPr>
+        <p:spPr>
+          <a:xfrm>
+            <a:off x="3532556" y="4325112"/>
+            <a:ext cx="2307260" cy="219456"/>
+          </a:xfrm>
+          <a:prstGeom prst="rect">
+            <a:avLst/>
+          </a:prstGeom>
+          <a:noFill/>
+          <a:ln/>
+        </p:spPr>
+        <p:txBody>
+          <a:bodyPr wrap="square" lIns="0" tIns="0" rIns="0" bIns="0" rtlCol="0" anchor="ctr"/>
+          <a:lstStyle/>
+          <a:p>
+            <a:pPr indent="0" marL="0">
+              <a:buNone/>
+            </a:pPr>
+            <a:r>
+              <a:rPr lang="en-US" sz="1000" dirty="0">
+                <a:solidFill>
+                  <a:srgbClr val="6C6C6C"/>
+                </a:solidFill>
+                <a:latin typeface="맑은 고딕" pitchFamily="34" charset="0"/>
+                <a:ea typeface="맑은 고딕" pitchFamily="34" charset="-122"/>
+                <a:cs typeface="맑은 고딕" pitchFamily="34" charset="-120"/>
+              </a:rPr>
+              <a:t>B. 같은 조건 시뮬레이션 손실</a:t>
+            </a:r>
+            <a:endParaRPr lang="en-US" sz="1000" dirty="0"/>
+          </a:p>
+        </p:txBody>
+      </p:sp>
+      <p:sp>
+        <p:nvSpPr>
+          <p:cNvPr id="32" name="Text 30"/>
+          <p:cNvSpPr/>
+          <p:nvPr/>
+        </p:nvSpPr>
+        <p:spPr>
+          <a:xfrm>
+            <a:off x="3532556" y="4544568"/>
+            <a:ext cx="2307260" cy="292608"/>
+          </a:xfrm>
+          <a:prstGeom prst="rect">
+            <a:avLst/>
+          </a:prstGeom>
+          <a:noFill/>
+          <a:ln/>
+        </p:spPr>
+        <p:txBody>
+          <a:bodyPr wrap="square" lIns="0" tIns="0" rIns="0" bIns="0" rtlCol="0" anchor="ctr"/>
+          <a:lstStyle/>
+          <a:p>
+            <a:pPr indent="0" marL="0">
+              <a:buNone/>
+            </a:pPr>
+            <a:r>
+              <a:rPr lang="en-US" sz="1600" b="1" dirty="0">
+                <a:solidFill>
+                  <a:srgbClr val="1A1A1A"/>
+                </a:solidFill>
+                <a:latin typeface="맑은 고딕" pitchFamily="34" charset="0"/>
+                <a:ea typeface="맑은 고딕" pitchFamily="34" charset="-122"/>
+                <a:cs typeface="맑은 고딕" pitchFamily="34" charset="-120"/>
+              </a:rPr>
+              <a:t>15.9%</a:t>
+            </a:r>
+            <a:endParaRPr lang="en-US" sz="1600" dirty="0"/>
+          </a:p>
+        </p:txBody>
+      </p:sp>
+      <p:sp>
+        <p:nvSpPr>
+          <p:cNvPr id="33" name="Text 31"/>
+          <p:cNvSpPr/>
+          <p:nvPr/>
+        </p:nvSpPr>
+        <p:spPr>
+          <a:xfrm>
+            <a:off x="3532556" y="4846320"/>
+            <a:ext cx="2307260" cy="237744"/>
+          </a:xfrm>
+          <a:prstGeom prst="rect">
+            <a:avLst/>
+          </a:prstGeom>
+          <a:noFill/>
+          <a:ln/>
+        </p:spPr>
+        <p:txBody>
+          <a:bodyPr wrap="square" lIns="0" tIns="0" rIns="0" bIns="0" rtlCol="0" anchor="ctr"/>
+          <a:lstStyle/>
+          <a:p>
+            <a:pPr indent="0" marL="0">
+              <a:buNone/>
+            </a:pPr>
+            <a:r>
+              <a:rPr lang="en-US" sz="950" dirty="0">
+                <a:solidFill>
+                  <a:srgbClr val="84888B"/>
+                </a:solidFill>
+                <a:latin typeface="맑은 고딕" pitchFamily="34" charset="0"/>
+                <a:ea typeface="맑은 고딕" pitchFamily="34" charset="-122"/>
+                <a:cs typeface="맑은 고딕" pitchFamily="34" charset="-120"/>
+              </a:rPr>
+              <a:t>18종 평균 21.6% · 낮은 쪽 8번째</a:t>
+            </a:r>
+            <a:endParaRPr lang="en-US" sz="950" dirty="0"/>
+          </a:p>
+        </p:txBody>
+      </p:sp>
+      <p:sp>
+        <p:nvSpPr>
+          <p:cNvPr id="34" name="Shape 32"/>
+          <p:cNvSpPr/>
+          <p:nvPr/>
+        </p:nvSpPr>
+        <p:spPr>
+          <a:xfrm>
+            <a:off x="6205576" y="4224528"/>
+            <a:ext cx="2599868" cy="914400"/>
+          </a:xfrm>
+          <a:prstGeom prst="rect">
+            <a:avLst/>
+          </a:prstGeom>
+          <a:solidFill>
+            <a:srgbClr val="F7F8FA"/>
+          </a:solidFill>
+          <a:ln w="12700">
+            <a:solidFill>
+              <a:srgbClr val="CDCECB"/>
+            </a:solidFill>
+            <a:prstDash val="solid"/>
+          </a:ln>
+        </p:spPr>
+      </p:sp>
+      <p:sp>
+        <p:nvSpPr>
+          <p:cNvPr id="35" name="Text 33"/>
+          <p:cNvSpPr/>
+          <p:nvPr/>
+        </p:nvSpPr>
+        <p:spPr>
+          <a:xfrm>
+            <a:off x="6351880" y="4325112"/>
+            <a:ext cx="2307260" cy="219456"/>
+          </a:xfrm>
+          <a:prstGeom prst="rect">
+            <a:avLst/>
+          </a:prstGeom>
+          <a:noFill/>
+          <a:ln/>
+        </p:spPr>
+        <p:txBody>
+          <a:bodyPr wrap="square" lIns="0" tIns="0" rIns="0" bIns="0" rtlCol="0" anchor="ctr"/>
+          <a:lstStyle/>
+          <a:p>
+            <a:pPr indent="0" marL="0">
+              <a:buNone/>
+            </a:pPr>
+            <a:r>
+              <a:rPr lang="en-US" sz="1000" dirty="0">
+                <a:solidFill>
+                  <a:srgbClr val="6C6C6C"/>
+                </a:solidFill>
+                <a:latin typeface="맑은 고딕" pitchFamily="34" charset="0"/>
+                <a:ea typeface="맑은 고딕" pitchFamily="34" charset="-122"/>
+                <a:cs typeface="맑은 고딕" pitchFamily="34" charset="-120"/>
+              </a:rPr>
+              <a:t>1만원의 실제 값어치</a:t>
+            </a:r>
+            <a:endParaRPr lang="en-US" sz="1000" dirty="0"/>
+          </a:p>
+        </p:txBody>
+      </p:sp>
+      <p:sp>
+        <p:nvSpPr>
+          <p:cNvPr id="36" name="Text 34"/>
+          <p:cNvSpPr/>
+          <p:nvPr/>
+        </p:nvSpPr>
+        <p:spPr>
+          <a:xfrm>
+            <a:off x="6351880" y="4544568"/>
+            <a:ext cx="2307260" cy="292608"/>
+          </a:xfrm>
+          <a:prstGeom prst="rect">
+            <a:avLst/>
+          </a:prstGeom>
+          <a:noFill/>
+          <a:ln/>
+        </p:spPr>
+        <p:txBody>
+          <a:bodyPr wrap="square" lIns="0" tIns="0" rIns="0" bIns="0" rtlCol="0" anchor="ctr"/>
+          <a:lstStyle/>
+          <a:p>
+            <a:pPr indent="0" marL="0">
+              <a:buNone/>
+            </a:pPr>
+            <a:r>
+              <a:rPr lang="en-US" sz="1600" b="1" dirty="0">
+                <a:solidFill>
+                  <a:srgbClr val="1A1A1A"/>
+                </a:solidFill>
+                <a:latin typeface="맑은 고딕" pitchFamily="34" charset="0"/>
+                <a:ea typeface="맑은 고딕" pitchFamily="34" charset="-122"/>
+                <a:cs typeface="맑은 고딕" pitchFamily="34" charset="-120"/>
+              </a:rPr>
+              <a:t>9,653원</a:t>
+            </a:r>
+            <a:endParaRPr lang="en-US" sz="1600" dirty="0"/>
+          </a:p>
+        </p:txBody>
+      </p:sp>
+      <p:sp>
+        <p:nvSpPr>
+          <p:cNvPr id="37" name="Text 35"/>
+          <p:cNvSpPr/>
+          <p:nvPr/>
+        </p:nvSpPr>
+        <p:spPr>
+          <a:xfrm>
+            <a:off x="6351880" y="4846320"/>
+            <a:ext cx="2307260" cy="237744"/>
+          </a:xfrm>
+          <a:prstGeom prst="rect">
+            <a:avLst/>
+          </a:prstGeom>
+          <a:noFill/>
+          <a:ln/>
+        </p:spPr>
+        <p:txBody>
+          <a:bodyPr wrap="square" lIns="0" tIns="0" rIns="0" bIns="0" rtlCol="0" anchor="ctr"/>
+          <a:lstStyle/>
+          <a:p>
+            <a:pPr indent="0" marL="0">
+              <a:buNone/>
+            </a:pPr>
+            <a:r>
+              <a:rPr lang="en-US" sz="950" dirty="0">
+                <a:solidFill>
+                  <a:srgbClr val="84888B"/>
+                </a:solidFill>
+                <a:latin typeface="맑은 고딕" pitchFamily="34" charset="0"/>
+                <a:ea typeface="맑은 고딕" pitchFamily="34" charset="-122"/>
+                <a:cs typeface="맑은 고딕" pitchFamily="34" charset="-120"/>
+              </a:rPr>
+              <a:t>제값보다 -3.47%</a:t>
+            </a:r>
+            <a:endParaRPr lang="en-US" sz="950" dirty="0"/>
+          </a:p>
+        </p:txBody>
+      </p:sp>
+      <p:sp>
+        <p:nvSpPr>
+          <p:cNvPr id="38" name="Shape 36"/>
+          <p:cNvSpPr/>
+          <p:nvPr/>
+        </p:nvSpPr>
+        <p:spPr>
+          <a:xfrm>
+            <a:off x="9024899" y="4224528"/>
+            <a:ext cx="2599868" cy="914400"/>
+          </a:xfrm>
+          <a:prstGeom prst="rect">
+            <a:avLst/>
+          </a:prstGeom>
+          <a:solidFill>
+            <a:srgbClr val="F7F8FA"/>
+          </a:solidFill>
+          <a:ln w="12700">
+            <a:solidFill>
+              <a:srgbClr val="CDCECB"/>
+            </a:solidFill>
+            <a:prstDash val="solid"/>
+          </a:ln>
+        </p:spPr>
+      </p:sp>
+      <p:sp>
+        <p:nvSpPr>
+          <p:cNvPr id="39" name="Text 37"/>
+          <p:cNvSpPr/>
+          <p:nvPr/>
+        </p:nvSpPr>
+        <p:spPr>
+          <a:xfrm>
+            <a:off x="9171203" y="4325112"/>
+            <a:ext cx="2307260" cy="219456"/>
+          </a:xfrm>
+          <a:prstGeom prst="rect">
+            <a:avLst/>
+          </a:prstGeom>
+          <a:noFill/>
+          <a:ln/>
+        </p:spPr>
+        <p:txBody>
+          <a:bodyPr wrap="square" lIns="0" tIns="0" rIns="0" bIns="0" rtlCol="0" anchor="ctr"/>
+          <a:lstStyle/>
+          <a:p>
+            <a:pPr indent="0" marL="0">
+              <a:buNone/>
+            </a:pPr>
+            <a:r>
+              <a:rPr lang="en-US" sz="1000" dirty="0">
+                <a:solidFill>
+                  <a:srgbClr val="6C6C6C"/>
+                </a:solidFill>
+                <a:latin typeface="맑은 고딕" pitchFamily="34" charset="0"/>
+                <a:ea typeface="맑은 고딕" pitchFamily="34" charset="-122"/>
+                <a:cs typeface="맑은 고딕" pitchFamily="34" charset="-120"/>
+              </a:rPr>
+              <a:t>가격 출렁임</a:t>
+            </a:r>
+            <a:endParaRPr lang="en-US" sz="1000" dirty="0"/>
+          </a:p>
+        </p:txBody>
+      </p:sp>
+      <p:sp>
+        <p:nvSpPr>
+          <p:cNvPr id="40" name="Text 38"/>
+          <p:cNvSpPr/>
+          <p:nvPr/>
+        </p:nvSpPr>
+        <p:spPr>
+          <a:xfrm>
+            <a:off x="9171203" y="4544568"/>
+            <a:ext cx="2307260" cy="292608"/>
+          </a:xfrm>
+          <a:prstGeom prst="rect">
+            <a:avLst/>
+          </a:prstGeom>
+          <a:noFill/>
+          <a:ln/>
+        </p:spPr>
+        <p:txBody>
+          <a:bodyPr wrap="square" lIns="0" tIns="0" rIns="0" bIns="0" rtlCol="0" anchor="ctr"/>
+          <a:lstStyle/>
+          <a:p>
+            <a:pPr indent="0" marL="0">
+              <a:buNone/>
+            </a:pPr>
+            <a:r>
+              <a:rPr lang="en-US" sz="1600" b="1" dirty="0">
+                <a:solidFill>
+                  <a:srgbClr val="1A1A1A"/>
+                </a:solidFill>
+                <a:latin typeface="맑은 고딕" pitchFamily="34" charset="0"/>
+                <a:ea typeface="맑은 고딕" pitchFamily="34" charset="-122"/>
+                <a:cs typeface="맑은 고딕" pitchFamily="34" charset="-120"/>
+              </a:rPr>
+              <a:t>56.2%</a:t>
+            </a:r>
+            <a:endParaRPr lang="en-US" sz="1600" dirty="0"/>
+          </a:p>
+        </p:txBody>
+      </p:sp>
+      <p:sp>
+        <p:nvSpPr>
+          <p:cNvPr id="41" name="Text 39"/>
+          <p:cNvSpPr/>
+          <p:nvPr/>
+        </p:nvSpPr>
+        <p:spPr>
+          <a:xfrm>
+            <a:off x="9171203" y="4846320"/>
+            <a:ext cx="2307260" cy="237744"/>
+          </a:xfrm>
+          <a:prstGeom prst="rect">
+            <a:avLst/>
+          </a:prstGeom>
+          <a:noFill/>
+          <a:ln/>
+        </p:spPr>
+        <p:txBody>
+          <a:bodyPr wrap="square" lIns="0" tIns="0" rIns="0" bIns="0" rtlCol="0" anchor="ctr"/>
+          <a:lstStyle/>
+          <a:p>
+            <a:pPr indent="0" marL="0">
+              <a:buNone/>
+            </a:pPr>
+            <a:r>
+              <a:rPr lang="en-US" sz="950" dirty="0">
+                <a:solidFill>
+                  <a:srgbClr val="84888B"/>
+                </a:solidFill>
+                <a:latin typeface="맑은 고딕" pitchFamily="34" charset="0"/>
+                <a:ea typeface="맑은 고딕" pitchFamily="34" charset="-122"/>
+                <a:cs typeface="맑은 고딕" pitchFamily="34" charset="-120"/>
+              </a:rPr>
+              <a:t>둘이 같이 움직임 0.87</a:t>
+            </a:r>
+            <a:endParaRPr lang="en-US" sz="950" dirty="0"/>
+          </a:p>
+        </p:txBody>
+      </p:sp>
+      <p:sp>
+        <p:nvSpPr>
+          <p:cNvPr id="42" name="Shape 40"/>
+          <p:cNvSpPr/>
+          <p:nvPr/>
+        </p:nvSpPr>
+        <p:spPr>
+          <a:xfrm>
+            <a:off x="566928" y="5321808"/>
+            <a:ext cx="11057839" cy="512064"/>
+          </a:xfrm>
+          <a:prstGeom prst="rect">
+            <a:avLst/>
+          </a:prstGeom>
+          <a:solidFill>
+            <a:srgbClr val="ECEFF4"/>
+          </a:solidFill>
+          <a:ln w="12700">
+            <a:solidFill>
+              <a:srgbClr val="333333"/>
+            </a:solidFill>
+            <a:prstDash val="solid"/>
+          </a:ln>
+        </p:spPr>
+      </p:sp>
+      <p:sp>
+        <p:nvSpPr>
+          <p:cNvPr id="43" name="Text 41"/>
+          <p:cNvSpPr/>
+          <p:nvPr/>
+        </p:nvSpPr>
+        <p:spPr>
+          <a:xfrm>
+            <a:off x="749808" y="5321808"/>
+            <a:ext cx="10692079" cy="512064"/>
+          </a:xfrm>
+          <a:prstGeom prst="rect">
+            <a:avLst/>
+          </a:prstGeom>
+          <a:noFill/>
+          <a:ln/>
+        </p:spPr>
+        <p:txBody>
+          <a:bodyPr wrap="square" lIns="0" tIns="0" rIns="0" bIns="0" rtlCol="0" anchor="ctr"/>
+          <a:lstStyle/>
+          <a:p>
+            <a:pPr indent="0" marL="0">
+              <a:buNone/>
+            </a:pPr>
+            <a:r>
+              <a:rPr lang="en-US" sz="1150" b="1" dirty="0">
+                <a:solidFill>
+                  <a:srgbClr val="1A1A1A"/>
+                </a:solidFill>
+                <a:latin typeface="맑은 고딕" pitchFamily="34" charset="0"/>
+                <a:ea typeface="맑은 고딕" pitchFamily="34" charset="-122"/>
+                <a:cs typeface="맑은 고딕" pitchFamily="34" charset="-120"/>
+              </a:rPr>
+              <a:t>이 상품을 권하는 이유  </a:t>
+            </a:r>
+            <a:pPr indent="0" marL="0">
+              <a:buNone/>
+            </a:pPr>
+            <a:r>
+              <a:rPr lang="en-US" sz="1150" dirty="0">
+                <a:solidFill>
+                  <a:srgbClr val="3D3D3D"/>
+                </a:solidFill>
+                <a:latin typeface="맑은 고딕" pitchFamily="34" charset="0"/>
+                <a:ea typeface="맑은 고딕" pitchFamily="34" charset="-122"/>
+                <a:cs typeface="맑은 고딕" pitchFamily="34" charset="-120"/>
+              </a:rPr>
+              <a:t>지는 위험 1%당 받는 수익률이 이번 회차에서 가장 큽니다 — 같은 위험이면 여기가 제일 많이 줍니다.</a:t>
+            </a:r>
+            <a:endParaRPr lang="en-US" sz="1150" dirty="0"/>
+          </a:p>
+        </p:txBody>
+      </p:sp>
+      <p:sp>
+        <p:nvSpPr>
+          <p:cNvPr id="45" name="Text 42"/>
+          <p:cNvSpPr/>
+          <p:nvPr/>
+        </p:nvSpPr>
+        <p:spPr>
+          <a:xfrm>
+            <a:off x="566928" y="6473952"/>
+            <a:ext cx="10417759" cy="237744"/>
+          </a:xfrm>
+          <a:prstGeom prst="rect">
+            <a:avLst/>
+          </a:prstGeom>
+          <a:noFill/>
+          <a:ln/>
+        </p:spPr>
+        <p:txBody>
+          <a:bodyPr wrap="square" lIns="0" tIns="0" rIns="0" bIns="0" rtlCol="0" anchor="ctr"/>
+          <a:lstStyle/>
+          <a:p>
+            <a:pPr indent="0" marL="0">
+              <a:buNone/>
+            </a:pPr>
+            <a:r>
+              <a:rPr lang="en-US" sz="850" dirty="0">
+                <a:solidFill>
+                  <a:srgbClr val="84888B"/>
+                </a:solidFill>
+                <a:latin typeface="맑은 고딕" pitchFamily="34" charset="0"/>
+                <a:ea typeface="맑은 고딕" pitchFamily="34" charset="-122"/>
+                <a:cs typeface="맑은 고딕" pitchFamily="34" charset="-120"/>
+              </a:rPr>
+              <a:t>출처 — 금융감독원 전자공시시스템(DART)에 2026.09.28 올라온 투자설명서 (접수번호 20260928000075)  ·  원금을 잃을 수 있는 상품입니다</a:t>
+            </a:r>
+            <a:endParaRPr lang="en-US" sz="850" dirty="0"/>
+          </a:p>
+        </p:txBody>
+      </p:sp>
+      <p:sp>
+        <p:nvSpPr>
+          <p:cNvPr id="46" name="Text 43"/>
+          <p:cNvSpPr/>
+          <p:nvPr/>
+        </p:nvSpPr>
+        <p:spPr>
+          <a:xfrm>
+            <a:off x="11076127" y="6473952"/>
+            <a:ext cx="548640" cy="237744"/>
+          </a:xfrm>
+          <a:prstGeom prst="rect">
+            <a:avLst/>
+          </a:prstGeom>
+          <a:noFill/>
+          <a:ln/>
+        </p:spPr>
+        <p:txBody>
+          <a:bodyPr wrap="square" lIns="0" tIns="0" rIns="0" bIns="0" rtlCol="0" anchor="ctr"/>
+          <a:lstStyle/>
+          <a:p>
+            <a:pPr algn="r" indent="0" marL="0">
+              <a:buNone/>
+            </a:pPr>
+            <a:r>
+              <a:rPr lang="en-US" sz="900" dirty="0">
+                <a:solidFill>
+                  <a:srgbClr val="84888B"/>
+                </a:solidFill>
+                <a:latin typeface="맑은 고딕" pitchFamily="34" charset="0"/>
+                <a:ea typeface="맑은 고딕" pitchFamily="34" charset="-122"/>
+                <a:cs typeface="맑은 고딕" pitchFamily="34" charset="-120"/>
+              </a:rPr>
+              <a:t>10</a:t>
+            </a:r>
+            <a:endParaRPr lang="en-US" sz="900" dirty="0"/>
+          </a:p>
+        </p:txBody>
+      </p:sp>
+    </p:spTree>
+  </p:cSld>
+  <p:clrMapOvr>
+    <a:masterClrMapping/>
+  </p:clrMapOvr>
+</p:sld>
+</file>
+
+<file path=ppt/slides/slide11.xml><?xml version="1.0" encoding="utf-8"?>
+<p:sld xmlns:a="http://schemas.openxmlformats.org/drawingml/2006/main" xmlns:r="http://schemas.openxmlformats.org/officeDocument/2006/relationships" xmlns:p="http://schemas.openxmlformats.org/presentationml/2006/main">
+  <p:cSld name="Slide 11">
+    <p:spTree>
+      <p:nvGrpSpPr>
+        <p:cNvPr id="1" name=""/>
+        <p:cNvGrpSpPr/>
+        <p:nvPr/>
+      </p:nvGrpSpPr>
+      <p:grpSpPr>
+        <a:xfrm>
+          <a:off x="0" y="0"/>
+          <a:ext cx="0" cy="0"/>
+          <a:chOff x="0" y="0"/>
+          <a:chExt cx="0" cy="0"/>
+        </a:xfrm>
+      </p:grpSpPr>
+      <p:sp>
+        <p:nvSpPr>
+          <p:cNvPr id="2" name="Shape 0"/>
+          <p:cNvSpPr/>
+          <p:nvPr/>
+        </p:nvSpPr>
+        <p:spPr>
+          <a:xfrm>
+            <a:off x="566928" y="420624"/>
+            <a:ext cx="11057839" cy="12802"/>
+          </a:xfrm>
+          <a:prstGeom prst="rect">
+            <a:avLst/>
+          </a:prstGeom>
+          <a:solidFill>
+            <a:srgbClr val="F58220"/>
+          </a:solidFill>
+          <a:ln w="12700">
+            <a:solidFill>
+              <a:srgbClr val="333333"/>
+            </a:solidFill>
+            <a:prstDash val="solid"/>
+          </a:ln>
+        </p:spPr>
+      </p:sp>
+      <p:sp>
+        <p:nvSpPr>
+          <p:cNvPr id="3" name="Text 1"/>
+          <p:cNvSpPr/>
+          <p:nvPr/>
+        </p:nvSpPr>
+        <p:spPr>
+          <a:xfrm>
+            <a:off x="566928" y="493776"/>
+            <a:ext cx="11057839" cy="420624"/>
+          </a:xfrm>
+          <a:prstGeom prst="rect">
+            <a:avLst/>
+          </a:prstGeom>
+          <a:noFill/>
+          <a:ln/>
+        </p:spPr>
+        <p:txBody>
+          <a:bodyPr wrap="square" lIns="0" tIns="0" rIns="0" bIns="0" rtlCol="0" anchor="ctr"/>
+          <a:lstStyle/>
+          <a:p>
+            <a:pPr indent="0" marL="0">
+              <a:buNone/>
+            </a:pPr>
+            <a:r>
+              <a:rPr lang="en-US" sz="2400" b="1" dirty="0">
+                <a:solidFill>
+                  <a:srgbClr val="1A1A1A"/>
+                </a:solidFill>
+                <a:latin typeface="맑은 고딕" pitchFamily="34" charset="0"/>
+                <a:ea typeface="맑은 고딕" pitchFamily="34" charset="-122"/>
+                <a:cs typeface="맑은 고딕" pitchFamily="34" charset="-120"/>
+              </a:rPr>
               <a:t>추천 3 — 수익률을 먼저 보는 분</a:t>
             </a:r>
             <a:endParaRPr lang="en-US" sz="2400" dirty="0"/>
@@ -4801,7 +9722,7 @@
                 <a:ea typeface="맑은 고딕" pitchFamily="34" charset="-122"/>
                 <a:cs typeface="맑은 고딕" pitchFamily="34" charset="-120"/>
               </a:rPr>
-              <a:t>10</a:t>
+              <a:t>11</a:t>
             </a:r>
             <a:endParaRPr lang="en-US" sz="900" dirty="0"/>
           </a:p>
@@ -4815,9 +9736,9 @@
 </p:sld>
 </file>
 
-<file path=ppt/slides/slide11.xml><?xml version="1.0" encoding="utf-8"?>
+<file path=ppt/slides/slide12.xml><?xml version="1.0" encoding="utf-8"?>
 <p:sld xmlns:a="http://schemas.openxmlformats.org/drawingml/2006/main" xmlns:r="http://schemas.openxmlformats.org/officeDocument/2006/relationships" xmlns:p="http://schemas.openxmlformats.org/presentationml/2006/main">
-  <p:cSld name="Slide 11">
+  <p:cSld name="Slide 12">
     <p:spTree>
       <p:nvGrpSpPr>
         <p:cNvPr id="1" name=""/>
@@ -4937,7 +9858,7 @@
       </p:sp>
       <p:graphicFrame>
         <p:nvGraphicFramePr>
-          <p:cNvPr id="12" name="Table 0"/>
+          <p:cNvPr id="13" name="Table 0"/>
           <p:cNvGraphicFramePr>
             <a:graphicFrameLocks noGrp="1"/>
           </p:cNvGraphicFramePr>
@@ -21276,7 +26197,7 @@
                 <a:ea typeface="맑은 고딕" pitchFamily="34" charset="-122"/>
                 <a:cs typeface="맑은 고딕" pitchFamily="34" charset="-120"/>
               </a:rPr>
-              <a:t>11</a:t>
+              <a:t>12</a:t>
             </a:r>
             <a:endParaRPr lang="en-US" sz="900" dirty="0"/>
           </a:p>
@@ -21290,9 +26211,9 @@
 </p:sld>
 </file>
 
-<file path=ppt/slides/slide12.xml><?xml version="1.0" encoding="utf-8"?>
+<file path=ppt/slides/slide13.xml><?xml version="1.0" encoding="utf-8"?>
 <p:sld xmlns:a="http://schemas.openxmlformats.org/drawingml/2006/main" xmlns:r="http://schemas.openxmlformats.org/officeDocument/2006/relationships" xmlns:p="http://schemas.openxmlformats.org/presentationml/2006/main">
-  <p:cSld name="Slide 12">
+  <p:cSld name="Slide 13">
     <p:spTree>
       <p:nvGrpSpPr>
         <p:cNvPr id="1" name=""/>
@@ -22578,7 +27499,7 @@
                 <a:ea typeface="맑은 고딕" pitchFamily="34" charset="-122"/>
                 <a:cs typeface="맑은 고딕" pitchFamily="34" charset="-120"/>
               </a:rPr>
-              <a:t>12</a:t>
+              <a:t>13</a:t>
             </a:r>
             <a:endParaRPr lang="en-US" sz="900" dirty="0"/>
           </a:p>
@@ -22592,9 +27513,9 @@
 </p:sld>
 </file>
 
-<file path=ppt/slides/slide13.xml><?xml version="1.0" encoding="utf-8"?>
+<file path=ppt/slides/slide14.xml><?xml version="1.0" encoding="utf-8"?>
 <p:sld xmlns:a="http://schemas.openxmlformats.org/drawingml/2006/main" xmlns:r="http://schemas.openxmlformats.org/officeDocument/2006/relationships" xmlns:p="http://schemas.openxmlformats.org/presentationml/2006/main">
-  <p:cSld name="Slide 13">
+  <p:cSld name="Slide 14">
     <p:spTree>
       <p:nvGrpSpPr>
         <p:cNvPr id="1" name=""/>
@@ -23672,7 +28593,7 @@
                 <a:ea typeface="맑은 고딕" pitchFamily="34" charset="-122"/>
                 <a:cs typeface="맑은 고딕" pitchFamily="34" charset="-120"/>
               </a:rPr>
-              <a:t>13</a:t>
+              <a:t>14</a:t>
             </a:r>
             <a:endParaRPr lang="en-US" sz="900" dirty="0"/>
           </a:p>
@@ -23686,9 +28607,9 @@
 </p:sld>
 </file>
 
-<file path=ppt/slides/slide14.xml><?xml version="1.0" encoding="utf-8"?>
+<file path=ppt/slides/slide15.xml><?xml version="1.0" encoding="utf-8"?>
 <p:sld xmlns:a="http://schemas.openxmlformats.org/drawingml/2006/main" xmlns:r="http://schemas.openxmlformats.org/officeDocument/2006/relationships" xmlns:p="http://schemas.openxmlformats.org/presentationml/2006/main">
-  <p:cSld name="Slide 14">
+  <p:cSld name="Slide 15">
     <p:spTree>
       <p:nvGrpSpPr>
         <p:cNvPr id="1" name=""/>
@@ -24810,7 +29731,7 @@
                 <a:ea typeface="맑은 고딕" pitchFamily="34" charset="-122"/>
                 <a:cs typeface="맑은 고딕" pitchFamily="34" charset="-120"/>
               </a:rPr>
-              <a:t>14</a:t>
+              <a:t>15</a:t>
             </a:r>
             <a:endParaRPr lang="en-US" sz="900" dirty="0"/>
           </a:p>
@@ -24824,9 +29745,9 @@
 </p:sld>
 </file>
 
-<file path=ppt/slides/slide15.xml><?xml version="1.0" encoding="utf-8"?>
+<file path=ppt/slides/slide16.xml><?xml version="1.0" encoding="utf-8"?>
 <p:sld xmlns:a="http://schemas.openxmlformats.org/drawingml/2006/main" xmlns:r="http://schemas.openxmlformats.org/officeDocument/2006/relationships" xmlns:p="http://schemas.openxmlformats.org/presentationml/2006/main">
-  <p:cSld name="Slide 15">
+  <p:cSld name="Slide 16">
     <p:spTree>
       <p:nvGrpSpPr>
         <p:cNvPr id="1" name=""/>
@@ -24946,7 +29867,7 @@
       </p:sp>
       <p:graphicFrame>
         <p:nvGraphicFramePr>
-          <p:cNvPr id="16" name="Table 0"/>
+          <p:cNvPr id="17" name="Table 0"/>
           <p:cNvGraphicFramePr>
             <a:graphicFrameLocks noGrp="1"/>
           </p:cNvGraphicFramePr>
@@ -26562,7 +31483,7 @@
       </p:graphicFrame>
       <p:graphicFrame>
         <p:nvGraphicFramePr>
-          <p:cNvPr id="31" name="Table 1"/>
+          <p:cNvPr id="33" name="Table 1"/>
           <p:cNvGraphicFramePr>
             <a:graphicFrameLocks noGrp="1"/>
           </p:cNvGraphicFramePr>
@@ -28248,7 +33169,7 @@
                 <a:ea typeface="맑은 고딕" pitchFamily="34" charset="-122"/>
                 <a:cs typeface="맑은 고딕" pitchFamily="34" charset="-120"/>
               </a:rPr>
-              <a:t>15</a:t>
+              <a:t>16</a:t>
             </a:r>
             <a:endParaRPr lang="en-US" sz="900" dirty="0"/>
           </a:p>
@@ -35128,6 +40049,813 @@
 <file path=ppt/slides/slide7.xml><?xml version="1.0" encoding="utf-8"?>
 <p:sld xmlns:a="http://schemas.openxmlformats.org/drawingml/2006/main" xmlns:r="http://schemas.openxmlformats.org/officeDocument/2006/relationships" xmlns:p="http://schemas.openxmlformats.org/presentationml/2006/main">
   <p:cSld name="Slide 7">
+    <p:spTree>
+      <p:nvGrpSpPr>
+        <p:cNvPr id="1" name=""/>
+        <p:cNvGrpSpPr/>
+        <p:nvPr/>
+      </p:nvGrpSpPr>
+      <p:grpSpPr>
+        <a:xfrm>
+          <a:off x="0" y="0"/>
+          <a:ext cx="0" cy="0"/>
+          <a:chOff x="0" y="0"/>
+          <a:chExt cx="0" cy="0"/>
+        </a:xfrm>
+      </p:grpSpPr>
+      <p:sp>
+        <p:nvSpPr>
+          <p:cNvPr id="2" name="Shape 0"/>
+          <p:cNvSpPr/>
+          <p:nvPr/>
+        </p:nvSpPr>
+        <p:spPr>
+          <a:xfrm>
+            <a:off x="566928" y="420624"/>
+            <a:ext cx="11057839" cy="12802"/>
+          </a:xfrm>
+          <a:prstGeom prst="rect">
+            <a:avLst/>
+          </a:prstGeom>
+          <a:solidFill>
+            <a:srgbClr val="F58220"/>
+          </a:solidFill>
+          <a:ln w="12700">
+            <a:solidFill>
+              <a:srgbClr val="333333"/>
+            </a:solidFill>
+            <a:prstDash val="solid"/>
+          </a:ln>
+        </p:spPr>
+      </p:sp>
+      <p:sp>
+        <p:nvSpPr>
+          <p:cNvPr id="3" name="Text 1"/>
+          <p:cNvSpPr/>
+          <p:nvPr/>
+        </p:nvSpPr>
+        <p:spPr>
+          <a:xfrm>
+            <a:off x="566928" y="493776"/>
+            <a:ext cx="11057839" cy="420624"/>
+          </a:xfrm>
+          <a:prstGeom prst="rect">
+            <a:avLst/>
+          </a:prstGeom>
+          <a:noFill/>
+          <a:ln/>
+        </p:spPr>
+        <p:txBody>
+          <a:bodyPr wrap="square" lIns="0" tIns="0" rIns="0" bIns="0" rtlCol="0" anchor="ctr"/>
+          <a:lstStyle/>
+          <a:p>
+            <a:pPr indent="0" marL="0">
+              <a:buNone/>
+            </a:pPr>
+            <a:r>
+              <a:rPr lang="en-US" sz="2400" b="1" dirty="0">
+                <a:solidFill>
+                  <a:srgbClr val="1A1A1A"/>
+                </a:solidFill>
+                <a:latin typeface="맑은 고딕" pitchFamily="34" charset="0"/>
+                <a:ea typeface="맑은 고딕" pitchFamily="34" charset="-122"/>
+                <a:cs typeface="맑은 고딕" pitchFamily="34" charset="-120"/>
+              </a:rPr>
+              <a:t>흩어 놓고 보면 이렇습니다</a:t>
+            </a:r>
+            <a:endParaRPr lang="en-US" sz="2400" dirty="0"/>
+          </a:p>
+        </p:txBody>
+      </p:sp>
+      <p:sp>
+        <p:nvSpPr>
+          <p:cNvPr id="4" name="Text 2"/>
+          <p:cNvSpPr/>
+          <p:nvPr/>
+        </p:nvSpPr>
+        <p:spPr>
+          <a:xfrm>
+            <a:off x="566928" y="914400"/>
+            <a:ext cx="11057839" cy="310896"/>
+          </a:xfrm>
+          <a:prstGeom prst="rect">
+            <a:avLst/>
+          </a:prstGeom>
+          <a:noFill/>
+          <a:ln/>
+        </p:spPr>
+        <p:txBody>
+          <a:bodyPr wrap="square" lIns="0" tIns="0" rIns="0" bIns="0" rtlCol="0" anchor="ctr"/>
+          <a:lstStyle/>
+          <a:p>
+            <a:pPr indent="0" marL="0">
+              <a:buNone/>
+            </a:pPr>
+            <a:r>
+              <a:rPr lang="en-US" sz="1250" dirty="0">
+                <a:solidFill>
+                  <a:srgbClr val="6C6C6C"/>
+                </a:solidFill>
+                <a:latin typeface="맑은 고딕" pitchFamily="34" charset="0"/>
+                <a:ea typeface="맑은 고딕" pitchFamily="34" charset="-122"/>
+                <a:cs typeface="맑은 고딕" pitchFamily="34" charset="-120"/>
+              </a:rPr>
+              <a:t>18종을 손실 확률(B)과 연 수익률로 찍었습니다. 왼쪽 위가 적은 위험에 많이 받는 자리, 오른쪽 아래가 위험만 큰 자리입니다. 점 위에 마우스를 올리면 회차와 기초자산이 뜹니다.</a:t>
+            </a:r>
+            <a:endParaRPr lang="en-US" sz="1250" dirty="0"/>
+          </a:p>
+        </p:txBody>
+      </p:sp>
+      <p:graphicFrame>
+        <p:nvGraphicFramePr>
+          <p:cNvPr id="5" name="Chart 0" descr=""/>
+          <p:cNvGraphicFramePr/>
+          <p:nvPr/>
+        </p:nvGraphicFramePr>
+        <p:xfrm>
+          <a:off x="566928" y="1316736"/>
+          <a:ext cx="7406640" cy="4041648"/>
+        </p:xfrm>
+        <a:graphic xmlns:a="http://schemas.openxmlformats.org/drawingml/2006/main">
+          <a:graphicData uri="http://schemas.openxmlformats.org/drawingml/2006/chart">
+            <c:chart xmlns:c="http://schemas.openxmlformats.org/drawingml/2006/chart" r:id="rId1"/>
+          </a:graphicData>
+        </a:graphic>
+      </p:graphicFrame>
+      <p:sp>
+        <p:nvSpPr>
+          <p:cNvPr id="6" name="Shape 3"/>
+          <p:cNvSpPr/>
+          <p:nvPr/>
+        </p:nvSpPr>
+        <p:spPr>
+          <a:xfrm>
+            <a:off x="1115568" y="5468112"/>
+            <a:ext cx="109728" cy="109728"/>
+          </a:xfrm>
+          <a:prstGeom prst="ellipse">
+            <a:avLst/>
+          </a:prstGeom>
+          <a:solidFill>
+            <a:srgbClr val="F58220"/>
+          </a:solidFill>
+          <a:ln w="12700">
+            <a:solidFill>
+              <a:srgbClr val="333333"/>
+            </a:solidFill>
+            <a:prstDash val="solid"/>
+          </a:ln>
+        </p:spPr>
+      </p:sp>
+      <p:sp>
+        <p:nvSpPr>
+          <p:cNvPr id="7" name="Text 4"/>
+          <p:cNvSpPr/>
+          <p:nvPr/>
+        </p:nvSpPr>
+        <p:spPr>
+          <a:xfrm>
+            <a:off x="1289304" y="5385816"/>
+            <a:ext cx="1645920" cy="256032"/>
+          </a:xfrm>
+          <a:prstGeom prst="rect">
+            <a:avLst/>
+          </a:prstGeom>
+          <a:noFill/>
+          <a:ln/>
+        </p:spPr>
+        <p:txBody>
+          <a:bodyPr wrap="square" lIns="0" tIns="0" rIns="0" bIns="0" rtlCol="0" anchor="ctr"/>
+          <a:lstStyle/>
+          <a:p>
+            <a:pPr indent="0" marL="0">
+              <a:buNone/>
+            </a:pPr>
+            <a:r>
+              <a:rPr lang="en-US" sz="1000" dirty="0">
+                <a:solidFill>
+                  <a:srgbClr val="3D3D3D"/>
+                </a:solidFill>
+                <a:latin typeface="맑은 고딕" pitchFamily="34" charset="0"/>
+                <a:ea typeface="맑은 고딕" pitchFamily="34" charset="-122"/>
+                <a:cs typeface="맑은 고딕" pitchFamily="34" charset="-120"/>
+              </a:rPr>
+              <a:t>추천 3종</a:t>
+            </a:r>
+            <a:endParaRPr lang="en-US" sz="1000" dirty="0"/>
+          </a:p>
+        </p:txBody>
+      </p:sp>
+      <p:sp>
+        <p:nvSpPr>
+          <p:cNvPr id="8" name="Shape 5"/>
+          <p:cNvSpPr/>
+          <p:nvPr/>
+        </p:nvSpPr>
+        <p:spPr>
+          <a:xfrm>
+            <a:off x="3035808" y="5468112"/>
+            <a:ext cx="109728" cy="109728"/>
+          </a:xfrm>
+          <a:prstGeom prst="ellipse">
+            <a:avLst/>
+          </a:prstGeom>
+          <a:solidFill>
+            <a:srgbClr val="9AA6B2"/>
+          </a:solidFill>
+          <a:ln w="12700">
+            <a:solidFill>
+              <a:srgbClr val="333333"/>
+            </a:solidFill>
+            <a:prstDash val="solid"/>
+          </a:ln>
+        </p:spPr>
+      </p:sp>
+      <p:sp>
+        <p:nvSpPr>
+          <p:cNvPr id="9" name="Text 6"/>
+          <p:cNvSpPr/>
+          <p:nvPr/>
+        </p:nvSpPr>
+        <p:spPr>
+          <a:xfrm>
+            <a:off x="3209544" y="5385816"/>
+            <a:ext cx="1645920" cy="256032"/>
+          </a:xfrm>
+          <a:prstGeom prst="rect">
+            <a:avLst/>
+          </a:prstGeom>
+          <a:noFill/>
+          <a:ln/>
+        </p:spPr>
+        <p:txBody>
+          <a:bodyPr wrap="square" lIns="0" tIns="0" rIns="0" bIns="0" rtlCol="0" anchor="ctr"/>
+          <a:lstStyle/>
+          <a:p>
+            <a:pPr indent="0" marL="0">
+              <a:buNone/>
+            </a:pPr>
+            <a:r>
+              <a:rPr lang="en-US" sz="1000" dirty="0">
+                <a:solidFill>
+                  <a:srgbClr val="3D3D3D"/>
+                </a:solidFill>
+                <a:latin typeface="맑은 고딕" pitchFamily="34" charset="0"/>
+                <a:ea typeface="맑은 고딕" pitchFamily="34" charset="-122"/>
+                <a:cs typeface="맑은 고딕" pitchFamily="34" charset="-120"/>
+              </a:rPr>
+              <a:t>그 외 11종</a:t>
+            </a:r>
+            <a:endParaRPr lang="en-US" sz="1000" dirty="0"/>
+          </a:p>
+        </p:txBody>
+      </p:sp>
+      <p:sp>
+        <p:nvSpPr>
+          <p:cNvPr id="10" name="Shape 7"/>
+          <p:cNvSpPr/>
+          <p:nvPr/>
+        </p:nvSpPr>
+        <p:spPr>
+          <a:xfrm>
+            <a:off x="4956048" y="5468112"/>
+            <a:ext cx="109728" cy="109728"/>
+          </a:xfrm>
+          <a:prstGeom prst="ellipse">
+            <a:avLst/>
+          </a:prstGeom>
+          <a:solidFill>
+            <a:srgbClr val="C62828"/>
+          </a:solidFill>
+          <a:ln w="12700">
+            <a:solidFill>
+              <a:srgbClr val="333333"/>
+            </a:solidFill>
+            <a:prstDash val="solid"/>
+          </a:ln>
+        </p:spPr>
+      </p:sp>
+      <p:sp>
+        <p:nvSpPr>
+          <p:cNvPr id="11" name="Text 8"/>
+          <p:cNvSpPr/>
+          <p:nvPr/>
+        </p:nvSpPr>
+        <p:spPr>
+          <a:xfrm>
+            <a:off x="5129784" y="5385816"/>
+            <a:ext cx="1645920" cy="256032"/>
+          </a:xfrm>
+          <a:prstGeom prst="rect">
+            <a:avLst/>
+          </a:prstGeom>
+          <a:noFill/>
+          <a:ln/>
+        </p:spPr>
+        <p:txBody>
+          <a:bodyPr wrap="square" lIns="0" tIns="0" rIns="0" bIns="0" rtlCol="0" anchor="ctr"/>
+          <a:lstStyle/>
+          <a:p>
+            <a:pPr indent="0" marL="0">
+              <a:buNone/>
+            </a:pPr>
+            <a:r>
+              <a:rPr lang="en-US" sz="1000" dirty="0">
+                <a:solidFill>
+                  <a:srgbClr val="3D3D3D"/>
+                </a:solidFill>
+                <a:latin typeface="맑은 고딕" pitchFamily="34" charset="0"/>
+                <a:ea typeface="맑은 고딕" pitchFamily="34" charset="-122"/>
+                <a:cs typeface="맑은 고딕" pitchFamily="34" charset="-120"/>
+              </a:rPr>
+              <a:t>권하지 않는 4종</a:t>
+            </a:r>
+            <a:endParaRPr lang="en-US" sz="1000" dirty="0"/>
+          </a:p>
+        </p:txBody>
+      </p:sp>
+      <p:sp>
+        <p:nvSpPr>
+          <p:cNvPr id="12" name="Shape 9"/>
+          <p:cNvSpPr/>
+          <p:nvPr/>
+        </p:nvSpPr>
+        <p:spPr>
+          <a:xfrm>
+            <a:off x="8202168" y="1316736"/>
+            <a:ext cx="3422599" cy="1298448"/>
+          </a:xfrm>
+          <a:prstGeom prst="rect">
+            <a:avLst/>
+          </a:prstGeom>
+          <a:solidFill>
+            <a:srgbClr val="F7F8FA"/>
+          </a:solidFill>
+          <a:ln w="9525">
+            <a:solidFill>
+              <a:srgbClr val="CDCECB"/>
+            </a:solidFill>
+            <a:prstDash val="solid"/>
+          </a:ln>
+        </p:spPr>
+      </p:sp>
+      <p:sp>
+        <p:nvSpPr>
+          <p:cNvPr id="13" name="Shape 10"/>
+          <p:cNvSpPr/>
+          <p:nvPr/>
+        </p:nvSpPr>
+        <p:spPr>
+          <a:xfrm>
+            <a:off x="8202168" y="1316736"/>
+            <a:ext cx="45720" cy="1298448"/>
+          </a:xfrm>
+          <a:prstGeom prst="rect">
+            <a:avLst/>
+          </a:prstGeom>
+          <a:solidFill>
+            <a:srgbClr val="043B72"/>
+          </a:solidFill>
+          <a:ln w="12700">
+            <a:solidFill>
+              <a:srgbClr val="333333"/>
+            </a:solidFill>
+            <a:prstDash val="solid"/>
+          </a:ln>
+        </p:spPr>
+      </p:sp>
+      <p:sp>
+        <p:nvSpPr>
+          <p:cNvPr id="14" name="Text 11"/>
+          <p:cNvSpPr/>
+          <p:nvPr/>
+        </p:nvSpPr>
+        <p:spPr>
+          <a:xfrm>
+            <a:off x="8385048" y="1426464"/>
+            <a:ext cx="3056839" cy="256032"/>
+          </a:xfrm>
+          <a:prstGeom prst="rect">
+            <a:avLst/>
+          </a:prstGeom>
+          <a:noFill/>
+          <a:ln/>
+        </p:spPr>
+        <p:txBody>
+          <a:bodyPr wrap="square" lIns="0" tIns="0" rIns="0" bIns="0" rtlCol="0" anchor="ctr"/>
+          <a:lstStyle/>
+          <a:p>
+            <a:pPr indent="0" marL="0">
+              <a:buNone/>
+            </a:pPr>
+            <a:r>
+              <a:rPr lang="en-US" sz="1150" b="1" dirty="0">
+                <a:solidFill>
+                  <a:srgbClr val="1A1A1A"/>
+                </a:solidFill>
+                <a:latin typeface="맑은 고딕" pitchFamily="34" charset="0"/>
+                <a:ea typeface="맑은 고딕" pitchFamily="34" charset="-122"/>
+                <a:cs typeface="맑은 고딕" pitchFamily="34" charset="-120"/>
+              </a:rPr>
+              <a:t>왼쪽 위로 갈수록 좋습니다</a:t>
+            </a:r>
+            <a:endParaRPr lang="en-US" sz="1150" dirty="0"/>
+          </a:p>
+        </p:txBody>
+      </p:sp>
+      <p:sp>
+        <p:nvSpPr>
+          <p:cNvPr id="15" name="Text 12"/>
+          <p:cNvSpPr/>
+          <p:nvPr/>
+        </p:nvSpPr>
+        <p:spPr>
+          <a:xfrm>
+            <a:off x="8385048" y="1700784"/>
+            <a:ext cx="3056839" cy="841248"/>
+          </a:xfrm>
+          <a:prstGeom prst="rect">
+            <a:avLst/>
+          </a:prstGeom>
+          <a:noFill/>
+          <a:ln/>
+        </p:spPr>
+        <p:txBody>
+          <a:bodyPr wrap="square" lIns="0" tIns="0" rIns="0" bIns="0" rtlCol="0" anchor="t"/>
+          <a:lstStyle/>
+          <a:p>
+            <a:pPr indent="0" marL="0">
+              <a:lnSpc>
+                <a:spcPts val="1300"/>
+              </a:lnSpc>
+              <a:buNone/>
+            </a:pPr>
+            <a:r>
+              <a:rPr lang="en-US" sz="1000" dirty="0">
+                <a:solidFill>
+                  <a:srgbClr val="3D3D3D"/>
+                </a:solidFill>
+                <a:latin typeface="맑은 고딕" pitchFamily="34" charset="0"/>
+                <a:ea typeface="맑은 고딕" pitchFamily="34" charset="-122"/>
+                <a:cs typeface="맑은 고딕" pitchFamily="34" charset="-120"/>
+              </a:rPr>
+              <a:t>같은 위험을 지고 가장 많이 받는 쪽은 제38165회(연 23.0% · 손실 확률 15.9%)입니다.</a:t>
+            </a:r>
+            <a:endParaRPr lang="en-US" sz="1000" dirty="0"/>
+          </a:p>
+        </p:txBody>
+      </p:sp>
+      <p:sp>
+        <p:nvSpPr>
+          <p:cNvPr id="16" name="Shape 13"/>
+          <p:cNvSpPr/>
+          <p:nvPr/>
+        </p:nvSpPr>
+        <p:spPr>
+          <a:xfrm>
+            <a:off x="8202168" y="2779776"/>
+            <a:ext cx="3422599" cy="1298448"/>
+          </a:xfrm>
+          <a:prstGeom prst="rect">
+            <a:avLst/>
+          </a:prstGeom>
+          <a:solidFill>
+            <a:srgbClr val="F7F8FA"/>
+          </a:solidFill>
+          <a:ln w="9525">
+            <a:solidFill>
+              <a:srgbClr val="CDCECB"/>
+            </a:solidFill>
+            <a:prstDash val="solid"/>
+          </a:ln>
+        </p:spPr>
+      </p:sp>
+      <p:sp>
+        <p:nvSpPr>
+          <p:cNvPr id="17" name="Shape 14"/>
+          <p:cNvSpPr/>
+          <p:nvPr/>
+        </p:nvSpPr>
+        <p:spPr>
+          <a:xfrm>
+            <a:off x="8202168" y="2779776"/>
+            <a:ext cx="45720" cy="1298448"/>
+          </a:xfrm>
+          <a:prstGeom prst="rect">
+            <a:avLst/>
+          </a:prstGeom>
+          <a:solidFill>
+            <a:srgbClr val="C62828"/>
+          </a:solidFill>
+          <a:ln w="12700">
+            <a:solidFill>
+              <a:srgbClr val="333333"/>
+            </a:solidFill>
+            <a:prstDash val="solid"/>
+          </a:ln>
+        </p:spPr>
+      </p:sp>
+      <p:sp>
+        <p:nvSpPr>
+          <p:cNvPr id="18" name="Text 15"/>
+          <p:cNvSpPr/>
+          <p:nvPr/>
+        </p:nvSpPr>
+        <p:spPr>
+          <a:xfrm>
+            <a:off x="8385048" y="2889504"/>
+            <a:ext cx="3056839" cy="256032"/>
+          </a:xfrm>
+          <a:prstGeom prst="rect">
+            <a:avLst/>
+          </a:prstGeom>
+          <a:noFill/>
+          <a:ln/>
+        </p:spPr>
+        <p:txBody>
+          <a:bodyPr wrap="square" lIns="0" tIns="0" rIns="0" bIns="0" rtlCol="0" anchor="ctr"/>
+          <a:lstStyle/>
+          <a:p>
+            <a:pPr indent="0" marL="0">
+              <a:buNone/>
+            </a:pPr>
+            <a:r>
+              <a:rPr lang="en-US" sz="1150" b="1" dirty="0">
+                <a:solidFill>
+                  <a:srgbClr val="1A1A1A"/>
+                </a:solidFill>
+                <a:latin typeface="맑은 고딕" pitchFamily="34" charset="0"/>
+                <a:ea typeface="맑은 고딕" pitchFamily="34" charset="-122"/>
+                <a:cs typeface="맑은 고딕" pitchFamily="34" charset="-120"/>
+              </a:rPr>
+              <a:t>오른쪽 아래가 피할 자리</a:t>
+            </a:r>
+            <a:endParaRPr lang="en-US" sz="1150" dirty="0"/>
+          </a:p>
+        </p:txBody>
+      </p:sp>
+      <p:sp>
+        <p:nvSpPr>
+          <p:cNvPr id="19" name="Text 16"/>
+          <p:cNvSpPr/>
+          <p:nvPr/>
+        </p:nvSpPr>
+        <p:spPr>
+          <a:xfrm>
+            <a:off x="8385048" y="3163824"/>
+            <a:ext cx="3056839" cy="841248"/>
+          </a:xfrm>
+          <a:prstGeom prst="rect">
+            <a:avLst/>
+          </a:prstGeom>
+          <a:noFill/>
+          <a:ln/>
+        </p:spPr>
+        <p:txBody>
+          <a:bodyPr wrap="square" lIns="0" tIns="0" rIns="0" bIns="0" rtlCol="0" anchor="t"/>
+          <a:lstStyle/>
+          <a:p>
+            <a:pPr indent="0" marL="0">
+              <a:lnSpc>
+                <a:spcPts val="1300"/>
+              </a:lnSpc>
+              <a:buNone/>
+            </a:pPr>
+            <a:r>
+              <a:rPr lang="en-US" sz="1000" dirty="0">
+                <a:solidFill>
+                  <a:srgbClr val="3D3D3D"/>
+                </a:solidFill>
+                <a:latin typeface="맑은 고딕" pitchFamily="34" charset="0"/>
+                <a:ea typeface="맑은 고딕" pitchFamily="34" charset="-122"/>
+                <a:cs typeface="맑은 고딕" pitchFamily="34" charset="-120"/>
+              </a:rPr>
+              <a:t>제38168회는 연 20.0%를 받자고 손실 확률 49.1%를 집니다 — 손실 확률 1%당 0.41%뿐입니다.</a:t>
+            </a:r>
+            <a:endParaRPr lang="en-US" sz="1000" dirty="0"/>
+          </a:p>
+        </p:txBody>
+      </p:sp>
+      <p:sp>
+        <p:nvSpPr>
+          <p:cNvPr id="20" name="Shape 17"/>
+          <p:cNvSpPr/>
+          <p:nvPr/>
+        </p:nvSpPr>
+        <p:spPr>
+          <a:xfrm>
+            <a:off x="8202168" y="4242816"/>
+            <a:ext cx="3422599" cy="1298448"/>
+          </a:xfrm>
+          <a:prstGeom prst="rect">
+            <a:avLst/>
+          </a:prstGeom>
+          <a:solidFill>
+            <a:srgbClr val="F7F8FA"/>
+          </a:solidFill>
+          <a:ln w="9525">
+            <a:solidFill>
+              <a:srgbClr val="CDCECB"/>
+            </a:solidFill>
+            <a:prstDash val="solid"/>
+          </a:ln>
+        </p:spPr>
+      </p:sp>
+      <p:sp>
+        <p:nvSpPr>
+          <p:cNvPr id="21" name="Shape 18"/>
+          <p:cNvSpPr/>
+          <p:nvPr/>
+        </p:nvSpPr>
+        <p:spPr>
+          <a:xfrm>
+            <a:off x="8202168" y="4242816"/>
+            <a:ext cx="45720" cy="1298448"/>
+          </a:xfrm>
+          <a:prstGeom prst="rect">
+            <a:avLst/>
+          </a:prstGeom>
+          <a:solidFill>
+            <a:srgbClr val="CB6015"/>
+          </a:solidFill>
+          <a:ln w="12700">
+            <a:solidFill>
+              <a:srgbClr val="333333"/>
+            </a:solidFill>
+            <a:prstDash val="solid"/>
+          </a:ln>
+        </p:spPr>
+      </p:sp>
+      <p:sp>
+        <p:nvSpPr>
+          <p:cNvPr id="22" name="Text 19"/>
+          <p:cNvSpPr/>
+          <p:nvPr/>
+        </p:nvSpPr>
+        <p:spPr>
+          <a:xfrm>
+            <a:off x="8385048" y="4352544"/>
+            <a:ext cx="3056839" cy="256032"/>
+          </a:xfrm>
+          <a:prstGeom prst="rect">
+            <a:avLst/>
+          </a:prstGeom>
+          <a:noFill/>
+          <a:ln/>
+        </p:spPr>
+        <p:txBody>
+          <a:bodyPr wrap="square" lIns="0" tIns="0" rIns="0" bIns="0" rtlCol="0" anchor="ctr"/>
+          <a:lstStyle/>
+          <a:p>
+            <a:pPr indent="0" marL="0">
+              <a:buNone/>
+            </a:pPr>
+            <a:r>
+              <a:rPr lang="en-US" sz="1150" b="1" dirty="0">
+                <a:solidFill>
+                  <a:srgbClr val="1A1A1A"/>
+                </a:solidFill>
+                <a:latin typeface="맑은 고딕" pitchFamily="34" charset="0"/>
+                <a:ea typeface="맑은 고딕" pitchFamily="34" charset="-122"/>
+                <a:cs typeface="맑은 고딕" pitchFamily="34" charset="-120"/>
+              </a:rPr>
+              <a:t>줄이 아니라 구름입니다</a:t>
+            </a:r>
+            <a:endParaRPr lang="en-US" sz="1150" dirty="0"/>
+          </a:p>
+        </p:txBody>
+      </p:sp>
+      <p:sp>
+        <p:nvSpPr>
+          <p:cNvPr id="23" name="Text 20"/>
+          <p:cNvSpPr/>
+          <p:nvPr/>
+        </p:nvSpPr>
+        <p:spPr>
+          <a:xfrm>
+            <a:off x="8385048" y="4626864"/>
+            <a:ext cx="3056839" cy="841248"/>
+          </a:xfrm>
+          <a:prstGeom prst="rect">
+            <a:avLst/>
+          </a:prstGeom>
+          <a:noFill/>
+          <a:ln/>
+        </p:spPr>
+        <p:txBody>
+          <a:bodyPr wrap="square" lIns="0" tIns="0" rIns="0" bIns="0" rtlCol="0" anchor="t"/>
+          <a:lstStyle/>
+          <a:p>
+            <a:pPr indent="0" marL="0">
+              <a:lnSpc>
+                <a:spcPts val="1300"/>
+              </a:lnSpc>
+              <a:buNone/>
+            </a:pPr>
+            <a:r>
+              <a:rPr lang="en-US" sz="1000" dirty="0">
+                <a:solidFill>
+                  <a:srgbClr val="3D3D3D"/>
+                </a:solidFill>
+                <a:latin typeface="맑은 고딕" pitchFamily="34" charset="0"/>
+                <a:ea typeface="맑은 고딕" pitchFamily="34" charset="-122"/>
+                <a:cs typeface="맑은 고딕" pitchFamily="34" charset="-120"/>
+              </a:rPr>
+              <a:t>정비례한다면 점들이 한 줄에 놓여야 합니다. 흩어진 폭이 곧 고를 자리이고, 이번 회차는 위험당 대가가 3.5배까지 벌어집니다.</a:t>
+            </a:r>
+            <a:endParaRPr lang="en-US" sz="1000" dirty="0"/>
+          </a:p>
+        </p:txBody>
+      </p:sp>
+      <p:sp>
+        <p:nvSpPr>
+          <p:cNvPr id="24" name="Text 21"/>
+          <p:cNvSpPr/>
+          <p:nvPr/>
+        </p:nvSpPr>
+        <p:spPr>
+          <a:xfrm>
+            <a:off x="566928" y="6473952"/>
+            <a:ext cx="10417759" cy="237744"/>
+          </a:xfrm>
+          <a:prstGeom prst="rect">
+            <a:avLst/>
+          </a:prstGeom>
+          <a:noFill/>
+          <a:ln/>
+        </p:spPr>
+        <p:txBody>
+          <a:bodyPr wrap="square" lIns="0" tIns="0" rIns="0" bIns="0" rtlCol="0" anchor="ctr"/>
+          <a:lstStyle/>
+          <a:p>
+            <a:pPr indent="0" marL="0">
+              <a:buNone/>
+            </a:pPr>
+            <a:r>
+              <a:rPr lang="en-US" sz="850" dirty="0">
+                <a:solidFill>
+                  <a:srgbClr val="84888B"/>
+                </a:solidFill>
+                <a:latin typeface="맑은 고딕" pitchFamily="34" charset="0"/>
+                <a:ea typeface="맑은 고딕" pitchFamily="34" charset="-122"/>
+                <a:cs typeface="맑은 고딕" pitchFamily="34" charset="-120"/>
+              </a:rPr>
+              <a:t>출처 — 금융감독원 전자공시시스템(DART)에 2026.09.28 올라온 투자설명서 (접수번호 20260928000075)  ·  원금을 잃을 수 있는 상품입니다</a:t>
+            </a:r>
+            <a:endParaRPr lang="en-US" sz="850" dirty="0"/>
+          </a:p>
+        </p:txBody>
+      </p:sp>
+      <p:sp>
+        <p:nvSpPr>
+          <p:cNvPr id="25" name="Text 22"/>
+          <p:cNvSpPr/>
+          <p:nvPr/>
+        </p:nvSpPr>
+        <p:spPr>
+          <a:xfrm>
+            <a:off x="11076127" y="6473952"/>
+            <a:ext cx="548640" cy="237744"/>
+          </a:xfrm>
+          <a:prstGeom prst="rect">
+            <a:avLst/>
+          </a:prstGeom>
+          <a:noFill/>
+          <a:ln/>
+        </p:spPr>
+        <p:txBody>
+          <a:bodyPr wrap="square" lIns="0" tIns="0" rIns="0" bIns="0" rtlCol="0" anchor="ctr"/>
+          <a:lstStyle/>
+          <a:p>
+            <a:pPr algn="r" indent="0" marL="0">
+              <a:buNone/>
+            </a:pPr>
+            <a:r>
+              <a:rPr lang="en-US" sz="900" dirty="0">
+                <a:solidFill>
+                  <a:srgbClr val="84888B"/>
+                </a:solidFill>
+                <a:latin typeface="맑은 고딕" pitchFamily="34" charset="0"/>
+                <a:ea typeface="맑은 고딕" pitchFamily="34" charset="-122"/>
+                <a:cs typeface="맑은 고딕" pitchFamily="34" charset="-120"/>
+              </a:rPr>
+              <a:t>7</a:t>
+            </a:r>
+            <a:endParaRPr lang="en-US" sz="900" dirty="0"/>
+          </a:p>
+        </p:txBody>
+      </p:sp>
+    </p:spTree>
+  </p:cSld>
+  <p:clrMapOvr>
+    <a:masterClrMapping/>
+  </p:clrMapOvr>
+</p:sld>
+</file>
+
+<file path=ppt/slides/slide8.xml><?xml version="1.0" encoding="utf-8"?>
+<p:sld xmlns:a="http://schemas.openxmlformats.org/drawingml/2006/main" xmlns:r="http://schemas.openxmlformats.org/officeDocument/2006/relationships" xmlns:p="http://schemas.openxmlformats.org/presentationml/2006/main">
+  <p:cSld name="Slide 8">
     <p:spTree>
       <p:nvGrpSpPr>
         <p:cNvPr id="1" name=""/>
@@ -35662,7 +41390,7 @@
       </p:sp>
       <p:graphicFrame>
         <p:nvGraphicFramePr>
-          <p:cNvPr id="8" name="Table 0"/>
+          <p:cNvPr id="9" name="Table 0"/>
           <p:cNvGraphicFramePr>
             <a:graphicFrameLocks noGrp="1"/>
           </p:cNvGraphicFramePr>
@@ -37285,7 +43013,7 @@
                 <a:ea typeface="맑은 고딕" pitchFamily="34" charset="-122"/>
                 <a:cs typeface="맑은 고딕" pitchFamily="34" charset="-120"/>
               </a:rPr>
-              <a:t>7</a:t>
+              <a:t>8</a:t>
             </a:r>
             <a:endParaRPr lang="en-US" sz="900" dirty="0"/>
           </a:p>
@@ -37299,9 +43027,9 @@
 </p:sld>
 </file>
 
-<file path=ppt/slides/slide8.xml><?xml version="1.0" encoding="utf-8"?>
+<file path=ppt/slides/slide9.xml><?xml version="1.0" encoding="utf-8"?>
 <p:sld xmlns:a="http://schemas.openxmlformats.org/drawingml/2006/main" xmlns:r="http://schemas.openxmlformats.org/officeDocument/2006/relationships" xmlns:p="http://schemas.openxmlformats.org/presentationml/2006/main">
-  <p:cSld name="Slide 8">
+  <p:cSld name="Slide 9">
     <p:spTree>
       <p:nvGrpSpPr>
         <p:cNvPr id="1" name=""/>
@@ -38795,1593 +44523,6 @@
                 <a:cs typeface="맑은 고딕" pitchFamily="34" charset="-120"/>
               </a:rPr>
               <a:t>컴퓨터로 돌려봤을 때 이번 회차에서 손해 볼 가능성이 가장 낮습니다.</a:t>
-            </a:r>
-            <a:endParaRPr lang="en-US" sz="1150" dirty="0"/>
-          </a:p>
-        </p:txBody>
-      </p:sp>
-      <p:sp>
-        <p:nvSpPr>
-          <p:cNvPr id="45" name="Text 42"/>
-          <p:cNvSpPr/>
-          <p:nvPr/>
-        </p:nvSpPr>
-        <p:spPr>
-          <a:xfrm>
-            <a:off x="566928" y="6473952"/>
-            <a:ext cx="10417759" cy="237744"/>
-          </a:xfrm>
-          <a:prstGeom prst="rect">
-            <a:avLst/>
-          </a:prstGeom>
-          <a:noFill/>
-          <a:ln/>
-        </p:spPr>
-        <p:txBody>
-          <a:bodyPr wrap="square" lIns="0" tIns="0" rIns="0" bIns="0" rtlCol="0" anchor="ctr"/>
-          <a:lstStyle/>
-          <a:p>
-            <a:pPr indent="0" marL="0">
-              <a:buNone/>
-            </a:pPr>
-            <a:r>
-              <a:rPr lang="en-US" sz="850" dirty="0">
-                <a:solidFill>
-                  <a:srgbClr val="84888B"/>
-                </a:solidFill>
-                <a:latin typeface="맑은 고딕" pitchFamily="34" charset="0"/>
-                <a:ea typeface="맑은 고딕" pitchFamily="34" charset="-122"/>
-                <a:cs typeface="맑은 고딕" pitchFamily="34" charset="-120"/>
-              </a:rPr>
-              <a:t>출처 — 금융감독원 전자공시시스템(DART)에 2026.09.28 올라온 투자설명서 (접수번호 20260928000075)  ·  원금을 잃을 수 있는 상품입니다</a:t>
-            </a:r>
-            <a:endParaRPr lang="en-US" sz="850" dirty="0"/>
-          </a:p>
-        </p:txBody>
-      </p:sp>
-      <p:sp>
-        <p:nvSpPr>
-          <p:cNvPr id="46" name="Text 43"/>
-          <p:cNvSpPr/>
-          <p:nvPr/>
-        </p:nvSpPr>
-        <p:spPr>
-          <a:xfrm>
-            <a:off x="11076127" y="6473952"/>
-            <a:ext cx="548640" cy="237744"/>
-          </a:xfrm>
-          <a:prstGeom prst="rect">
-            <a:avLst/>
-          </a:prstGeom>
-          <a:noFill/>
-          <a:ln/>
-        </p:spPr>
-        <p:txBody>
-          <a:bodyPr wrap="square" lIns="0" tIns="0" rIns="0" bIns="0" rtlCol="0" anchor="ctr"/>
-          <a:lstStyle/>
-          <a:p>
-            <a:pPr algn="r" indent="0" marL="0">
-              <a:buNone/>
-            </a:pPr>
-            <a:r>
-              <a:rPr lang="en-US" sz="900" dirty="0">
-                <a:solidFill>
-                  <a:srgbClr val="84888B"/>
-                </a:solidFill>
-                <a:latin typeface="맑은 고딕" pitchFamily="34" charset="0"/>
-                <a:ea typeface="맑은 고딕" pitchFamily="34" charset="-122"/>
-                <a:cs typeface="맑은 고딕" pitchFamily="34" charset="-120"/>
-              </a:rPr>
-              <a:t>8</a:t>
-            </a:r>
-            <a:endParaRPr lang="en-US" sz="900" dirty="0"/>
-          </a:p>
-        </p:txBody>
-      </p:sp>
-    </p:spTree>
-  </p:cSld>
-  <p:clrMapOvr>
-    <a:masterClrMapping/>
-  </p:clrMapOvr>
-</p:sld>
-</file>
-
-<file path=ppt/slides/slide9.xml><?xml version="1.0" encoding="utf-8"?>
-<p:sld xmlns:a="http://schemas.openxmlformats.org/drawingml/2006/main" xmlns:r="http://schemas.openxmlformats.org/officeDocument/2006/relationships" xmlns:p="http://schemas.openxmlformats.org/presentationml/2006/main">
-  <p:cSld name="Slide 9">
-    <p:spTree>
-      <p:nvGrpSpPr>
-        <p:cNvPr id="1" name=""/>
-        <p:cNvGrpSpPr/>
-        <p:nvPr/>
-      </p:nvGrpSpPr>
-      <p:grpSpPr>
-        <a:xfrm>
-          <a:off x="0" y="0"/>
-          <a:ext cx="0" cy="0"/>
-          <a:chOff x="0" y="0"/>
-          <a:chExt cx="0" cy="0"/>
-        </a:xfrm>
-      </p:grpSpPr>
-      <p:sp>
-        <p:nvSpPr>
-          <p:cNvPr id="2" name="Shape 0"/>
-          <p:cNvSpPr/>
-          <p:nvPr/>
-        </p:nvSpPr>
-        <p:spPr>
-          <a:xfrm>
-            <a:off x="566928" y="420624"/>
-            <a:ext cx="11057839" cy="12802"/>
-          </a:xfrm>
-          <a:prstGeom prst="rect">
-            <a:avLst/>
-          </a:prstGeom>
-          <a:solidFill>
-            <a:srgbClr val="F58220"/>
-          </a:solidFill>
-          <a:ln w="12700">
-            <a:solidFill>
-              <a:srgbClr val="333333"/>
-            </a:solidFill>
-            <a:prstDash val="solid"/>
-          </a:ln>
-        </p:spPr>
-      </p:sp>
-      <p:sp>
-        <p:nvSpPr>
-          <p:cNvPr id="3" name="Text 1"/>
-          <p:cNvSpPr/>
-          <p:nvPr/>
-        </p:nvSpPr>
-        <p:spPr>
-          <a:xfrm>
-            <a:off x="566928" y="493776"/>
-            <a:ext cx="11057839" cy="420624"/>
-          </a:xfrm>
-          <a:prstGeom prst="rect">
-            <a:avLst/>
-          </a:prstGeom>
-          <a:noFill/>
-          <a:ln/>
-        </p:spPr>
-        <p:txBody>
-          <a:bodyPr wrap="square" lIns="0" tIns="0" rIns="0" bIns="0" rtlCol="0" anchor="ctr"/>
-          <a:lstStyle/>
-          <a:p>
-            <a:pPr indent="0" marL="0">
-              <a:buNone/>
-            </a:pPr>
-            <a:r>
-              <a:rPr lang="en-US" sz="2400" b="1" dirty="0">
-                <a:solidFill>
-                  <a:srgbClr val="1A1A1A"/>
-                </a:solidFill>
-                <a:latin typeface="맑은 고딕" pitchFamily="34" charset="0"/>
-                <a:ea typeface="맑은 고딕" pitchFamily="34" charset="-122"/>
-                <a:cs typeface="맑은 고딕" pitchFamily="34" charset="-120"/>
-              </a:rPr>
-              <a:t>추천 2 — 수익과 안정을 반반 보는 분</a:t>
-            </a:r>
-            <a:endParaRPr lang="en-US" sz="2400" dirty="0"/>
-          </a:p>
-        </p:txBody>
-      </p:sp>
-      <p:sp>
-        <p:nvSpPr>
-          <p:cNvPr id="4" name="Text 2"/>
-          <p:cNvSpPr/>
-          <p:nvPr/>
-        </p:nvSpPr>
-        <p:spPr>
-          <a:xfrm>
-            <a:off x="566928" y="1042416"/>
-            <a:ext cx="1993392" cy="457200"/>
-          </a:xfrm>
-          <a:prstGeom prst="rect">
-            <a:avLst/>
-          </a:prstGeom>
-          <a:noFill/>
-          <a:ln/>
-        </p:spPr>
-        <p:txBody>
-          <a:bodyPr wrap="square" lIns="0" tIns="0" rIns="0" bIns="0" rtlCol="0" anchor="ctr"/>
-          <a:lstStyle/>
-          <a:p>
-            <a:pPr indent="0" marL="0">
-              <a:buNone/>
-            </a:pPr>
-            <a:r>
-              <a:rPr lang="en-US" sz="2600" b="1" dirty="0">
-                <a:solidFill>
-                  <a:srgbClr val="1A1A1A"/>
-                </a:solidFill>
-                <a:latin typeface="맑은 고딕" pitchFamily="34" charset="0"/>
-                <a:ea typeface="맑은 고딕" pitchFamily="34" charset="-122"/>
-                <a:cs typeface="맑은 고딕" pitchFamily="34" charset="-120"/>
-              </a:rPr>
-              <a:t>제38165회</a:t>
-            </a:r>
-            <a:endParaRPr lang="en-US" sz="2600" dirty="0"/>
-          </a:p>
-        </p:txBody>
-      </p:sp>
-      <p:sp>
-        <p:nvSpPr>
-          <p:cNvPr id="5" name="Shape 3"/>
-          <p:cNvSpPr/>
-          <p:nvPr/>
-        </p:nvSpPr>
-        <p:spPr>
-          <a:xfrm>
-            <a:off x="2670048" y="1143000"/>
-            <a:ext cx="859536" cy="274320"/>
-          </a:xfrm>
-          <a:prstGeom prst="rect">
-            <a:avLst/>
-          </a:prstGeom>
-          <a:solidFill>
-            <a:srgbClr val="FBF2DC"/>
-          </a:solidFill>
-          <a:ln w="12700">
-            <a:solidFill>
-              <a:srgbClr val="333333"/>
-            </a:solidFill>
-            <a:prstDash val="solid"/>
-          </a:ln>
-        </p:spPr>
-      </p:sp>
-      <p:sp>
-        <p:nvSpPr>
-          <p:cNvPr id="6" name="Text 4"/>
-          <p:cNvSpPr/>
-          <p:nvPr/>
-        </p:nvSpPr>
-        <p:spPr>
-          <a:xfrm>
-            <a:off x="2670048" y="1143000"/>
-            <a:ext cx="859536" cy="274320"/>
-          </a:xfrm>
-          <a:prstGeom prst="rect">
-            <a:avLst/>
-          </a:prstGeom>
-          <a:noFill/>
-          <a:ln/>
-        </p:spPr>
-        <p:txBody>
-          <a:bodyPr wrap="square" lIns="0" tIns="0" rIns="0" bIns="0" rtlCol="0" anchor="ctr"/>
-          <a:lstStyle/>
-          <a:p>
-            <a:pPr algn="ctr" indent="0" marL="0">
-              <a:buNone/>
-            </a:pPr>
-            <a:r>
-              <a:rPr lang="en-US" sz="1050" b="1" dirty="0">
-                <a:solidFill>
-                  <a:srgbClr val="8A6A0B"/>
-                </a:solidFill>
-                <a:latin typeface="맑은 고딕" pitchFamily="34" charset="0"/>
-                <a:ea typeface="맑은 고딕" pitchFamily="34" charset="-122"/>
-                <a:cs typeface="맑은 고딕" pitchFamily="34" charset="-120"/>
-              </a:rPr>
-              <a:t>중간</a:t>
-            </a:r>
-            <a:endParaRPr lang="en-US" sz="1050" dirty="0"/>
-          </a:p>
-        </p:txBody>
-      </p:sp>
-      <p:sp>
-        <p:nvSpPr>
-          <p:cNvPr id="7" name="Shape 5"/>
-          <p:cNvSpPr/>
-          <p:nvPr/>
-        </p:nvSpPr>
-        <p:spPr>
-          <a:xfrm>
-            <a:off x="3602736" y="1143000"/>
-            <a:ext cx="859536" cy="274320"/>
-          </a:xfrm>
-          <a:prstGeom prst="rect">
-            <a:avLst/>
-          </a:prstGeom>
-          <a:solidFill>
-            <a:srgbClr val="ECEFF4"/>
-          </a:solidFill>
-          <a:ln w="12700">
-            <a:solidFill>
-              <a:srgbClr val="333333"/>
-            </a:solidFill>
-            <a:prstDash val="solid"/>
-          </a:ln>
-        </p:spPr>
-      </p:sp>
-      <p:sp>
-        <p:nvSpPr>
-          <p:cNvPr id="8" name="Text 6"/>
-          <p:cNvSpPr/>
-          <p:nvPr/>
-        </p:nvSpPr>
-        <p:spPr>
-          <a:xfrm>
-            <a:off x="3602736" y="1143000"/>
-            <a:ext cx="859536" cy="274320"/>
-          </a:xfrm>
-          <a:prstGeom prst="rect">
-            <a:avLst/>
-          </a:prstGeom>
-          <a:noFill/>
-          <a:ln/>
-        </p:spPr>
-        <p:txBody>
-          <a:bodyPr wrap="square" lIns="0" tIns="0" rIns="0" bIns="0" rtlCol="0" anchor="ctr"/>
-          <a:lstStyle/>
-          <a:p>
-            <a:pPr algn="ctr" indent="0" marL="0">
-              <a:buNone/>
-            </a:pPr>
-            <a:r>
-              <a:rPr lang="en-US" sz="1050" b="1" dirty="0">
-                <a:solidFill>
-                  <a:srgbClr val="043B72"/>
-                </a:solidFill>
-                <a:latin typeface="맑은 고딕" pitchFamily="34" charset="0"/>
-                <a:ea typeface="맑은 고딕" pitchFamily="34" charset="-122"/>
-                <a:cs typeface="맑은 고딕" pitchFamily="34" charset="-120"/>
-              </a:rPr>
-              <a:t>종목형</a:t>
-            </a:r>
-            <a:endParaRPr lang="en-US" sz="1050" dirty="0"/>
-          </a:p>
-        </p:txBody>
-      </p:sp>
-      <p:sp>
-        <p:nvSpPr>
-          <p:cNvPr id="9" name="Text 7"/>
-          <p:cNvSpPr/>
-          <p:nvPr/>
-        </p:nvSpPr>
-        <p:spPr>
-          <a:xfrm>
-            <a:off x="566928" y="1536192"/>
-            <a:ext cx="6766560" cy="274320"/>
-          </a:xfrm>
-          <a:prstGeom prst="rect">
-            <a:avLst/>
-          </a:prstGeom>
-          <a:noFill/>
-          <a:ln/>
-        </p:spPr>
-        <p:txBody>
-          <a:bodyPr wrap="square" lIns="0" tIns="0" rIns="0" bIns="0" rtlCol="0" anchor="ctr"/>
-          <a:lstStyle/>
-          <a:p>
-            <a:pPr indent="0" marL="0">
-              <a:buNone/>
-            </a:pPr>
-            <a:r>
-              <a:rPr lang="en-US" sz="1300" dirty="0">
-                <a:solidFill>
-                  <a:srgbClr val="6C6C6C"/>
-                </a:solidFill>
-                <a:latin typeface="맑은 고딕" pitchFamily="34" charset="0"/>
-                <a:ea typeface="맑은 고딕" pitchFamily="34" charset="-122"/>
-                <a:cs typeface="맑은 고딕" pitchFamily="34" charset="-120"/>
-              </a:rPr>
-              <a:t>삼성전자 · SK하이닉스  ·  36개월  ·  3개월마다 확인</a:t>
-            </a:r>
-            <a:endParaRPr lang="en-US" sz="1300" dirty="0"/>
-          </a:p>
-        </p:txBody>
-      </p:sp>
-      <p:sp>
-        <p:nvSpPr>
-          <p:cNvPr id="10" name="Shape 8"/>
-          <p:cNvSpPr/>
-          <p:nvPr/>
-        </p:nvSpPr>
-        <p:spPr>
-          <a:xfrm>
-            <a:off x="8503920" y="1005840"/>
-            <a:ext cx="3127248" cy="914400"/>
-          </a:xfrm>
-          <a:prstGeom prst="rect">
-            <a:avLst/>
-          </a:prstGeom>
-          <a:solidFill>
-            <a:srgbClr val="F7F8FA"/>
-          </a:solidFill>
-          <a:ln w="12700">
-            <a:solidFill>
-              <a:srgbClr val="CDCECB"/>
-            </a:solidFill>
-            <a:prstDash val="solid"/>
-          </a:ln>
-        </p:spPr>
-      </p:sp>
-      <p:sp>
-        <p:nvSpPr>
-          <p:cNvPr id="11" name="Text 9"/>
-          <p:cNvSpPr/>
-          <p:nvPr/>
-        </p:nvSpPr>
-        <p:spPr>
-          <a:xfrm>
-            <a:off x="8705088" y="1115568"/>
-            <a:ext cx="2743200" cy="219456"/>
-          </a:xfrm>
-          <a:prstGeom prst="rect">
-            <a:avLst/>
-          </a:prstGeom>
-          <a:noFill/>
-          <a:ln/>
-        </p:spPr>
-        <p:txBody>
-          <a:bodyPr wrap="square" lIns="0" tIns="0" rIns="0" bIns="0" rtlCol="0" anchor="ctr"/>
-          <a:lstStyle/>
-          <a:p>
-            <a:pPr indent="0" marL="0">
-              <a:buNone/>
-            </a:pPr>
-            <a:r>
-              <a:rPr lang="en-US" sz="1050" dirty="0">
-                <a:solidFill>
-                  <a:srgbClr val="6C6C6C"/>
-                </a:solidFill>
-                <a:latin typeface="맑은 고딕" pitchFamily="34" charset="0"/>
-                <a:ea typeface="맑은 고딕" pitchFamily="34" charset="-122"/>
-                <a:cs typeface="맑은 고딕" pitchFamily="34" charset="-120"/>
-              </a:rPr>
-              <a:t>잘 되면 연 수익률</a:t>
-            </a:r>
-            <a:endParaRPr lang="en-US" sz="1050" dirty="0"/>
-          </a:p>
-        </p:txBody>
-      </p:sp>
-      <p:sp>
-        <p:nvSpPr>
-          <p:cNvPr id="12" name="Text 10"/>
-          <p:cNvSpPr/>
-          <p:nvPr/>
-        </p:nvSpPr>
-        <p:spPr>
-          <a:xfrm>
-            <a:off x="8705088" y="1335024"/>
-            <a:ext cx="2743200" cy="512064"/>
-          </a:xfrm>
-          <a:prstGeom prst="rect">
-            <a:avLst/>
-          </a:prstGeom>
-          <a:noFill/>
-          <a:ln/>
-        </p:spPr>
-        <p:txBody>
-          <a:bodyPr wrap="square" lIns="0" tIns="0" rIns="0" bIns="0" rtlCol="0" anchor="ctr"/>
-          <a:lstStyle/>
-          <a:p>
-            <a:pPr indent="0" marL="0">
-              <a:buNone/>
-            </a:pPr>
-            <a:r>
-              <a:rPr lang="en-US" sz="3400" b="1" dirty="0">
-                <a:solidFill>
-                  <a:srgbClr val="F58220"/>
-                </a:solidFill>
-                <a:latin typeface="맑은 고딕" pitchFamily="34" charset="0"/>
-                <a:ea typeface="맑은 고딕" pitchFamily="34" charset="-122"/>
-                <a:cs typeface="맑은 고딕" pitchFamily="34" charset="-120"/>
-              </a:rPr>
-              <a:t>23.0</a:t>
-            </a:r>
-            <a:pPr indent="0" marL="0">
-              <a:buNone/>
-            </a:pPr>
-            <a:r>
-              <a:rPr lang="en-US" sz="2000" b="1" dirty="0">
-                <a:solidFill>
-                  <a:srgbClr val="F58220"/>
-                </a:solidFill>
-                <a:latin typeface="맑은 고딕" pitchFamily="34" charset="0"/>
-                <a:ea typeface="맑은 고딕" pitchFamily="34" charset="-122"/>
-                <a:cs typeface="맑은 고딕" pitchFamily="34" charset="-120"/>
-              </a:rPr>
-              <a:t>%</a:t>
-            </a:r>
-            <a:endParaRPr lang="en-US" sz="3400" dirty="0"/>
-          </a:p>
-        </p:txBody>
-      </p:sp>
-      <p:sp>
-        <p:nvSpPr>
-          <p:cNvPr id="13" name="Text 11"/>
-          <p:cNvSpPr/>
-          <p:nvPr/>
-        </p:nvSpPr>
-        <p:spPr>
-          <a:xfrm>
-            <a:off x="566928" y="1883664"/>
-            <a:ext cx="6766560" cy="274320"/>
-          </a:xfrm>
-          <a:prstGeom prst="rect">
-            <a:avLst/>
-          </a:prstGeom>
-          <a:noFill/>
-          <a:ln/>
-        </p:spPr>
-        <p:txBody>
-          <a:bodyPr wrap="square" lIns="0" tIns="0" rIns="0" bIns="0" rtlCol="0" anchor="ctr"/>
-          <a:lstStyle/>
-          <a:p>
-            <a:pPr indent="0" marL="0">
-              <a:buNone/>
-            </a:pPr>
-            <a:r>
-              <a:rPr lang="en-US" sz="1300" b="1" dirty="0">
-                <a:solidFill>
-                  <a:srgbClr val="1A1A1A"/>
-                </a:solidFill>
-                <a:latin typeface="맑은 고딕" pitchFamily="34" charset="0"/>
-                <a:ea typeface="맑은 고딕" pitchFamily="34" charset="-122"/>
-                <a:cs typeface="맑은 고딕" pitchFamily="34" charset="-120"/>
-              </a:rPr>
-              <a:t>1만원 → 빠르면 3개월 뒤 10,575원</a:t>
-            </a:r>
-            <a:endParaRPr lang="en-US" sz="1300" dirty="0"/>
-          </a:p>
-        </p:txBody>
-      </p:sp>
-      <p:sp>
-        <p:nvSpPr>
-          <p:cNvPr id="14" name="Shape 12"/>
-          <p:cNvSpPr/>
-          <p:nvPr/>
-        </p:nvSpPr>
-        <p:spPr>
-          <a:xfrm>
-            <a:off x="566928" y="2267712"/>
-            <a:ext cx="1042416" cy="274320"/>
-          </a:xfrm>
-          <a:prstGeom prst="rect">
-            <a:avLst/>
-          </a:prstGeom>
-          <a:solidFill>
-            <a:srgbClr val="043B72"/>
-          </a:solidFill>
-          <a:ln w="12700">
-            <a:solidFill>
-              <a:srgbClr val="333333"/>
-            </a:solidFill>
-            <a:prstDash val="solid"/>
-          </a:ln>
-        </p:spPr>
-      </p:sp>
-      <p:sp>
-        <p:nvSpPr>
-          <p:cNvPr id="15" name="Text 13"/>
-          <p:cNvSpPr/>
-          <p:nvPr/>
-        </p:nvSpPr>
-        <p:spPr>
-          <a:xfrm>
-            <a:off x="566928" y="2267712"/>
-            <a:ext cx="1042416" cy="274320"/>
-          </a:xfrm>
-          <a:prstGeom prst="rect">
-            <a:avLst/>
-          </a:prstGeom>
-          <a:noFill/>
-          <a:ln/>
-        </p:spPr>
-        <p:txBody>
-          <a:bodyPr wrap="square" lIns="0" tIns="0" rIns="0" bIns="0" rtlCol="0" anchor="ctr"/>
-          <a:lstStyle/>
-          <a:p>
-            <a:pPr algn="ctr" indent="0" marL="0">
-              <a:buNone/>
-            </a:pPr>
-            <a:r>
-              <a:rPr lang="en-US" sz="1050" b="1" dirty="0">
-                <a:solidFill>
-                  <a:srgbClr val="FFFFFF"/>
-                </a:solidFill>
-                <a:latin typeface="맑은 고딕" pitchFamily="34" charset="0"/>
-                <a:ea typeface="맑은 고딕" pitchFamily="34" charset="-122"/>
-                <a:cs typeface="맑은 고딕" pitchFamily="34" charset="-120"/>
-              </a:rPr>
-              <a:t>무엇을 보나</a:t>
-            </a:r>
-            <a:endParaRPr lang="en-US" sz="1050" dirty="0"/>
-          </a:p>
-        </p:txBody>
-      </p:sp>
-      <p:sp>
-        <p:nvSpPr>
-          <p:cNvPr id="16" name="Text 14"/>
-          <p:cNvSpPr/>
-          <p:nvPr/>
-        </p:nvSpPr>
-        <p:spPr>
-          <a:xfrm>
-            <a:off x="1755648" y="2231136"/>
-            <a:ext cx="9869119" cy="384048"/>
-          </a:xfrm>
-          <a:prstGeom prst="rect">
-            <a:avLst/>
-          </a:prstGeom>
-          <a:noFill/>
-          <a:ln/>
-        </p:spPr>
-        <p:txBody>
-          <a:bodyPr wrap="square" lIns="0" tIns="0" rIns="0" bIns="0" rtlCol="0" anchor="ctr"/>
-          <a:lstStyle/>
-          <a:p>
-            <a:pPr indent="0" marL="0">
-              <a:buNone/>
-            </a:pPr>
-            <a:r>
-              <a:rPr lang="en-US" sz="1200" dirty="0">
-                <a:solidFill>
-                  <a:srgbClr val="3D3D3D"/>
-                </a:solidFill>
-                <a:latin typeface="맑은 고딕" pitchFamily="34" charset="0"/>
-                <a:ea typeface="맑은 고딕" pitchFamily="34" charset="-122"/>
-                <a:cs typeface="맑은 고딕" pitchFamily="34" charset="-120"/>
-              </a:rPr>
-              <a:t>삼성전자 · SK하이닉스 중 더 많이 떨어진 하나로 판정합니다. 하나만 나빠도 그쪽을 봅니다.</a:t>
-            </a:r>
-            <a:endParaRPr lang="en-US" sz="1200" dirty="0"/>
-          </a:p>
-        </p:txBody>
-      </p:sp>
-      <p:sp>
-        <p:nvSpPr>
-          <p:cNvPr id="17" name="Shape 15"/>
-          <p:cNvSpPr/>
-          <p:nvPr/>
-        </p:nvSpPr>
-        <p:spPr>
-          <a:xfrm>
-            <a:off x="566928" y="2724912"/>
-            <a:ext cx="1042416" cy="274320"/>
-          </a:xfrm>
-          <a:prstGeom prst="rect">
-            <a:avLst/>
-          </a:prstGeom>
-          <a:solidFill>
-            <a:srgbClr val="043B72"/>
-          </a:solidFill>
-          <a:ln w="12700">
-            <a:solidFill>
-              <a:srgbClr val="333333"/>
-            </a:solidFill>
-            <a:prstDash val="solid"/>
-          </a:ln>
-        </p:spPr>
-      </p:sp>
-      <p:sp>
-        <p:nvSpPr>
-          <p:cNvPr id="18" name="Text 16"/>
-          <p:cNvSpPr/>
-          <p:nvPr/>
-        </p:nvSpPr>
-        <p:spPr>
-          <a:xfrm>
-            <a:off x="566928" y="2724912"/>
-            <a:ext cx="1042416" cy="274320"/>
-          </a:xfrm>
-          <a:prstGeom prst="rect">
-            <a:avLst/>
-          </a:prstGeom>
-          <a:noFill/>
-          <a:ln/>
-        </p:spPr>
-        <p:txBody>
-          <a:bodyPr wrap="square" lIns="0" tIns="0" rIns="0" bIns="0" rtlCol="0" anchor="ctr"/>
-          <a:lstStyle/>
-          <a:p>
-            <a:pPr algn="ctr" indent="0" marL="0">
-              <a:buNone/>
-            </a:pPr>
-            <a:r>
-              <a:rPr lang="en-US" sz="1050" b="1" dirty="0">
-                <a:solidFill>
-                  <a:srgbClr val="FFFFFF"/>
-                </a:solidFill>
-                <a:latin typeface="맑은 고딕" pitchFamily="34" charset="0"/>
-                <a:ea typeface="맑은 고딕" pitchFamily="34" charset="-122"/>
-                <a:cs typeface="맑은 고딕" pitchFamily="34" charset="-120"/>
-              </a:rPr>
-              <a:t>언제 끝나나</a:t>
-            </a:r>
-            <a:endParaRPr lang="en-US" sz="1050" dirty="0"/>
-          </a:p>
-        </p:txBody>
-      </p:sp>
-      <p:sp>
-        <p:nvSpPr>
-          <p:cNvPr id="19" name="Text 17"/>
-          <p:cNvSpPr/>
-          <p:nvPr/>
-        </p:nvSpPr>
-        <p:spPr>
-          <a:xfrm>
-            <a:off x="1755648" y="2688336"/>
-            <a:ext cx="9869119" cy="384048"/>
-          </a:xfrm>
-          <a:prstGeom prst="rect">
-            <a:avLst/>
-          </a:prstGeom>
-          <a:noFill/>
-          <a:ln/>
-        </p:spPr>
-        <p:txBody>
-          <a:bodyPr wrap="square" lIns="0" tIns="0" rIns="0" bIns="0" rtlCol="0" anchor="ctr"/>
-          <a:lstStyle/>
-          <a:p>
-            <a:pPr indent="0" marL="0">
-              <a:buNone/>
-            </a:pPr>
-            <a:r>
-              <a:rPr lang="en-US" sz="1200" dirty="0">
-                <a:solidFill>
-                  <a:srgbClr val="3D3D3D"/>
-                </a:solidFill>
-                <a:latin typeface="맑은 고딕" pitchFamily="34" charset="0"/>
-                <a:ea typeface="맑은 고딕" pitchFamily="34" charset="-122"/>
-                <a:cs typeface="맑은 고딕" pitchFamily="34" charset="-120"/>
-              </a:rPr>
-              <a:t>3개월마다 확인해서 처음 가격의 85% 이상(-15%까지 떨어져도 괜찮다는 뜻)이면 그 자리에서 끝나고 1만원이 10,575원이 되어 돌아옵니다.</a:t>
-            </a:r>
-            <a:endParaRPr lang="en-US" sz="1200" dirty="0"/>
-          </a:p>
-        </p:txBody>
-      </p:sp>
-      <p:sp>
-        <p:nvSpPr>
-          <p:cNvPr id="20" name="Shape 18"/>
-          <p:cNvSpPr/>
-          <p:nvPr/>
-        </p:nvSpPr>
-        <p:spPr>
-          <a:xfrm>
-            <a:off x="566928" y="3182112"/>
-            <a:ext cx="1042416" cy="274320"/>
-          </a:xfrm>
-          <a:prstGeom prst="rect">
-            <a:avLst/>
-          </a:prstGeom>
-          <a:solidFill>
-            <a:srgbClr val="043B72"/>
-          </a:solidFill>
-          <a:ln w="12700">
-            <a:solidFill>
-              <a:srgbClr val="333333"/>
-            </a:solidFill>
-            <a:prstDash val="solid"/>
-          </a:ln>
-        </p:spPr>
-      </p:sp>
-      <p:sp>
-        <p:nvSpPr>
-          <p:cNvPr id="21" name="Text 19"/>
-          <p:cNvSpPr/>
-          <p:nvPr/>
-        </p:nvSpPr>
-        <p:spPr>
-          <a:xfrm>
-            <a:off x="566928" y="3182112"/>
-            <a:ext cx="1042416" cy="274320"/>
-          </a:xfrm>
-          <a:prstGeom prst="rect">
-            <a:avLst/>
-          </a:prstGeom>
-          <a:noFill/>
-          <a:ln/>
-        </p:spPr>
-        <p:txBody>
-          <a:bodyPr wrap="square" lIns="0" tIns="0" rIns="0" bIns="0" rtlCol="0" anchor="ctr"/>
-          <a:lstStyle/>
-          <a:p>
-            <a:pPr algn="ctr" indent="0" marL="0">
-              <a:buNone/>
-            </a:pPr>
-            <a:r>
-              <a:rPr lang="en-US" sz="1050" b="1" dirty="0">
-                <a:solidFill>
-                  <a:srgbClr val="FFFFFF"/>
-                </a:solidFill>
-                <a:latin typeface="맑은 고딕" pitchFamily="34" charset="0"/>
-                <a:ea typeface="맑은 고딕" pitchFamily="34" charset="-122"/>
-                <a:cs typeface="맑은 고딕" pitchFamily="34" charset="-120"/>
-              </a:rPr>
-              <a:t>원금 지키기</a:t>
-            </a:r>
-            <a:endParaRPr lang="en-US" sz="1050" dirty="0"/>
-          </a:p>
-        </p:txBody>
-      </p:sp>
-      <p:sp>
-        <p:nvSpPr>
-          <p:cNvPr id="22" name="Text 20"/>
-          <p:cNvSpPr/>
-          <p:nvPr/>
-        </p:nvSpPr>
-        <p:spPr>
-          <a:xfrm>
-            <a:off x="1755648" y="3145536"/>
-            <a:ext cx="9869119" cy="384048"/>
-          </a:xfrm>
-          <a:prstGeom prst="rect">
-            <a:avLst/>
-          </a:prstGeom>
-          <a:noFill/>
-          <a:ln/>
-        </p:spPr>
-        <p:txBody>
-          <a:bodyPr wrap="square" lIns="0" tIns="0" rIns="0" bIns="0" rtlCol="0" anchor="ctr"/>
-          <a:lstStyle/>
-          <a:p>
-            <a:pPr indent="0" marL="0">
-              <a:buNone/>
-            </a:pPr>
-            <a:r>
-              <a:rPr lang="en-US" sz="1200" dirty="0">
-                <a:solidFill>
-                  <a:srgbClr val="3D3D3D"/>
-                </a:solidFill>
-                <a:latin typeface="맑은 고딕" pitchFamily="34" charset="0"/>
-                <a:ea typeface="맑은 고딕" pitchFamily="34" charset="-122"/>
-                <a:cs typeface="맑은 고딕" pitchFamily="34" charset="-120"/>
-              </a:rPr>
-              <a:t>끝날 때까지 종가가 단 한 번도 35%(처음 가격에서 -65%) 아래로 안 내려가면, 마지막에 얼마가 됐든 원금과 이자를 다 받습니다.</a:t>
-            </a:r>
-            <a:endParaRPr lang="en-US" sz="1200" dirty="0"/>
-          </a:p>
-        </p:txBody>
-      </p:sp>
-      <p:sp>
-        <p:nvSpPr>
-          <p:cNvPr id="23" name="Shape 21"/>
-          <p:cNvSpPr/>
-          <p:nvPr/>
-        </p:nvSpPr>
-        <p:spPr>
-          <a:xfrm>
-            <a:off x="566928" y="3639312"/>
-            <a:ext cx="1042416" cy="274320"/>
-          </a:xfrm>
-          <a:prstGeom prst="rect">
-            <a:avLst/>
-          </a:prstGeom>
-          <a:solidFill>
-            <a:srgbClr val="043B72"/>
-          </a:solidFill>
-          <a:ln w="12700">
-            <a:solidFill>
-              <a:srgbClr val="333333"/>
-            </a:solidFill>
-            <a:prstDash val="solid"/>
-          </a:ln>
-        </p:spPr>
-      </p:sp>
-      <p:sp>
-        <p:nvSpPr>
-          <p:cNvPr id="24" name="Text 22"/>
-          <p:cNvSpPr/>
-          <p:nvPr/>
-        </p:nvSpPr>
-        <p:spPr>
-          <a:xfrm>
-            <a:off x="566928" y="3639312"/>
-            <a:ext cx="1042416" cy="274320"/>
-          </a:xfrm>
-          <a:prstGeom prst="rect">
-            <a:avLst/>
-          </a:prstGeom>
-          <a:noFill/>
-          <a:ln/>
-        </p:spPr>
-        <p:txBody>
-          <a:bodyPr wrap="square" lIns="0" tIns="0" rIns="0" bIns="0" rtlCol="0" anchor="ctr"/>
-          <a:lstStyle/>
-          <a:p>
-            <a:pPr algn="ctr" indent="0" marL="0">
-              <a:buNone/>
-            </a:pPr>
-            <a:r>
-              <a:rPr lang="en-US" sz="1050" b="1" dirty="0">
-                <a:solidFill>
-                  <a:srgbClr val="FFFFFF"/>
-                </a:solidFill>
-                <a:latin typeface="맑은 고딕" pitchFamily="34" charset="0"/>
-                <a:ea typeface="맑은 고딕" pitchFamily="34" charset="-122"/>
-                <a:cs typeface="맑은 고딕" pitchFamily="34" charset="-120"/>
-              </a:rPr>
-              <a:t>손해 나는 때</a:t>
-            </a:r>
-            <a:endParaRPr lang="en-US" sz="1050" dirty="0"/>
-          </a:p>
-        </p:txBody>
-      </p:sp>
-      <p:sp>
-        <p:nvSpPr>
-          <p:cNvPr id="25" name="Text 23"/>
-          <p:cNvSpPr/>
-          <p:nvPr/>
-        </p:nvSpPr>
-        <p:spPr>
-          <a:xfrm>
-            <a:off x="1755648" y="3602736"/>
-            <a:ext cx="9869119" cy="384048"/>
-          </a:xfrm>
-          <a:prstGeom prst="rect">
-            <a:avLst/>
-          </a:prstGeom>
-          <a:noFill/>
-          <a:ln/>
-        </p:spPr>
-        <p:txBody>
-          <a:bodyPr wrap="square" lIns="0" tIns="0" rIns="0" bIns="0" rtlCol="0" anchor="ctr"/>
-          <a:lstStyle/>
-          <a:p>
-            <a:pPr indent="0" marL="0">
-              <a:buNone/>
-            </a:pPr>
-            <a:r>
-              <a:rPr lang="en-US" sz="1200" dirty="0">
-                <a:solidFill>
-                  <a:srgbClr val="3D3D3D"/>
-                </a:solidFill>
-                <a:latin typeface="맑은 고딕" pitchFamily="34" charset="0"/>
-                <a:ea typeface="맑은 고딕" pitchFamily="34" charset="-122"/>
-                <a:cs typeface="맑은 고딕" pitchFamily="34" charset="-120"/>
-              </a:rPr>
-              <a:t>35% 아래를 한 번이라도 밟았고 마지막 날에도 70% 아래면, 떨어진 만큼 그대로 손실입니다.</a:t>
-            </a:r>
-            <a:endParaRPr lang="en-US" sz="1200" dirty="0"/>
-          </a:p>
-        </p:txBody>
-      </p:sp>
-      <p:sp>
-        <p:nvSpPr>
-          <p:cNvPr id="26" name="Shape 24"/>
-          <p:cNvSpPr/>
-          <p:nvPr/>
-        </p:nvSpPr>
-        <p:spPr>
-          <a:xfrm>
-            <a:off x="566928" y="4224528"/>
-            <a:ext cx="2599868" cy="914400"/>
-          </a:xfrm>
-          <a:prstGeom prst="rect">
-            <a:avLst/>
-          </a:prstGeom>
-          <a:solidFill>
-            <a:srgbClr val="F7F8FA"/>
-          </a:solidFill>
-          <a:ln w="12700">
-            <a:solidFill>
-              <a:srgbClr val="CDCECB"/>
-            </a:solidFill>
-            <a:prstDash val="solid"/>
-          </a:ln>
-        </p:spPr>
-      </p:sp>
-      <p:sp>
-        <p:nvSpPr>
-          <p:cNvPr id="27" name="Text 25"/>
-          <p:cNvSpPr/>
-          <p:nvPr/>
-        </p:nvSpPr>
-        <p:spPr>
-          <a:xfrm>
-            <a:off x="713232" y="4325112"/>
-            <a:ext cx="2307260" cy="219456"/>
-          </a:xfrm>
-          <a:prstGeom prst="rect">
-            <a:avLst/>
-          </a:prstGeom>
-          <a:noFill/>
-          <a:ln/>
-        </p:spPr>
-        <p:txBody>
-          <a:bodyPr wrap="square" lIns="0" tIns="0" rIns="0" bIns="0" rtlCol="0" anchor="ctr"/>
-          <a:lstStyle/>
-          <a:p>
-            <a:pPr indent="0" marL="0">
-              <a:buNone/>
-            </a:pPr>
-            <a:r>
-              <a:rPr lang="en-US" sz="1000" dirty="0">
-                <a:solidFill>
-                  <a:srgbClr val="6C6C6C"/>
-                </a:solidFill>
-                <a:latin typeface="맑은 고딕" pitchFamily="34" charset="0"/>
-                <a:ea typeface="맑은 고딕" pitchFamily="34" charset="-122"/>
-                <a:cs typeface="맑은 고딕" pitchFamily="34" charset="-120"/>
-              </a:rPr>
-              <a:t>A. 발행사 20년 백테스트</a:t>
-            </a:r>
-            <a:endParaRPr lang="en-US" sz="1000" dirty="0"/>
-          </a:p>
-        </p:txBody>
-      </p:sp>
-      <p:sp>
-        <p:nvSpPr>
-          <p:cNvPr id="28" name="Text 26"/>
-          <p:cNvSpPr/>
-          <p:nvPr/>
-        </p:nvSpPr>
-        <p:spPr>
-          <a:xfrm>
-            <a:off x="713232" y="4544568"/>
-            <a:ext cx="2307260" cy="292608"/>
-          </a:xfrm>
-          <a:prstGeom prst="rect">
-            <a:avLst/>
-          </a:prstGeom>
-          <a:noFill/>
-          <a:ln/>
-        </p:spPr>
-        <p:txBody>
-          <a:bodyPr wrap="square" lIns="0" tIns="0" rIns="0" bIns="0" rtlCol="0" anchor="ctr"/>
-          <a:lstStyle/>
-          <a:p>
-            <a:pPr indent="0" marL="0">
-              <a:buNone/>
-            </a:pPr>
-            <a:r>
-              <a:rPr lang="en-US" sz="1600" b="1" dirty="0">
-                <a:solidFill>
-                  <a:srgbClr val="1A1A1A"/>
-                </a:solidFill>
-                <a:latin typeface="맑은 고딕" pitchFamily="34" charset="0"/>
-                <a:ea typeface="맑은 고딕" pitchFamily="34" charset="-122"/>
-                <a:cs typeface="맑은 고딕" pitchFamily="34" charset="-120"/>
-              </a:rPr>
-              <a:t>0.53%</a:t>
-            </a:r>
-            <a:endParaRPr lang="en-US" sz="1600" dirty="0"/>
-          </a:p>
-        </p:txBody>
-      </p:sp>
-      <p:sp>
-        <p:nvSpPr>
-          <p:cNvPr id="29" name="Text 27"/>
-          <p:cNvSpPr/>
-          <p:nvPr/>
-        </p:nvSpPr>
-        <p:spPr>
-          <a:xfrm>
-            <a:off x="713232" y="4846320"/>
-            <a:ext cx="2307260" cy="237744"/>
-          </a:xfrm>
-          <a:prstGeom prst="rect">
-            <a:avLst/>
-          </a:prstGeom>
-          <a:noFill/>
-          <a:ln/>
-        </p:spPr>
-        <p:txBody>
-          <a:bodyPr wrap="square" lIns="0" tIns="0" rIns="0" bIns="0" rtlCol="0" anchor="ctr"/>
-          <a:lstStyle/>
-          <a:p>
-            <a:pPr indent="0" marL="0">
-              <a:buNone/>
-            </a:pPr>
-            <a:r>
-              <a:rPr lang="en-US" sz="950" dirty="0">
-                <a:solidFill>
-                  <a:srgbClr val="84888B"/>
-                </a:solidFill>
-                <a:latin typeface="맑은 고딕" pitchFamily="34" charset="0"/>
-                <a:ea typeface="맑은 고딕" pitchFamily="34" charset="-122"/>
-                <a:cs typeface="맑은 고딕" pitchFamily="34" charset="-120"/>
-              </a:rPr>
-              <a:t>5,109번 중 27번</a:t>
-            </a:r>
-            <a:endParaRPr lang="en-US" sz="950" dirty="0"/>
-          </a:p>
-        </p:txBody>
-      </p:sp>
-      <p:sp>
-        <p:nvSpPr>
-          <p:cNvPr id="30" name="Shape 28"/>
-          <p:cNvSpPr/>
-          <p:nvPr/>
-        </p:nvSpPr>
-        <p:spPr>
-          <a:xfrm>
-            <a:off x="3386252" y="4224528"/>
-            <a:ext cx="2599868" cy="914400"/>
-          </a:xfrm>
-          <a:prstGeom prst="rect">
-            <a:avLst/>
-          </a:prstGeom>
-          <a:solidFill>
-            <a:srgbClr val="F7F8FA"/>
-          </a:solidFill>
-          <a:ln w="12700">
-            <a:solidFill>
-              <a:srgbClr val="CDCECB"/>
-            </a:solidFill>
-            <a:prstDash val="solid"/>
-          </a:ln>
-        </p:spPr>
-      </p:sp>
-      <p:sp>
-        <p:nvSpPr>
-          <p:cNvPr id="31" name="Text 29"/>
-          <p:cNvSpPr/>
-          <p:nvPr/>
-        </p:nvSpPr>
-        <p:spPr>
-          <a:xfrm>
-            <a:off x="3532556" y="4325112"/>
-            <a:ext cx="2307260" cy="219456"/>
-          </a:xfrm>
-          <a:prstGeom prst="rect">
-            <a:avLst/>
-          </a:prstGeom>
-          <a:noFill/>
-          <a:ln/>
-        </p:spPr>
-        <p:txBody>
-          <a:bodyPr wrap="square" lIns="0" tIns="0" rIns="0" bIns="0" rtlCol="0" anchor="ctr"/>
-          <a:lstStyle/>
-          <a:p>
-            <a:pPr indent="0" marL="0">
-              <a:buNone/>
-            </a:pPr>
-            <a:r>
-              <a:rPr lang="en-US" sz="1000" dirty="0">
-                <a:solidFill>
-                  <a:srgbClr val="6C6C6C"/>
-                </a:solidFill>
-                <a:latin typeface="맑은 고딕" pitchFamily="34" charset="0"/>
-                <a:ea typeface="맑은 고딕" pitchFamily="34" charset="-122"/>
-                <a:cs typeface="맑은 고딕" pitchFamily="34" charset="-120"/>
-              </a:rPr>
-              <a:t>B. 같은 조건 시뮬레이션 손실</a:t>
-            </a:r>
-            <a:endParaRPr lang="en-US" sz="1000" dirty="0"/>
-          </a:p>
-        </p:txBody>
-      </p:sp>
-      <p:sp>
-        <p:nvSpPr>
-          <p:cNvPr id="32" name="Text 30"/>
-          <p:cNvSpPr/>
-          <p:nvPr/>
-        </p:nvSpPr>
-        <p:spPr>
-          <a:xfrm>
-            <a:off x="3532556" y="4544568"/>
-            <a:ext cx="2307260" cy="292608"/>
-          </a:xfrm>
-          <a:prstGeom prst="rect">
-            <a:avLst/>
-          </a:prstGeom>
-          <a:noFill/>
-          <a:ln/>
-        </p:spPr>
-        <p:txBody>
-          <a:bodyPr wrap="square" lIns="0" tIns="0" rIns="0" bIns="0" rtlCol="0" anchor="ctr"/>
-          <a:lstStyle/>
-          <a:p>
-            <a:pPr indent="0" marL="0">
-              <a:buNone/>
-            </a:pPr>
-            <a:r>
-              <a:rPr lang="en-US" sz="1600" b="1" dirty="0">
-                <a:solidFill>
-                  <a:srgbClr val="1A1A1A"/>
-                </a:solidFill>
-                <a:latin typeface="맑은 고딕" pitchFamily="34" charset="0"/>
-                <a:ea typeface="맑은 고딕" pitchFamily="34" charset="-122"/>
-                <a:cs typeface="맑은 고딕" pitchFamily="34" charset="-120"/>
-              </a:rPr>
-              <a:t>15.9%</a:t>
-            </a:r>
-            <a:endParaRPr lang="en-US" sz="1600" dirty="0"/>
-          </a:p>
-        </p:txBody>
-      </p:sp>
-      <p:sp>
-        <p:nvSpPr>
-          <p:cNvPr id="33" name="Text 31"/>
-          <p:cNvSpPr/>
-          <p:nvPr/>
-        </p:nvSpPr>
-        <p:spPr>
-          <a:xfrm>
-            <a:off x="3532556" y="4846320"/>
-            <a:ext cx="2307260" cy="237744"/>
-          </a:xfrm>
-          <a:prstGeom prst="rect">
-            <a:avLst/>
-          </a:prstGeom>
-          <a:noFill/>
-          <a:ln/>
-        </p:spPr>
-        <p:txBody>
-          <a:bodyPr wrap="square" lIns="0" tIns="0" rIns="0" bIns="0" rtlCol="0" anchor="ctr"/>
-          <a:lstStyle/>
-          <a:p>
-            <a:pPr indent="0" marL="0">
-              <a:buNone/>
-            </a:pPr>
-            <a:r>
-              <a:rPr lang="en-US" sz="950" dirty="0">
-                <a:solidFill>
-                  <a:srgbClr val="84888B"/>
-                </a:solidFill>
-                <a:latin typeface="맑은 고딕" pitchFamily="34" charset="0"/>
-                <a:ea typeface="맑은 고딕" pitchFamily="34" charset="-122"/>
-                <a:cs typeface="맑은 고딕" pitchFamily="34" charset="-120"/>
-              </a:rPr>
-              <a:t>18종 평균 21.6% · 낮은 쪽 8번째</a:t>
-            </a:r>
-            <a:endParaRPr lang="en-US" sz="950" dirty="0"/>
-          </a:p>
-        </p:txBody>
-      </p:sp>
-      <p:sp>
-        <p:nvSpPr>
-          <p:cNvPr id="34" name="Shape 32"/>
-          <p:cNvSpPr/>
-          <p:nvPr/>
-        </p:nvSpPr>
-        <p:spPr>
-          <a:xfrm>
-            <a:off x="6205576" y="4224528"/>
-            <a:ext cx="2599868" cy="914400"/>
-          </a:xfrm>
-          <a:prstGeom prst="rect">
-            <a:avLst/>
-          </a:prstGeom>
-          <a:solidFill>
-            <a:srgbClr val="F7F8FA"/>
-          </a:solidFill>
-          <a:ln w="12700">
-            <a:solidFill>
-              <a:srgbClr val="CDCECB"/>
-            </a:solidFill>
-            <a:prstDash val="solid"/>
-          </a:ln>
-        </p:spPr>
-      </p:sp>
-      <p:sp>
-        <p:nvSpPr>
-          <p:cNvPr id="35" name="Text 33"/>
-          <p:cNvSpPr/>
-          <p:nvPr/>
-        </p:nvSpPr>
-        <p:spPr>
-          <a:xfrm>
-            <a:off x="6351880" y="4325112"/>
-            <a:ext cx="2307260" cy="219456"/>
-          </a:xfrm>
-          <a:prstGeom prst="rect">
-            <a:avLst/>
-          </a:prstGeom>
-          <a:noFill/>
-          <a:ln/>
-        </p:spPr>
-        <p:txBody>
-          <a:bodyPr wrap="square" lIns="0" tIns="0" rIns="0" bIns="0" rtlCol="0" anchor="ctr"/>
-          <a:lstStyle/>
-          <a:p>
-            <a:pPr indent="0" marL="0">
-              <a:buNone/>
-            </a:pPr>
-            <a:r>
-              <a:rPr lang="en-US" sz="1000" dirty="0">
-                <a:solidFill>
-                  <a:srgbClr val="6C6C6C"/>
-                </a:solidFill>
-                <a:latin typeface="맑은 고딕" pitchFamily="34" charset="0"/>
-                <a:ea typeface="맑은 고딕" pitchFamily="34" charset="-122"/>
-                <a:cs typeface="맑은 고딕" pitchFamily="34" charset="-120"/>
-              </a:rPr>
-              <a:t>1만원의 실제 값어치</a:t>
-            </a:r>
-            <a:endParaRPr lang="en-US" sz="1000" dirty="0"/>
-          </a:p>
-        </p:txBody>
-      </p:sp>
-      <p:sp>
-        <p:nvSpPr>
-          <p:cNvPr id="36" name="Text 34"/>
-          <p:cNvSpPr/>
-          <p:nvPr/>
-        </p:nvSpPr>
-        <p:spPr>
-          <a:xfrm>
-            <a:off x="6351880" y="4544568"/>
-            <a:ext cx="2307260" cy="292608"/>
-          </a:xfrm>
-          <a:prstGeom prst="rect">
-            <a:avLst/>
-          </a:prstGeom>
-          <a:noFill/>
-          <a:ln/>
-        </p:spPr>
-        <p:txBody>
-          <a:bodyPr wrap="square" lIns="0" tIns="0" rIns="0" bIns="0" rtlCol="0" anchor="ctr"/>
-          <a:lstStyle/>
-          <a:p>
-            <a:pPr indent="0" marL="0">
-              <a:buNone/>
-            </a:pPr>
-            <a:r>
-              <a:rPr lang="en-US" sz="1600" b="1" dirty="0">
-                <a:solidFill>
-                  <a:srgbClr val="1A1A1A"/>
-                </a:solidFill>
-                <a:latin typeface="맑은 고딕" pitchFamily="34" charset="0"/>
-                <a:ea typeface="맑은 고딕" pitchFamily="34" charset="-122"/>
-                <a:cs typeface="맑은 고딕" pitchFamily="34" charset="-120"/>
-              </a:rPr>
-              <a:t>9,653원</a:t>
-            </a:r>
-            <a:endParaRPr lang="en-US" sz="1600" dirty="0"/>
-          </a:p>
-        </p:txBody>
-      </p:sp>
-      <p:sp>
-        <p:nvSpPr>
-          <p:cNvPr id="37" name="Text 35"/>
-          <p:cNvSpPr/>
-          <p:nvPr/>
-        </p:nvSpPr>
-        <p:spPr>
-          <a:xfrm>
-            <a:off x="6351880" y="4846320"/>
-            <a:ext cx="2307260" cy="237744"/>
-          </a:xfrm>
-          <a:prstGeom prst="rect">
-            <a:avLst/>
-          </a:prstGeom>
-          <a:noFill/>
-          <a:ln/>
-        </p:spPr>
-        <p:txBody>
-          <a:bodyPr wrap="square" lIns="0" tIns="0" rIns="0" bIns="0" rtlCol="0" anchor="ctr"/>
-          <a:lstStyle/>
-          <a:p>
-            <a:pPr indent="0" marL="0">
-              <a:buNone/>
-            </a:pPr>
-            <a:r>
-              <a:rPr lang="en-US" sz="950" dirty="0">
-                <a:solidFill>
-                  <a:srgbClr val="84888B"/>
-                </a:solidFill>
-                <a:latin typeface="맑은 고딕" pitchFamily="34" charset="0"/>
-                <a:ea typeface="맑은 고딕" pitchFamily="34" charset="-122"/>
-                <a:cs typeface="맑은 고딕" pitchFamily="34" charset="-120"/>
-              </a:rPr>
-              <a:t>제값보다 -3.47%</a:t>
-            </a:r>
-            <a:endParaRPr lang="en-US" sz="950" dirty="0"/>
-          </a:p>
-        </p:txBody>
-      </p:sp>
-      <p:sp>
-        <p:nvSpPr>
-          <p:cNvPr id="38" name="Shape 36"/>
-          <p:cNvSpPr/>
-          <p:nvPr/>
-        </p:nvSpPr>
-        <p:spPr>
-          <a:xfrm>
-            <a:off x="9024899" y="4224528"/>
-            <a:ext cx="2599868" cy="914400"/>
-          </a:xfrm>
-          <a:prstGeom prst="rect">
-            <a:avLst/>
-          </a:prstGeom>
-          <a:solidFill>
-            <a:srgbClr val="F7F8FA"/>
-          </a:solidFill>
-          <a:ln w="12700">
-            <a:solidFill>
-              <a:srgbClr val="CDCECB"/>
-            </a:solidFill>
-            <a:prstDash val="solid"/>
-          </a:ln>
-        </p:spPr>
-      </p:sp>
-      <p:sp>
-        <p:nvSpPr>
-          <p:cNvPr id="39" name="Text 37"/>
-          <p:cNvSpPr/>
-          <p:nvPr/>
-        </p:nvSpPr>
-        <p:spPr>
-          <a:xfrm>
-            <a:off x="9171203" y="4325112"/>
-            <a:ext cx="2307260" cy="219456"/>
-          </a:xfrm>
-          <a:prstGeom prst="rect">
-            <a:avLst/>
-          </a:prstGeom>
-          <a:noFill/>
-          <a:ln/>
-        </p:spPr>
-        <p:txBody>
-          <a:bodyPr wrap="square" lIns="0" tIns="0" rIns="0" bIns="0" rtlCol="0" anchor="ctr"/>
-          <a:lstStyle/>
-          <a:p>
-            <a:pPr indent="0" marL="0">
-              <a:buNone/>
-            </a:pPr>
-            <a:r>
-              <a:rPr lang="en-US" sz="1000" dirty="0">
-                <a:solidFill>
-                  <a:srgbClr val="6C6C6C"/>
-                </a:solidFill>
-                <a:latin typeface="맑은 고딕" pitchFamily="34" charset="0"/>
-                <a:ea typeface="맑은 고딕" pitchFamily="34" charset="-122"/>
-                <a:cs typeface="맑은 고딕" pitchFamily="34" charset="-120"/>
-              </a:rPr>
-              <a:t>가격 출렁임</a:t>
-            </a:r>
-            <a:endParaRPr lang="en-US" sz="1000" dirty="0"/>
-          </a:p>
-        </p:txBody>
-      </p:sp>
-      <p:sp>
-        <p:nvSpPr>
-          <p:cNvPr id="40" name="Text 38"/>
-          <p:cNvSpPr/>
-          <p:nvPr/>
-        </p:nvSpPr>
-        <p:spPr>
-          <a:xfrm>
-            <a:off x="9171203" y="4544568"/>
-            <a:ext cx="2307260" cy="292608"/>
-          </a:xfrm>
-          <a:prstGeom prst="rect">
-            <a:avLst/>
-          </a:prstGeom>
-          <a:noFill/>
-          <a:ln/>
-        </p:spPr>
-        <p:txBody>
-          <a:bodyPr wrap="square" lIns="0" tIns="0" rIns="0" bIns="0" rtlCol="0" anchor="ctr"/>
-          <a:lstStyle/>
-          <a:p>
-            <a:pPr indent="0" marL="0">
-              <a:buNone/>
-            </a:pPr>
-            <a:r>
-              <a:rPr lang="en-US" sz="1600" b="1" dirty="0">
-                <a:solidFill>
-                  <a:srgbClr val="1A1A1A"/>
-                </a:solidFill>
-                <a:latin typeface="맑은 고딕" pitchFamily="34" charset="0"/>
-                <a:ea typeface="맑은 고딕" pitchFamily="34" charset="-122"/>
-                <a:cs typeface="맑은 고딕" pitchFamily="34" charset="-120"/>
-              </a:rPr>
-              <a:t>56.2%</a:t>
-            </a:r>
-            <a:endParaRPr lang="en-US" sz="1600" dirty="0"/>
-          </a:p>
-        </p:txBody>
-      </p:sp>
-      <p:sp>
-        <p:nvSpPr>
-          <p:cNvPr id="41" name="Text 39"/>
-          <p:cNvSpPr/>
-          <p:nvPr/>
-        </p:nvSpPr>
-        <p:spPr>
-          <a:xfrm>
-            <a:off x="9171203" y="4846320"/>
-            <a:ext cx="2307260" cy="237744"/>
-          </a:xfrm>
-          <a:prstGeom prst="rect">
-            <a:avLst/>
-          </a:prstGeom>
-          <a:noFill/>
-          <a:ln/>
-        </p:spPr>
-        <p:txBody>
-          <a:bodyPr wrap="square" lIns="0" tIns="0" rIns="0" bIns="0" rtlCol="0" anchor="ctr"/>
-          <a:lstStyle/>
-          <a:p>
-            <a:pPr indent="0" marL="0">
-              <a:buNone/>
-            </a:pPr>
-            <a:r>
-              <a:rPr lang="en-US" sz="950" dirty="0">
-                <a:solidFill>
-                  <a:srgbClr val="84888B"/>
-                </a:solidFill>
-                <a:latin typeface="맑은 고딕" pitchFamily="34" charset="0"/>
-                <a:ea typeface="맑은 고딕" pitchFamily="34" charset="-122"/>
-                <a:cs typeface="맑은 고딕" pitchFamily="34" charset="-120"/>
-              </a:rPr>
-              <a:t>둘이 같이 움직임 0.87</a:t>
-            </a:r>
-            <a:endParaRPr lang="en-US" sz="950" dirty="0"/>
-          </a:p>
-        </p:txBody>
-      </p:sp>
-      <p:sp>
-        <p:nvSpPr>
-          <p:cNvPr id="42" name="Shape 40"/>
-          <p:cNvSpPr/>
-          <p:nvPr/>
-        </p:nvSpPr>
-        <p:spPr>
-          <a:xfrm>
-            <a:off x="566928" y="5321808"/>
-            <a:ext cx="11057839" cy="512064"/>
-          </a:xfrm>
-          <a:prstGeom prst="rect">
-            <a:avLst/>
-          </a:prstGeom>
-          <a:solidFill>
-            <a:srgbClr val="ECEFF4"/>
-          </a:solidFill>
-          <a:ln w="12700">
-            <a:solidFill>
-              <a:srgbClr val="333333"/>
-            </a:solidFill>
-            <a:prstDash val="solid"/>
-          </a:ln>
-        </p:spPr>
-      </p:sp>
-      <p:sp>
-        <p:nvSpPr>
-          <p:cNvPr id="43" name="Text 41"/>
-          <p:cNvSpPr/>
-          <p:nvPr/>
-        </p:nvSpPr>
-        <p:spPr>
-          <a:xfrm>
-            <a:off x="749808" y="5321808"/>
-            <a:ext cx="10692079" cy="512064"/>
-          </a:xfrm>
-          <a:prstGeom prst="rect">
-            <a:avLst/>
-          </a:prstGeom>
-          <a:noFill/>
-          <a:ln/>
-        </p:spPr>
-        <p:txBody>
-          <a:bodyPr wrap="square" lIns="0" tIns="0" rIns="0" bIns="0" rtlCol="0" anchor="ctr"/>
-          <a:lstStyle/>
-          <a:p>
-            <a:pPr indent="0" marL="0">
-              <a:buNone/>
-            </a:pPr>
-            <a:r>
-              <a:rPr lang="en-US" sz="1150" b="1" dirty="0">
-                <a:solidFill>
-                  <a:srgbClr val="1A1A1A"/>
-                </a:solidFill>
-                <a:latin typeface="맑은 고딕" pitchFamily="34" charset="0"/>
-                <a:ea typeface="맑은 고딕" pitchFamily="34" charset="-122"/>
-                <a:cs typeface="맑은 고딕" pitchFamily="34" charset="-120"/>
-              </a:rPr>
-              <a:t>이 상품을 권하는 이유  </a:t>
-            </a:r>
-            <a:pPr indent="0" marL="0">
-              <a:buNone/>
-            </a:pPr>
-            <a:r>
-              <a:rPr lang="en-US" sz="1150" dirty="0">
-                <a:solidFill>
-                  <a:srgbClr val="3D3D3D"/>
-                </a:solidFill>
-                <a:latin typeface="맑은 고딕" pitchFamily="34" charset="0"/>
-                <a:ea typeface="맑은 고딕" pitchFamily="34" charset="-122"/>
-                <a:cs typeface="맑은 고딕" pitchFamily="34" charset="-120"/>
-              </a:rPr>
-              <a:t>지는 위험 1%당 받는 수익률이 이번 회차에서 가장 큽니다 — 같은 위험이면 여기가 제일 많이 줍니다.</a:t>
             </a:r>
             <a:endParaRPr lang="en-US" sz="1150" dirty="0"/>
           </a:p>

--- a/els-analysis-deck.pptx
+++ b/els-analysis-deck.pptx
@@ -6509,7 +6509,7 @@
                 <a:ea typeface="맑은 고딕" pitchFamily="34" charset="-122"/>
                 <a:cs typeface="맑은 고딕" pitchFamily="34" charset="-120"/>
               </a:rPr>
-              <a:t>홈페이지 확인 2026.09.29(화) 07:55 — 현재 청약 진행중 20건.  개인 일반투자자 청약 마감은 10월 1일(목)입니다.</a:t>
+              <a:t>홈페이지 확인 2026.09.29(화) 08:59 — 현재 청약 진행중 20건.  개인 일반투자자 청약 마감은 10월 1일(목)입니다.</a:t>
             </a:r>
             <a:endParaRPr lang="en-US" sz="1200" dirty="0"/>
           </a:p>

--- a/els-analysis-deck.pptx
+++ b/els-analysis-deck.pptx
@@ -5279,7 +5279,7 @@
                 <a:ea typeface="맑은 고딕" pitchFamily="34" charset="-122"/>
                 <a:cs typeface="맑은 고딕" pitchFamily="34" charset="-120"/>
               </a:rPr>
-              <a:t>홈페이지 확인 2026.10.13(화) 12:26 — 현재 청약 진행중 34건.  개인 일반투자자 청약 마감은 10월 16일(금)입니다.</a:t>
+              <a:t>홈페이지 확인 2026.10.13(화) 12:37 — 현재 청약 진행중 34건.  개인 일반투자자 청약 마감은 10월 16일(금)입니다.</a:t>
             </a:r>
             <a:endParaRPr lang="en-US" sz="1200" dirty="0"/>
           </a:p>
@@ -6827,7 +6827,7 @@
                 <a:ea typeface="맑은 고딕" pitchFamily="34" charset="-122"/>
                 <a:cs typeface="맑은 고딕" pitchFamily="34" charset="-120"/>
               </a:rPr>
-              <a:t>지는 위험 1%당 받는 수익률이 이번 회차에서 가장 큽니다 — 같은 위험이면 여기가 제일 많이 줍니다.</a:t>
+              <a:t>지는 위험 1%당 받는 수익률이 앞 자리에 오른 제38194회 다음으로 큽니다 — 같은 위험이면 그만큼 많이 줍니다.</a:t>
             </a:r>
             <a:endParaRPr lang="en-US" sz="1150" dirty="0"/>
           </a:p>
@@ -8414,7 +8414,7 @@
                 <a:ea typeface="맑은 고딕" pitchFamily="34" charset="-122"/>
                 <a:cs typeface="맑은 고딕" pitchFamily="34" charset="-120"/>
               </a:rPr>
-              <a:t>넣는 순간의 값어치가 크게 깎이지 않은 상품 중에서 골랐습니다. 이보다 높은 제38195회(연 13%)는 바로 위 자리에 이미 올라 있어, 그다음으로 높은 수익률입니다.</a:t>
+              <a:t>넣는 순간의 값어치가 크게 깎이지 않은 상품 중에서 골랐습니다. 이보다 높은 제38195회(연 13%)·제38194회(연 12%)는 앞 자리에 이미 올라 있어, 그다음으로 높은 수익률입니다.</a:t>
             </a:r>
             <a:endParaRPr lang="en-US" sz="1150" dirty="0"/>
           </a:p>
@@ -32323,7 +32323,7 @@
                 <a:ea typeface="맑은 고딕" pitchFamily="34" charset="-122"/>
                 <a:cs typeface="맑은 고딕" pitchFamily="34" charset="-120"/>
               </a:rPr>
-              <a:t>그런데 상품 하나하나로 내려가면 뒤집힙니다. 지수만 담은 제38193회가 18.6%로 종목 섞인 상품 대부분보다 위험하고, 제38194회는 11.3%로 13종 중 1번째로 낮습니다.</a:t>
+              <a:t>그런데 상품 하나하나로 내려가면 뒤집힙니다. 지수만 담은 제38193회가 18.6%로 종목 섞인 제38194·38195·38196회보다 위험하고, 제38194회는 11.3%로 13종 중 가장 낮습니다.</a:t>
             </a:r>
             <a:endParaRPr lang="en-US" sz="1250" dirty="0"/>
           </a:p>
@@ -33864,7 +33864,7 @@
                 <a:ea typeface="맑은 고딕" pitchFamily="34" charset="-122"/>
                 <a:cs typeface="맑은 고딕" pitchFamily="34" charset="-120"/>
               </a:rPr>
-              <a:t>수익률 1%p당 손실 확률 +-0.19%p — 방향은 맞지만 상품마다 그 몇 배씩 들쭉날쭉합니다</a:t>
+              <a:t>값어치 멀쩡한 6종만 보면 수익률을 1%p 더 받는 상품의 손실 확률이 평균 0.19%p 오히려 낮게 나옵니다 — 수익률로는 위험을 가늠할 수 없습니다</a:t>
             </a:r>
             <a:endParaRPr lang="en-US" sz="1000" dirty="0"/>
           </a:p>
@@ -35552,7 +35552,7 @@
                 <a:ea typeface="맑은 고딕" pitchFamily="34" charset="-122"/>
                 <a:cs typeface="맑은 고딕" pitchFamily="34" charset="-120"/>
               </a:rPr>
-              <a:t>제38202회는 연 23.5%인데 손실 확률이 57.6%나 됩니다 — 손실 확률 1%당 0.41%로 이번 회차 꼴찌입니다. 넣는 순간의 값어치가 제값보다 37.1%나 깎여 있기 때문입니다.</a:t>
+              <a:t>제38202회는 연 23.5%인데 손실 확률이 57.6%나 됩니다 — 손실 확률 1%당 0.41%뿐입니다. 넣는 순간의 값어치가 제값보다 37.1%나 깎여 있기 때문입니다.</a:t>
             </a:r>
             <a:endParaRPr lang="en-US" sz="1000" dirty="0"/>
           </a:p>
@@ -37118,7 +37118,7 @@
                 <a:ea typeface="맑은 고딕" pitchFamily="34" charset="-122"/>
                 <a:cs typeface="맑은 고딕" pitchFamily="34" charset="-120"/>
               </a:rPr>
-              <a:t>같이 움직이는 정도를 0.50까지 억지로 낮춰도 손실 확률은 11.4% → 14.8% 오르는 데 그치고, 손실 확률 1%당 수익률은 0.81%로 여전히 이번 회차 1등입니다. 두 기초자산의 변동성이 8.6%p나 벌어져 있어서, 같이 움직이든 말든 "더 나쁜 쪽"이 거의 항상 같은 자산이기 때문입니다. 변동성이 비슷한 짝이었다면 이렇게 버티지 못합니다.</a:t>
+              <a:t>같이 움직이는 정도를 0.50까지 낮추면 손실 확률은 11.4% → 14.8%로 오르고, 손실 확률 1%당 수익률은 0.81%로 내려가 제38195회에 1등을 내줍니다. 이 상품의 우위는 두 자산이 서류값 0.88만큼 같이 움직인다는 전제에 기대고 있습니다.</a:t>
             </a:r>
             <a:endParaRPr lang="en-US" sz="1000" dirty="0"/>
           </a:p>

--- a/els-analysis-deck.pptx
+++ b/els-analysis-deck.pptx
@@ -5279,7 +5279,7 @@
                 <a:ea typeface="맑은 고딕" pitchFamily="34" charset="-122"/>
                 <a:cs typeface="맑은 고딕" pitchFamily="34" charset="-120"/>
               </a:rPr>
-              <a:t>홈페이지 확인 2026.10.13(화) 12:37 — 현재 청약 진행중 34건.  개인 일반투자자 청약 마감은 10월 16일(금)입니다.</a:t>
+              <a:t>홈페이지 확인 2026.10.13(화) 13:04 — 현재 청약 진행중 34건.  개인 일반투자자 청약 마감은 10월 16일(금)입니다.</a:t>
             </a:r>
             <a:endParaRPr lang="en-US" sz="1200" dirty="0"/>
           </a:p>
@@ -23200,7 +23200,7 @@
                 <a:ea typeface="맑은 고딕" pitchFamily="34" charset="-122"/>
                 <a:cs typeface="맑은 고딕" pitchFamily="34" charset="-120"/>
               </a:rPr>
-              <a:t>"이 상품은 최장 36개월짜리인데, 6개월마다 끝날 기회가 옵니다. 지금까지는 대부분 첫 번째에 끝났습니다."</a:t>
+              <a:t>"이 상품은 최장 36개월짜리인데, 6개월마다 끝날 기회가 옵니다. 컴퓨터로 같은 조건을 돌려보면 79%가 첫 번째에 끝났습니다."</a:t>
             </a:r>
             <a:endParaRPr lang="en-US" sz="1250" dirty="0"/>
           </a:p>
@@ -33691,8 +33691,8 @@
         </p:nvSpPr>
         <p:spPr>
           <a:xfrm>
-            <a:off x="768096" y="4279392"/>
-            <a:ext cx="3100730" cy="402336"/>
+            <a:off x="768096" y="4261104"/>
+            <a:ext cx="3100730" cy="438912"/>
           </a:xfrm>
           <a:prstGeom prst="rect">
             <a:avLst/>
@@ -33706,12 +33706,12 @@
           <a:p>
             <a:pPr indent="0" marL="0">
               <a:lnSpc>
-                <a:spcPts val="1300"/>
+                <a:spcPts val="1200"/>
               </a:lnSpc>
               <a:buNone/>
             </a:pPr>
             <a:r>
-              <a:rPr lang="en-US" sz="1000" dirty="0">
+              <a:rPr lang="en-US" sz="950" dirty="0">
                 <a:solidFill>
                   <a:srgbClr val="3D3D3D"/>
                 </a:solidFill>
@@ -33721,7 +33721,7 @@
               </a:rPr>
               <a:t>13종으로 만들 수 있는 78짝 중 60짝에서 "수익률 높은 쪽이 손실 확률도 높다"가 맞았습니다</a:t>
             </a:r>
-            <a:endParaRPr lang="en-US" sz="1000" dirty="0"/>
+            <a:endParaRPr lang="en-US" sz="950" dirty="0"/>
           </a:p>
         </p:txBody>
       </p:sp>
@@ -33836,8 +33836,8 @@
         </p:nvSpPr>
         <p:spPr>
           <a:xfrm>
-            <a:off x="4545482" y="4279392"/>
-            <a:ext cx="3100730" cy="402336"/>
+            <a:off x="4545482" y="4261104"/>
+            <a:ext cx="3100730" cy="438912"/>
           </a:xfrm>
           <a:prstGeom prst="rect">
             <a:avLst/>
@@ -33851,12 +33851,12 @@
           <a:p>
             <a:pPr indent="0" marL="0">
               <a:lnSpc>
-                <a:spcPts val="1300"/>
+                <a:spcPts val="1200"/>
               </a:lnSpc>
               <a:buNone/>
             </a:pPr>
             <a:r>
-              <a:rPr lang="en-US" sz="1000" dirty="0">
+              <a:rPr lang="en-US" sz="950" dirty="0">
                 <a:solidFill>
                   <a:srgbClr val="3D3D3D"/>
                 </a:solidFill>
@@ -33864,9 +33864,9 @@
                 <a:ea typeface="맑은 고딕" pitchFamily="34" charset="-122"/>
                 <a:cs typeface="맑은 고딕" pitchFamily="34" charset="-120"/>
               </a:rPr>
-              <a:t>값어치 멀쩡한 6종만 보면 수익률을 1%p 더 받는 상품의 손실 확률이 평균 0.19%p 오히려 낮게 나옵니다 — 수익률로는 위험을 가늠할 수 없습니다</a:t>
+              <a:t>값어치 멀쩡한 6종만 보면 수익률이 1%p 높을수록 손실 확률은 평균 0.19%p 오히려 낮습니다 — 수익률로 위험을 가늠할 수 없습니다</a:t>
             </a:r>
-            <a:endParaRPr lang="en-US" sz="1000" dirty="0"/>
+            <a:endParaRPr lang="en-US" sz="950" dirty="0"/>
           </a:p>
         </p:txBody>
       </p:sp>
@@ -33981,8 +33981,8 @@
         </p:nvSpPr>
         <p:spPr>
           <a:xfrm>
-            <a:off x="8322869" y="4279392"/>
-            <a:ext cx="3100730" cy="402336"/>
+            <a:off x="8322869" y="4261104"/>
+            <a:ext cx="3100730" cy="438912"/>
           </a:xfrm>
           <a:prstGeom prst="rect">
             <a:avLst/>
@@ -33996,12 +33996,12 @@
           <a:p>
             <a:pPr indent="0" marL="0">
               <a:lnSpc>
-                <a:spcPts val="1300"/>
+                <a:spcPts val="1200"/>
               </a:lnSpc>
               <a:buNone/>
             </a:pPr>
             <a:r>
-              <a:rPr lang="en-US" sz="1000" dirty="0">
+              <a:rPr lang="en-US" sz="950" dirty="0">
                 <a:solidFill>
                   <a:srgbClr val="3D3D3D"/>
                 </a:solidFill>
@@ -34011,7 +34011,7 @@
               </a:rPr>
               <a:t>0.31%(제38200회) ~ 1.06%(제38194회). 정확히 비례한다면 전부 같아야 합니다</a:t>
             </a:r>
-            <a:endParaRPr lang="en-US" sz="1000" dirty="0"/>
+            <a:endParaRPr lang="en-US" sz="950" dirty="0"/>
           </a:p>
         </p:txBody>
       </p:sp>
@@ -37091,7 +37091,7 @@
         <p:spPr>
           <a:xfrm>
             <a:off x="566928" y="4919472"/>
-            <a:ext cx="11057839" cy="566928"/>
+            <a:ext cx="11057839" cy="603504"/>
           </a:xfrm>
           <a:prstGeom prst="rect">
             <a:avLst/>
@@ -37118,7 +37118,7 @@
                 <a:ea typeface="맑은 고딕" pitchFamily="34" charset="-122"/>
                 <a:cs typeface="맑은 고딕" pitchFamily="34" charset="-120"/>
               </a:rPr>
-              <a:t>같이 움직이는 정도를 0.50까지 낮추면 손실 확률은 11.4% → 14.8%로 오르고, 손실 확률 1%당 수익률은 0.81%로 내려가 제38195회에 1등을 내줍니다. 이 상품의 우위는 두 자산이 서류값 0.88만큼 같이 움직인다는 전제에 기대고 있습니다.</a:t>
+              <a:t>같이 움직이는 정도를 0.80까지만 낮춰도 손실 확률 1%당 수익률이 0.97%로 제38195회(1.04%)보다 낮아져 1등을 내줍니다(0.50이면 손실 확률 11.4% → 14.8%). 이 상품의 우위는 두 자산이 서류값 0.88만큼 같이 움직인다는 전제에 기대고 있습니다. 서류값 칸은 따로 다시 돌린 값이라 앞 숫자(1.06%)와 끝자리가 조금 다릅니다.</a:t>
             </a:r>
             <a:endParaRPr lang="en-US" sz="1000" dirty="0"/>
           </a:p>

--- a/els-analysis-deck.pptx
+++ b/els-analysis-deck.pptx
@@ -5279,7 +5279,7 @@
                 <a:ea typeface="맑은 고딕" pitchFamily="34" charset="-122"/>
                 <a:cs typeface="맑은 고딕" pitchFamily="34" charset="-120"/>
               </a:rPr>
-              <a:t>홈페이지 확인 2026.10.13(화) 13:04 — 현재 청약 진행중 34건.  개인 일반투자자 청약 마감은 10월 16일(금)입니다.</a:t>
+              <a:t>홈페이지 확인 2026.10.13(화) 13:08 — 현재 청약 진행중 34건.  개인 일반투자자 청약 마감은 10월 16일(금)입니다.</a:t>
             </a:r>
             <a:endParaRPr lang="en-US" sz="1200" dirty="0"/>
           </a:p>
@@ -34427,7 +34427,7 @@
                 <a:ea typeface="맑은 고딕" pitchFamily="34" charset="-122"/>
                 <a:cs typeface="맑은 고딕" pitchFamily="34" charset="-120"/>
               </a:rPr>
-              <a:t>13종을 손실 확률(B)과 연 수익률로 찍었습니다. 왼쪽 위가 적은 위험에 많이 받는 자리, 오른쪽 아래가 위험만 큰 자리입니다. 점 위에 마우스를 올리면 회차와 기초자산이 뜹니다.</a:t>
+              <a:t>13종을 손실 확률(B)과 연 수익률로 찍었습니다. 왼쪽 위가 적은 위험에 많이 받는 자리, 오른쪽 아래가 위험만 큰 자리입니다. PPT 파일에서는 점에 마우스를 올리면 회차와 기초자산이 뜹니다.</a:t>
             </a:r>
             <a:endParaRPr lang="en-US" sz="1250" dirty="0"/>
           </a:p>

--- a/els-analysis-deck.pptx
+++ b/els-analysis-deck.pptx
@@ -5051,7 +5051,7 @@
           <a:p>
             <a:r>
               <a:rPr lang="en-US" dirty="0"/>
-              <a:t>마감일을 잘못 안내하면 고객이 청약 기회를 놓칩니다. 홈페이지의 2026.10.28이 아니라 10월 23일(금)이 개인 일반투자자의 마감입니다.</a:t>
+              <a:t>마감일을 잘못 안내하면 고객이 청약 기회를 놓칩니다. 홈페이지의 2026.10.28이 아니라 10월 23일(금)이 개인 일반투자자의 마감입니다. 단, 제38222·38223회는 별도 공시(청약 2026.10.15~2026.10.22)라 개인 일반투자자 마감이 10월 19일(월)로 이미 지났습니다.</a:t>
             </a:r>
             <a:endParaRPr lang="en-US" dirty="0"/>
           </a:p>
@@ -6441,7 +6441,46 @@
       </p:sp>
       <p:sp>
         <p:nvSpPr>
-          <p:cNvPr id="12" name="Shape 10"/>
+          <p:cNvPr id="12" name="Text 10"/>
+          <p:cNvSpPr/>
+          <p:nvPr/>
+        </p:nvSpPr>
+        <p:spPr>
+          <a:xfrm>
+            <a:off x="7955280" y="4242816"/>
+            <a:ext cx="3657600" cy="457200"/>
+          </a:xfrm>
+          <a:prstGeom prst="rect">
+            <a:avLst/>
+          </a:prstGeom>
+          <a:noFill/>
+          <a:ln/>
+        </p:spPr>
+        <p:txBody>
+          <a:bodyPr wrap="square" lIns="0" tIns="0" rIns="0" bIns="0" rtlCol="0" anchor="t"/>
+          <a:lstStyle/>
+          <a:p>
+            <a:pPr indent="0" marL="0">
+              <a:buNone/>
+            </a:pPr>
+            <a:r>
+              <a:rPr lang="en-US" sz="1000" b="1" dirty="0">
+                <a:solidFill>
+                  <a:srgbClr val="FFFFFF"/>
+                </a:solidFill>
+                <a:latin typeface="맑은 고딕" pitchFamily="34" charset="0"/>
+                <a:ea typeface="맑은 고딕" pitchFamily="34" charset="-122"/>
+                <a:cs typeface="맑은 고딕" pitchFamily="34" charset="-120"/>
+              </a:rPr>
+              <a:t>제38222·38223회는 별도 공시 — 개인 마감 2026.10.19(지남), 전체 2026.10.15~2026.10.22</a:t>
+            </a:r>
+            <a:endParaRPr lang="en-US" sz="1000" dirty="0"/>
+          </a:p>
+        </p:txBody>
+      </p:sp>
+      <p:sp>
+        <p:nvSpPr>
+          <p:cNvPr id="13" name="Shape 11"/>
           <p:cNvSpPr/>
           <p:nvPr/>
         </p:nvSpPr>
@@ -6466,7 +6505,7 @@
       </p:sp>
       <p:sp>
         <p:nvSpPr>
-          <p:cNvPr id="13" name="Text 11"/>
+          <p:cNvPr id="14" name="Text 12"/>
           <p:cNvSpPr/>
           <p:nvPr/>
         </p:nvSpPr>
@@ -6505,7 +6544,7 @@
       </p:sp>
       <p:sp>
         <p:nvSpPr>
-          <p:cNvPr id="14" name="Text 12"/>
+          <p:cNvPr id="15" name="Text 13"/>
           <p:cNvSpPr/>
           <p:nvPr/>
         </p:nvSpPr>
@@ -6590,7 +6629,7 @@
       </p:sp>
       <p:sp>
         <p:nvSpPr>
-          <p:cNvPr id="15" name="Text 13"/>
+          <p:cNvPr id="16" name="Text 14"/>
           <p:cNvSpPr/>
           <p:nvPr/>
         </p:nvSpPr>
@@ -6675,7 +6714,7 @@
       </p:sp>
       <p:sp>
         <p:nvSpPr>
-          <p:cNvPr id="16" name="Text 14"/>
+          <p:cNvPr id="17" name="Text 15"/>
           <p:cNvSpPr/>
           <p:nvPr/>
         </p:nvSpPr>
@@ -6760,7 +6799,7 @@
       </p:sp>
       <p:sp>
         <p:nvSpPr>
-          <p:cNvPr id="17" name="Text 15"/>
+          <p:cNvPr id="18" name="Text 16"/>
           <p:cNvSpPr/>
           <p:nvPr/>
         </p:nvSpPr>
@@ -6791,7 +6830,7 @@
                 <a:ea typeface="맑은 고딕" pitchFamily="34" charset="-122"/>
                 <a:cs typeface="맑은 고딕" pitchFamily="34" charset="-120"/>
               </a:rPr>
-              <a:t>홈페이지 확인 2026.10.19(월) 15:04 — 현재 청약 진행중 34건.  개인 일반투자자 청약 마감은 10월 23일(금)입니다.</a:t>
+              <a:t>홈페이지 확인 2026.10.20(화) 11:12 — 현재 청약 진행중 34건.  개인 일반투자자 청약 마감은 10월 23일(금)입니다.</a:t>
             </a:r>
             <a:endParaRPr lang="en-US" sz="1200" dirty="0"/>
           </a:p>
@@ -6799,7 +6838,7 @@
       </p:sp>
       <p:sp>
         <p:nvSpPr>
-          <p:cNvPr id="18" name="Text 16"/>
+          <p:cNvPr id="19" name="Text 17"/>
           <p:cNvSpPr/>
           <p:nvPr/>
         </p:nvSpPr>
@@ -8261,7 +8300,7 @@
                 <a:ea typeface="맑은 고딕" pitchFamily="34" charset="-122"/>
                 <a:cs typeface="맑은 고딕" pitchFamily="34" charset="-120"/>
               </a:rPr>
-              <a:t>둘이 같이 움직임 0.22</a:t>
+              <a:t>가장 따로 노는 쌍 0.22</a:t>
             </a:r>
             <a:endParaRPr lang="en-US" sz="950" dirty="0"/>
           </a:p>
@@ -8378,7 +8417,7 @@
                 <a:ea typeface="맑은 고딕" pitchFamily="34" charset="-122"/>
                 <a:cs typeface="맑은 고딕" pitchFamily="34" charset="-120"/>
               </a:rPr>
-              <a:t>출처 — 금융감독원 전자공시시스템(DART)에 2026.10.16 올라온 투자설명서 (접수번호 20261016000319)  ·  원금을 잃을 수 있는 상품입니다</a:t>
+              <a:t>출처 — 금융감독원 전자공시시스템(DART)에 2026.10.16·2026.10.14 올라온 투자설명서 (접수번호 20261016000319 · 20261014000084)  ·  원금을 잃을 수 있는 상품입니다</a:t>
             </a:r>
             <a:endParaRPr lang="en-US" sz="850" dirty="0"/>
           </a:p>
@@ -9848,7 +9887,7 @@
                 <a:ea typeface="맑은 고딕" pitchFamily="34" charset="-122"/>
                 <a:cs typeface="맑은 고딕" pitchFamily="34" charset="-120"/>
               </a:rPr>
-              <a:t>둘이 같이 움직임 0.17</a:t>
+              <a:t>가장 따로 노는 쌍 0.17</a:t>
             </a:r>
             <a:endParaRPr lang="en-US" sz="950" dirty="0"/>
           </a:p>
@@ -9965,7 +10004,7 @@
                 <a:ea typeface="맑은 고딕" pitchFamily="34" charset="-122"/>
                 <a:cs typeface="맑은 고딕" pitchFamily="34" charset="-120"/>
               </a:rPr>
-              <a:t>출처 — 금융감독원 전자공시시스템(DART)에 2026.10.16 올라온 투자설명서 (접수번호 20261016000319)  ·  원금을 잃을 수 있는 상품입니다</a:t>
+              <a:t>출처 — 금융감독원 전자공시시스템(DART)에 2026.10.16·2026.10.14 올라온 투자설명서 (접수번호 20261016000319 · 20261014000084)  ·  원금을 잃을 수 있는 상품입니다</a:t>
             </a:r>
             <a:endParaRPr lang="en-US" sz="850" dirty="0"/>
           </a:p>
@@ -27290,7 +27329,7 @@
                 <a:ea typeface="맑은 고딕" pitchFamily="34" charset="-122"/>
                 <a:cs typeface="맑은 고딕" pitchFamily="34" charset="-120"/>
               </a:rPr>
-              <a:t>출처 — 금융감독원 전자공시시스템(DART)에 2026.10.16 올라온 투자설명서 (접수번호 20261016000319)  ·  원금을 잃을 수 있는 상품입니다</a:t>
+              <a:t>출처 — 금융감독원 전자공시시스템(DART)에 2026.10.16·2026.10.14 올라온 투자설명서 (접수번호 20261016000319 · 20261014000084)  ·  원금을 잃을 수 있는 상품입니다</a:t>
             </a:r>
             <a:endParaRPr lang="en-US" sz="850" dirty="0"/>
           </a:p>
@@ -28520,7 +28559,7 @@
                 <a:ea typeface="맑은 고딕" pitchFamily="34" charset="-122"/>
                 <a:cs typeface="맑은 고딕" pitchFamily="34" charset="-120"/>
               </a:rPr>
-              <a:t>출처 — 금융감독원 전자공시시스템(DART)에 2026.10.16 올라온 투자설명서 (접수번호 20261016000319)  ·  원금을 잃을 수 있는 상품입니다</a:t>
+              <a:t>출처 — 금융감독원 전자공시시스템(DART)에 2026.10.16·2026.10.14 올라온 투자설명서 (접수번호 20261016000319 · 20261014000084)  ·  원금을 잃을 수 있는 상품입니다</a:t>
             </a:r>
             <a:endParaRPr lang="en-US" sz="850" dirty="0"/>
           </a:p>
@@ -28835,7 +28874,7 @@
                 <a:ea typeface="맑은 고딕" pitchFamily="34" charset="-122"/>
                 <a:cs typeface="맑은 고딕" pitchFamily="34" charset="-120"/>
               </a:rPr>
-              <a:t>홈페이지에는 2026.10.19~2026.10.28로 나오지만 개인 일반투자자는 10월 23일(금)까지만 청약할 수 있습니다. 이후는 숙려·가입의사확인 기간이라 주문을 받을 수 없습니다.</a:t>
+              <a:t>홈페이지에는 2026.10.19~2026.10.28로 나오지만 개인 일반투자자는 10월 23일(금)까지만 청약할 수 있습니다. 이후는 숙려·가입의사확인 기간이라 주문을 받을 수 없습니다. 단, 제38222·38223회는 별도 공시(청약 2026.10.15~2026.10.22)라 개인 일반투자자 마감이 10월 19일(월)로 이미 지났습니다.</a:t>
             </a:r>
             <a:endParaRPr lang="en-US" sz="1100" dirty="0"/>
           </a:p>
@@ -29614,7 +29653,7 @@
                 <a:ea typeface="맑은 고딕" pitchFamily="34" charset="-122"/>
                 <a:cs typeface="맑은 고딕" pitchFamily="34" charset="-120"/>
               </a:rPr>
-              <a:t>출처 — 금융감독원 전자공시시스템(DART)에 2026.10.16 올라온 투자설명서 (접수번호 20261016000319)  ·  원금을 잃을 수 있는 상품입니다</a:t>
+              <a:t>출처 — 금융감독원 전자공시시스템(DART)에 2026.10.16·2026.10.14 올라온 투자설명서 (접수번호 20261016000319 · 20261014000084)  ·  원금을 잃을 수 있는 상품입니다</a:t>
             </a:r>
             <a:endParaRPr lang="en-US" sz="850" dirty="0"/>
           </a:p>
@@ -30752,7 +30791,7 @@
                 <a:ea typeface="맑은 고딕" pitchFamily="34" charset="-122"/>
                 <a:cs typeface="맑은 고딕" pitchFamily="34" charset="-120"/>
               </a:rPr>
-              <a:t>출처 — 금융감독원 전자공시시스템(DART)에 2026.10.16 올라온 투자설명서 (접수번호 20261016000319)  ·  원금을 잃을 수 있는 상품입니다</a:t>
+              <a:t>출처 — 금융감독원 전자공시시스템(DART)에 2026.10.16·2026.10.14 올라온 투자설명서 (접수번호 20261016000319 · 20261014000084)  ·  원금을 잃을 수 있는 상품입니다</a:t>
             </a:r>
             <a:endParaRPr lang="en-US" sz="850" dirty="0"/>
           </a:p>
@@ -34190,7 +34229,7 @@
                 <a:ea typeface="맑은 고딕" pitchFamily="34" charset="-122"/>
                 <a:cs typeface="맑은 고딕" pitchFamily="34" charset="-120"/>
               </a:rPr>
-              <a:t>출처 — 금융감독원 전자공시시스템(DART)에 2026.10.16 올라온 투자설명서 (접수번호 20261016000319)  ·  원금을 잃을 수 있는 상품입니다</a:t>
+              <a:t>출처 — 금융감독원 전자공시시스템(DART)에 2026.10.16·2026.10.14 올라온 투자설명서 (접수번호 20261016000319 · 20261014000084)  ·  원금을 잃을 수 있는 상품입니다</a:t>
             </a:r>
             <a:endParaRPr lang="en-US" sz="850" dirty="0"/>
           </a:p>
@@ -35480,7 +35519,46 @@
       </p:sp>
       <p:sp>
         <p:nvSpPr>
-          <p:cNvPr id="37" name="Text 34"/>
+          <p:cNvPr id="36" name="Text 34"/>
+          <p:cNvSpPr/>
+          <p:nvPr/>
+        </p:nvSpPr>
+        <p:spPr>
+          <a:xfrm>
+            <a:off x="566928" y="5669280"/>
+            <a:ext cx="11057839" cy="274320"/>
+          </a:xfrm>
+          <a:prstGeom prst="rect">
+            <a:avLst/>
+          </a:prstGeom>
+          <a:noFill/>
+          <a:ln/>
+        </p:spPr>
+        <p:txBody>
+          <a:bodyPr wrap="square" lIns="0" tIns="0" rIns="0" bIns="0" rtlCol="0" anchor="ctr"/>
+          <a:lstStyle/>
+          <a:p>
+            <a:pPr indent="0" marL="0">
+              <a:buNone/>
+            </a:pPr>
+            <a:r>
+              <a:rPr lang="en-US" sz="1050" b="1" dirty="0">
+                <a:solidFill>
+                  <a:srgbClr val="CB6015"/>
+                </a:solidFill>
+                <a:latin typeface="맑은 고딕" pitchFamily="34" charset="0"/>
+                <a:ea typeface="맑은 고딕" pitchFamily="34" charset="-122"/>
+                <a:cs typeface="맑은 고딕" pitchFamily="34" charset="-120"/>
+              </a:rPr>
+              <a:t>단, 제38222·38223회는 별도 공시(청약 2026.10.15~2026.10.22)라 개인 일반투자자 마감이 10월 19일(월)로 이미 지났습니다.</a:t>
+            </a:r>
+            <a:endParaRPr lang="en-US" sz="1050" dirty="0"/>
+          </a:p>
+        </p:txBody>
+      </p:sp>
+      <p:sp>
+        <p:nvSpPr>
+          <p:cNvPr id="38" name="Text 35"/>
           <p:cNvSpPr/>
           <p:nvPr/>
         </p:nvSpPr>
@@ -35511,7 +35589,7 @@
                 <a:ea typeface="맑은 고딕" pitchFamily="34" charset="-122"/>
                 <a:cs typeface="맑은 고딕" pitchFamily="34" charset="-120"/>
               </a:rPr>
-              <a:t>출처 — 금융감독원 전자공시시스템(DART)에 2026.10.16 올라온 투자설명서 (접수번호 20261016000319)  ·  원금을 잃을 수 있는 상품입니다</a:t>
+              <a:t>출처 — 금융감독원 전자공시시스템(DART)에 2026.10.16·2026.10.14 올라온 투자설명서 (접수번호 20261016000319 · 20261014000084)  ·  원금을 잃을 수 있는 상품입니다</a:t>
             </a:r>
             <a:endParaRPr lang="en-US" sz="850" dirty="0"/>
           </a:p>
@@ -35519,7 +35597,7 @@
       </p:sp>
       <p:sp>
         <p:nvSpPr>
-          <p:cNvPr id="38" name="Text 35"/>
+          <p:cNvPr id="39" name="Text 36"/>
           <p:cNvSpPr/>
           <p:nvPr/>
         </p:nvSpPr>
@@ -36403,7 +36481,7 @@
                 <a:ea typeface="맑은 고딕" pitchFamily="34" charset="-122"/>
                 <a:cs typeface="맑은 고딕" pitchFamily="34" charset="-120"/>
               </a:rPr>
-              <a:t>출처 — 금융감독원 전자공시시스템(DART)에 2026.10.16 올라온 투자설명서 (접수번호 20261016000319)  ·  원금을 잃을 수 있는 상품입니다</a:t>
+              <a:t>출처 — 금융감독원 전자공시시스템(DART)에 2026.10.16·2026.10.14 올라온 투자설명서 (접수번호 20261016000319 · 20261014000084)  ·  원금을 잃을 수 있는 상품입니다</a:t>
             </a:r>
             <a:endParaRPr lang="en-US" sz="850" dirty="0"/>
           </a:p>
@@ -37507,7 +37585,7 @@
                 <a:ea typeface="맑은 고딕" pitchFamily="34" charset="-122"/>
                 <a:cs typeface="맑은 고딕" pitchFamily="34" charset="-120"/>
               </a:rPr>
-              <a:t>출처 — 금융감독원 전자공시시스템(DART)에 2026.10.16 올라온 투자설명서 (접수번호 20261016000319)  ·  원금을 잃을 수 있는 상품입니다</a:t>
+              <a:t>출처 — 금융감독원 전자공시시스템(DART)에 2026.10.16·2026.10.14 올라온 투자설명서 (접수번호 20261016000319 · 20261014000084)  ·  원금을 잃을 수 있는 상품입니다</a:t>
             </a:r>
             <a:endParaRPr lang="en-US" sz="850" dirty="0"/>
           </a:p>
@@ -39140,7 +39218,7 @@
                 <a:ea typeface="맑은 고딕" pitchFamily="34" charset="-122"/>
                 <a:cs typeface="맑은 고딕" pitchFamily="34" charset="-120"/>
               </a:rPr>
-              <a:t>실제로 갈라놓은 건 자산 종류가 아니라 "원금 지키는 선이 얼마나 아래인가"와 "두 자산이 얼마나 같이 움직이는가"였습니다. 제38222회는 선이 45%(이번 주에서 높은 축이라 여유가 적음)에 같이 움직임 0.16, 제38213회는 선이 35%에 같이 움직임 0.96입니다.</a:t>
+              <a:t>실제로 갈라놓은 건 자산 종류가 아니라 "원금 지키는 선이 얼마나 아래인가"와 "기초자산끼리 얼마나 같이 움직이는가"였습니다. 제38222회는 선이 45%(이번 주에서 높은 축이라 여유가 적음)에 가장 따로 노는 쌍 0.16, 제38213회는 선이 35%에 같이 움직임 0.96입니다.</a:t>
             </a:r>
             <a:endParaRPr lang="en-US" sz="1250" dirty="0"/>
           </a:p>
@@ -39207,7 +39285,7 @@
                 <a:ea typeface="맑은 고딕" pitchFamily="34" charset="-122"/>
                 <a:cs typeface="맑은 고딕" pitchFamily="34" charset="-120"/>
               </a:rPr>
-              <a:t>두 자산이 따로 놀수록 "더 많이 떨어진 하나로 판정한다"는 조건에서 크게 불리해집니다. 무엇을 담았느냐보다 이쪽이 결정적입니다.</a:t>
+              <a:t>기초자산끼리 따로 놀수록 "더 많이 떨어진 하나로 판정한다"는 조건에서 크게 불리해집니다. 무엇을 담았느냐보다 이쪽이 결정적입니다.</a:t>
             </a:r>
             <a:endParaRPr lang="en-US" sz="1150" dirty="0"/>
           </a:p>
@@ -39246,7 +39324,7 @@
                 <a:ea typeface="맑은 고딕" pitchFamily="34" charset="-122"/>
                 <a:cs typeface="맑은 고딕" pitchFamily="34" charset="-120"/>
               </a:rPr>
-              <a:t>출처 — 금융감독원 전자공시시스템(DART)에 2026.10.16 올라온 투자설명서 (접수번호 20261016000319)  ·  원금을 잃을 수 있는 상품입니다</a:t>
+              <a:t>출처 — 금융감독원 전자공시시스템(DART)에 2026.10.16·2026.10.14 올라온 투자설명서 (접수번호 20261016000319 · 20261014000084)  ·  원금을 잃을 수 있는 상품입니다</a:t>
             </a:r>
             <a:endParaRPr lang="en-US" sz="850" dirty="0"/>
           </a:p>
@@ -41053,7 +41131,7 @@
                 <a:ea typeface="맑은 고딕" pitchFamily="34" charset="-122"/>
                 <a:cs typeface="맑은 고딕" pitchFamily="34" charset="-120"/>
               </a:rPr>
-              <a:t>출처 — 금융감독원 전자공시시스템(DART)에 2026.10.16 올라온 투자설명서 (접수번호 20261016000319)  ·  원금을 잃을 수 있는 상품입니다</a:t>
+              <a:t>출처 — 금융감독원 전자공시시스템(DART)에 2026.10.16·2026.10.14 올라온 투자설명서 (접수번호 20261016000319 · 20261014000084)  ·  원금을 잃을 수 있는 상품입니다</a:t>
             </a:r>
             <a:endParaRPr lang="en-US" sz="850" dirty="0"/>
           </a:p>
@@ -41559,7 +41637,7 @@
                 <a:ea typeface="맑은 고딕" pitchFamily="34" charset="-122"/>
                 <a:cs typeface="맑은 고딕" pitchFamily="34" charset="-120"/>
               </a:rPr>
-              <a:t>같은 위험을 지고 가장 많이 받는 쪽은 제38207회(연 9.4% · 손실 확률 13.6%)입니다.</a:t>
+              <a:t>같은 위험을 지고 가장 많이 받는 쪽은 값어치 멀쩡한 상품 중에서 제38207회(연 9.4% · 손실 확률 13.6%)입니다.</a:t>
             </a:r>
             <a:endParaRPr lang="en-US" sz="1000" dirty="0"/>
           </a:p>
@@ -41860,7 +41938,7 @@
                 <a:ea typeface="맑은 고딕" pitchFamily="34" charset="-122"/>
                 <a:cs typeface="맑은 고딕" pitchFamily="34" charset="-120"/>
               </a:rPr>
-              <a:t>출처 — 금융감독원 전자공시시스템(DART)에 2026.10.16 올라온 투자설명서 (접수번호 20261016000319)  ·  원금을 잃을 수 있는 상품입니다</a:t>
+              <a:t>출처 — 금융감독원 전자공시시스템(DART)에 2026.10.16·2026.10.14 올라온 투자설명서 (접수번호 20261016000319 · 20261014000084)  ·  원금을 잃을 수 있는 상품입니다</a:t>
             </a:r>
             <a:endParaRPr lang="en-US" sz="850" dirty="0"/>
           </a:p>
@@ -42147,7 +42225,7 @@
                 <a:ea typeface="맑은 고딕" pitchFamily="34" charset="-122"/>
                 <a:cs typeface="맑은 고딕" pitchFamily="34" charset="-120"/>
               </a:rPr>
-              <a:t>삼성전자·SK하이닉스 4종은 기초자산도, 적용 변동성(56.8%)도, 기간(36개월)도 똑같은데 수익률만 갈립니다.</a:t>
+              <a:t>삼성전자·SK하이닉스 4종은 기초자산도, 기간(36개월)도 똑같고 적용 변동성도 56.8~57.4%로 거의 같은데 수익률만 갈립니다.</a:t>
             </a:r>
             <a:endParaRPr lang="en-US" sz="1000" dirty="0"/>
           </a:p>
@@ -42442,7 +42520,7 @@
                 <a:ea typeface="맑은 고딕" pitchFamily="34" charset="-122"/>
                 <a:cs typeface="맑은 고딕" pitchFamily="34" charset="-120"/>
               </a:rPr>
-              <a:t>제38207회(추천 2번) — 값어치 멀쩡한 상품 중 손실 확률 1%당 수익률 1등. 이 우위가 공시 상관 0.22 하나에 얹혀 있는지 흔들어 봤습니다</a:t>
+              <a:t>제38207회(추천 2번) — 값어치 멀쩡한 상품 중 손실 확률 1%당 수익률 1등. 이 우위가 공시 상관 0.22~0.76에 얹혀 있는지 흔들어 봤습니다</a:t>
             </a:r>
             <a:endParaRPr lang="en-US" sz="1200" dirty="0"/>
           </a:p>
@@ -42497,7 +42575,7 @@
                           <a:ea typeface="맑은 고딕" pitchFamily="34" charset="-122"/>
                           <a:cs typeface="맑은 고딕" pitchFamily="34" charset="-120"/>
                         </a:rPr>
-                        <a:t>같이 움직이는 정도</a:t>
+                        <a:t>같이 움직이는 정도 (모든 쌍)</a:t>
                       </a:r>
                       <a:endParaRPr lang="en-US" sz="1100" dirty="0">
                         <a:latin typeface="맑은 고딕" charset="0"/>
@@ -42565,7 +42643,7 @@
                           <a:ea typeface="맑은 고딕" pitchFamily="34" charset="-122"/>
                           <a:cs typeface="맑은 고딕" pitchFamily="34" charset="-120"/>
                         </a:rPr>
-                        <a:t>서류값 0.22</a:t>
+                        <a:t>서류값 0.22~0.76</a:t>
                       </a:r>
                       <a:endParaRPr lang="en-US" sz="1100" dirty="0">
                         <a:latin typeface="맑은 고딕" charset="0"/>
@@ -42633,7 +42711,7 @@
                           <a:ea typeface="맑은 고딕" pitchFamily="34" charset="-122"/>
                           <a:cs typeface="맑은 고딕" pitchFamily="34" charset="-120"/>
                         </a:rPr>
-                        <a:t>0.90</a:t>
+                        <a:t>−0.1</a:t>
                       </a:r>
                       <a:endParaRPr lang="en-US" sz="1100" dirty="0">
                         <a:latin typeface="맑은 고딕" charset="0"/>
@@ -42701,7 +42779,7 @@
                           <a:ea typeface="맑은 고딕" pitchFamily="34" charset="-122"/>
                           <a:cs typeface="맑은 고딕" pitchFamily="34" charset="-120"/>
                         </a:rPr>
-                        <a:t>0.80</a:t>
+                        <a:t>−0.2</a:t>
                       </a:r>
                       <a:endParaRPr lang="en-US" sz="1100" dirty="0">
                         <a:latin typeface="맑은 고딕" charset="0"/>
@@ -42769,7 +42847,7 @@
                           <a:ea typeface="맑은 고딕" pitchFamily="34" charset="-122"/>
                           <a:cs typeface="맑은 고딕" pitchFamily="34" charset="-120"/>
                         </a:rPr>
-                        <a:t>0.70</a:t>
+                        <a:t>−0.3</a:t>
                       </a:r>
                       <a:endParaRPr lang="en-US" sz="1100" dirty="0">
                         <a:latin typeface="맑은 고딕" charset="0"/>
@@ -42837,7 +42915,7 @@
                           <a:ea typeface="맑은 고딕" pitchFamily="34" charset="-122"/>
                           <a:cs typeface="맑은 고딕" pitchFamily="34" charset="-120"/>
                         </a:rPr>
-                        <a:t>0.60</a:t>
+                        <a:t>−0.4</a:t>
                       </a:r>
                       <a:endParaRPr lang="en-US" sz="1100" dirty="0">
                         <a:latin typeface="맑은 고딕" charset="0"/>
@@ -42905,7 +42983,7 @@
                           <a:ea typeface="맑은 고딕" pitchFamily="34" charset="-122"/>
                           <a:cs typeface="맑은 고딕" pitchFamily="34" charset="-120"/>
                         </a:rPr>
-                        <a:t>0.50</a:t>
+                        <a:t>−0.5</a:t>
                       </a:r>
                       <a:endParaRPr lang="en-US" sz="1100" dirty="0">
                         <a:latin typeface="맑은 고딕" charset="0"/>
@@ -43105,7 +43183,7 @@
                           <a:ea typeface="맑은 고딕" pitchFamily="34" charset="-122"/>
                           <a:cs typeface="맑은 고딕" pitchFamily="34" charset="-120"/>
                         </a:rPr>
-                        <a:t>11.3%</a:t>
+                        <a:t>14.5%</a:t>
                       </a:r>
                       <a:endParaRPr lang="en-US" sz="1100" dirty="0">
                         <a:latin typeface="맑은 고딕" charset="0"/>
@@ -43170,7 +43248,7 @@
                           <a:ea typeface="맑은 고딕" pitchFamily="34" charset="-122"/>
                           <a:cs typeface="맑은 고딕" pitchFamily="34" charset="-120"/>
                         </a:rPr>
-                        <a:t>12.3%</a:t>
+                        <a:t>15.2%</a:t>
                       </a:r>
                       <a:endParaRPr lang="en-US" sz="1100" dirty="0">
                         <a:latin typeface="맑은 고딕" charset="0"/>
@@ -43235,7 +43313,7 @@
                           <a:ea typeface="맑은 고딕" pitchFamily="34" charset="-122"/>
                           <a:cs typeface="맑은 고딕" pitchFamily="34" charset="-120"/>
                         </a:rPr>
-                        <a:t>13.1%</a:t>
+                        <a:t>15.8%</a:t>
                       </a:r>
                       <a:endParaRPr lang="en-US" sz="1100" dirty="0">
                         <a:latin typeface="맑은 고딕" charset="0"/>
@@ -43300,7 +43378,7 @@
                           <a:ea typeface="맑은 고딕" pitchFamily="34" charset="-122"/>
                           <a:cs typeface="맑은 고딕" pitchFamily="34" charset="-120"/>
                         </a:rPr>
-                        <a:t>14.0%</a:t>
+                        <a:t>16.3%</a:t>
                       </a:r>
                       <a:endParaRPr lang="en-US" sz="1100" dirty="0">
                         <a:latin typeface="맑은 고딕" charset="0"/>
@@ -43365,7 +43443,7 @@
                           <a:ea typeface="맑은 고딕" pitchFamily="34" charset="-122"/>
                           <a:cs typeface="맑은 고딕" pitchFamily="34" charset="-120"/>
                         </a:rPr>
-                        <a:t>14.8%</a:t>
+                        <a:t>16.7%</a:t>
                       </a:r>
                       <a:endParaRPr lang="en-US" sz="1100" dirty="0">
                         <a:latin typeface="맑은 고딕" charset="0"/>
@@ -43562,7 +43640,7 @@
                           <a:ea typeface="맑은 고딕" pitchFamily="34" charset="-122"/>
                           <a:cs typeface="맑은 고딕" pitchFamily="34" charset="-120"/>
                         </a:rPr>
-                        <a:t>0.83%</a:t>
+                        <a:t>0.65%</a:t>
                       </a:r>
                       <a:endParaRPr lang="en-US" sz="1100" dirty="0">
                         <a:latin typeface="맑은 고딕" charset="0"/>
@@ -43627,7 +43705,7 @@
                           <a:ea typeface="맑은 고딕" pitchFamily="34" charset="-122"/>
                           <a:cs typeface="맑은 고딕" pitchFamily="34" charset="-120"/>
                         </a:rPr>
-                        <a:t>0.76%</a:t>
+                        <a:t>0.62%</a:t>
                       </a:r>
                       <a:endParaRPr lang="en-US" sz="1100" dirty="0">
                         <a:latin typeface="맑은 고딕" charset="0"/>
@@ -43692,7 +43770,7 @@
                           <a:ea typeface="맑은 고딕" pitchFamily="34" charset="-122"/>
                           <a:cs typeface="맑은 고딕" pitchFamily="34" charset="-120"/>
                         </a:rPr>
-                        <a:t>0.72%</a:t>
+                        <a:t>0.59%</a:t>
                       </a:r>
                       <a:endParaRPr lang="en-US" sz="1100" dirty="0">
                         <a:latin typeface="맑은 고딕" charset="0"/>
@@ -43757,7 +43835,7 @@
                           <a:ea typeface="맑은 고딕" pitchFamily="34" charset="-122"/>
                           <a:cs typeface="맑은 고딕" pitchFamily="34" charset="-120"/>
                         </a:rPr>
-                        <a:t>0.67%</a:t>
+                        <a:t>0.58%</a:t>
                       </a:r>
                       <a:endParaRPr lang="en-US" sz="1100" dirty="0">
                         <a:latin typeface="맑은 고딕" charset="0"/>
@@ -43822,7 +43900,7 @@
                           <a:ea typeface="맑은 고딕" pitchFamily="34" charset="-122"/>
                           <a:cs typeface="맑은 고딕" pitchFamily="34" charset="-120"/>
                         </a:rPr>
-                        <a:t>0.64%</a:t>
+                        <a:t>0.56%</a:t>
                       </a:r>
                       <a:endParaRPr lang="en-US" sz="1100" dirty="0">
                         <a:latin typeface="맑은 고딕" charset="0"/>
@@ -43911,7 +43989,7 @@
                 <a:ea typeface="맑은 고딕" pitchFamily="34" charset="-122"/>
                 <a:cs typeface="맑은 고딕" pitchFamily="34" charset="-120"/>
               </a:rPr>
-              <a:t>같이 움직이는 정도를 0.50까지만 낮춰도 손실 확률 1%당 수익률이 0.64%로 제38205회(0.67%)보다 낮아져 1등을 내줍니다(0.50이면 손실 확률 13.7% → 14.8%). 이 상품의 우위는 두 자산이 서류값 0.22만큼 같이 움직인다는 전제에 기대고 있습니다.</a:t>
+              <a:t>같이 움직이는 정도를 서류값보다 0.1씩만 낮춰도 손실 확률 1%당 수익률이 0.65%로 제38205회(0.67%)보다 낮아져 1등을 내줍니다(0.5씩 낮추면 손실 확률 13.7% → 16.7%). 이 상품의 우위는 세 자산이 서류에 적힌 만큼(0.22~0.76) 같이 움직인다는 전제에 기대고 있습니다. 칸 머리의 −0.1 등은 3쌍 모두를 서류값에서 그만큼 낮춘 것입니다(0 아래로는 내리지 않음).</a:t>
             </a:r>
             <a:endParaRPr lang="en-US" sz="1000" dirty="0"/>
           </a:p>
@@ -44034,7 +44112,7 @@
                 <a:ea typeface="맑은 고딕" pitchFamily="34" charset="-122"/>
                 <a:cs typeface="맑은 고딕" pitchFamily="34" charset="-120"/>
               </a:rPr>
-              <a:t>출처 — 금융감독원 전자공시시스템(DART)에 2026.10.16 올라온 투자설명서 (접수번호 20261016000319)  ·  원금을 잃을 수 있는 상품입니다</a:t>
+              <a:t>출처 — 금융감독원 전자공시시스템(DART)에 2026.10.16·2026.10.14 올라온 투자설명서 (접수번호 20261016000319 · 20261014000084)  ·  원금을 잃을 수 있는 상품입니다</a:t>
             </a:r>
             <a:endParaRPr lang="en-US" sz="850" dirty="0"/>
           </a:p>
@@ -45504,7 +45582,7 @@
                 <a:ea typeface="맑은 고딕" pitchFamily="34" charset="-122"/>
                 <a:cs typeface="맑은 고딕" pitchFamily="34" charset="-120"/>
               </a:rPr>
-              <a:t>둘이 같이 움직임 0.17</a:t>
+              <a:t>가장 따로 노는 쌍 0.17</a:t>
             </a:r>
             <a:endParaRPr lang="en-US" sz="950" dirty="0"/>
           </a:p>
@@ -45621,7 +45699,7 @@
                 <a:ea typeface="맑은 고딕" pitchFamily="34" charset="-122"/>
                 <a:cs typeface="맑은 고딕" pitchFamily="34" charset="-120"/>
               </a:rPr>
-              <a:t>출처 — 금융감독원 전자공시시스템(DART)에 2026.10.16 올라온 투자설명서 (접수번호 20261016000319)  ·  원금을 잃을 수 있는 상품입니다</a:t>
+              <a:t>출처 — 금융감독원 전자공시시스템(DART)에 2026.10.16·2026.10.14 올라온 투자설명서 (접수번호 20261016000319 · 20261014000084)  ·  원금을 잃을 수 있는 상품입니다</a:t>
             </a:r>
             <a:endParaRPr lang="en-US" sz="850" dirty="0"/>
           </a:p>

--- a/els-analysis-deck.pptx
+++ b/els-analysis-deck.pptx
@@ -6830,7 +6830,7 @@
                 <a:ea typeface="맑은 고딕" pitchFamily="34" charset="-122"/>
                 <a:cs typeface="맑은 고딕" pitchFamily="34" charset="-120"/>
               </a:rPr>
-              <a:t>홈페이지 확인 2026.10.20(화) 11:12 — 현재 청약 진행중 34건.  개인 일반투자자 청약 마감은 10월 23일(금)입니다.</a:t>
+              <a:t>홈페이지 확인 2026.10.20(화) 11:16 — 현재 청약 진행중 34건.  개인 일반투자자 청약 마감은 10월 23일(금)입니다.</a:t>
             </a:r>
             <a:endParaRPr lang="en-US" sz="1200" dirty="0"/>
           </a:p>
@@ -28874,7 +28874,7 @@
                 <a:ea typeface="맑은 고딕" pitchFamily="34" charset="-122"/>
                 <a:cs typeface="맑은 고딕" pitchFamily="34" charset="-120"/>
               </a:rPr>
-              <a:t>홈페이지에는 2026.10.19~2026.10.28로 나오지만 개인 일반투자자는 10월 23일(금)까지만 청약할 수 있습니다. 이후는 숙려·가입의사확인 기간이라 주문을 받을 수 없습니다. 단, 제38222·38223회는 별도 공시(청약 2026.10.15~2026.10.22)라 개인 일반투자자 마감이 10월 19일(월)로 이미 지났습니다.</a:t>
+              <a:t>홈페이지에는 2026.10.19~2026.10.28로 나오지만 개인 일반투자자는 10월 23일(금)까지만 청약할 수 있습니다. 제38222·38223회는 별도 공시라 10월 19일(월)에 이미 마감됐습니다.</a:t>
             </a:r>
             <a:endParaRPr lang="en-US" sz="1100" dirty="0"/>
           </a:p>

--- a/els-analysis-deck.pptx
+++ b/els-analysis-deck.pptx
@@ -6239,7 +6239,7 @@
                 <a:ea typeface="맑은 고딕" pitchFamily="34" charset="-122"/>
                 <a:cs typeface="맑은 고딕" pitchFamily="34" charset="-120"/>
               </a:rPr>
-              <a:t>홈페이지 확인 2026.10.26(월) 08:21 — 현재 청약 진행중 18건.  개인 일반투자자 청약 마감은 10월 30일(금)입니다.</a:t>
+              <a:t>홈페이지 확인 2026.10.26(월) 08:28 — 현재 청약 진행중 18건.  개인 일반투자자 청약 마감은 10월 30일(금)입니다.</a:t>
             </a:r>
             <a:endParaRPr lang="en-US" sz="1200" dirty="0"/>
           </a:p>
@@ -7787,7 +7787,7 @@
                 <a:ea typeface="맑은 고딕" pitchFamily="34" charset="-122"/>
                 <a:cs typeface="맑은 고딕" pitchFamily="34" charset="-120"/>
               </a:rPr>
-              <a:t>지는 위험 1%당 받는 수익률이 권할 수 있는 상품 중에서 가장 큽니다 — 같은 위험이면 그만큼 많이 줍니다.</a:t>
+              <a:t>지는 위험 1%당 받는 수익률이 값어치 멀쩡한 상품 중에서는 앞 자리에 오른 제38226회 다음으로 큽니다 — 같은 위험이면 그만큼 많이 줍니다.</a:t>
             </a:r>
             <a:endParaRPr lang="en-US" sz="1150" dirty="0"/>
           </a:p>
